--- a/Planning docs/Slides/lesson-6-2-teacher-slides.pptx
+++ b/Planning docs/Slides/lesson-6-2-teacher-slides.pptx
@@ -516,7 +516,7 @@
           <a:p>
             <a:r>
               <a:rPr lang="en-US" dirty="0"/>
-              <a:t>Title slide for Week 6 Day 2. Nonfiction Unit.</a:t>
+              <a:t>Lesson 6.2. Reading: 📰 Read: How Does a Letter Travel?.</a:t>
             </a:r>
             <a:endParaRPr lang="en-US" dirty="0"/>
           </a:p>
@@ -604,7 +604,7 @@
           <a:p>
             <a:r>
               <a:rPr lang="en-US" dirty="0"/>
-              <a:t>Review morphology focus. Have students identify the base word and affix in each example.</a:t>
+              <a:t>Each word appears in the chapters read this week, in the author’s own sentence.</a:t>
             </a:r>
             <a:endParaRPr lang="en-US" dirty="0"/>
           </a:p>
@@ -692,7 +692,7 @@
           <a:p>
             <a:r>
               <a:rPr lang="en-US" dirty="0"/>
-              <a:t>Go through each vocabulary word. For flip cards, have students guess the definition before revealing.</a:t>
+              <a:t>Answers: Stanley, California, A, Mississippi</a:t>
             </a:r>
             <a:endParaRPr lang="en-US" dirty="0"/>
           </a:p>
@@ -780,7 +780,7 @@
           <a:p>
             <a:r>
               <a:rPr lang="en-US" dirty="0"/>
-              <a:t>Give students time to sort the words. Use the chat or paper to organize.</a:t>
+              <a:t>Answers: Stanley, California, A, Mississippi</a:t>
             </a:r>
             <a:endParaRPr lang="en-US" dirty="0"/>
           </a:p>
@@ -868,7 +868,7 @@
           <a:p>
             <a:r>
               <a:rPr lang="en-US" dirty="0"/>
-              <a:t>Review each column. Ask: what pattern do you see in each group?</a:t>
+              <a:t>Compound word: mailbox, postcard, landmark, notebook | Not a compound word: compass, envelope, journey, letter</a:t>
             </a:r>
             <a:endParaRPr lang="en-US" dirty="0"/>
           </a:p>
@@ -956,7 +956,7 @@
           <a:p>
             <a:r>
               <a:rPr lang="en-US" dirty="0"/>
-              <a:t>Reading focus slide. Use pause-and-think questions during reading. Copywork can be done after reading.</a:t>
+              <a:t>Compound word: mailbox, postcard, landmark, notebook | Not a compound word: compass, envelope, journey, letter</a:t>
             </a:r>
             <a:endParaRPr lang="en-US" dirty="0"/>
           </a:p>
@@ -1044,7 +1044,7 @@
           <a:p>
             <a:r>
               <a:rPr lang="en-US" dirty="0"/>
-              <a:t>Transition to the writing workshop assignment in Canvas.</a:t>
+              <a:t>Read the chapters, then return to the pause questions.</a:t>
             </a:r>
             <a:endParaRPr lang="en-US" dirty="0"/>
           </a:p>
@@ -1132,7 +1132,7 @@
           <a:p>
             <a:r>
               <a:rPr lang="en-US" dirty="0"/>
-              <a:t>Read the prompt aloud once. Give students about 1 minute to read it again silently and think. Remind them: there is no wrong answer — just write what comes to mind. Advance to the writing slide when ready.</a:t>
+              <a:t>Read the prompt aloud. Give students a moment to think before writing.</a:t>
             </a:r>
             <a:endParaRPr lang="en-US" dirty="0"/>
           </a:p>
@@ -1220,7 +1220,7 @@
           <a:p>
             <a:r>
               <a:rPr lang="en-US" dirty="0"/>
-              <a:t>Set a 5-minute timer. Walk the room quietly. If a student stops, gently encourage them: "Keep writing — even one more sentence." The goal is sustained writing, not perfection. Do not interrupt to correct spelling or grammar during this time.</a:t>
+              <a:t>Five minutes of sustained writing. Stamina over polish. Do not correct spelling now.</a:t>
             </a:r>
             <a:endParaRPr lang="en-US" dirty="0"/>
           </a:p>
@@ -1308,7 +1308,7 @@
           <a:p>
             <a:r>
               <a:rPr lang="en-US" dirty="0"/>
-              <a:t>Set a 1-minute timer. Remind students: we are only fixing ONE thing today — Did I build up the strangeness step by step instead of jumping to the weirdest part?. They should also do a quick conventions check (capitals, punctuation, spelling). They do NOT need to rewrite — just fix and improve. Revision = improving ideas; Editing = fixing conventions. Keep them separate in your language.</a:t>
+              <a:t>One fix only. Editing is conventions; revision is ideas. Name which one you are asking for.</a:t>
             </a:r>
             <a:endParaRPr lang="en-US" dirty="0"/>
           </a:p>
@@ -1396,7 +1396,7 @@
           <a:p>
             <a:r>
               <a:rPr lang="en-US" dirty="0"/>
-              <a:t>Call on 3-5 students to share. Respond with genuine interest: "I love how you described that" or "That's a really interesting idea." Avoid correcting grammar or spelling during share time — this is about celebrating writing. If time is short, have 2-3 students share in chat instead.</a:t>
+              <a:t>Two or three volunteers. Praise something specific in each.</a:t>
             </a:r>
             <a:endParaRPr lang="en-US" dirty="0"/>
           </a:p>
@@ -1484,7 +1484,7 @@
           <a:p>
             <a:r>
               <a:rPr lang="en-US" dirty="0"/>
-              <a:t>Review the big question and reading lens with students before reading.</a:t>
+              <a:t>Reading lens: Good nonfiction readers look for the central idea as they read. The central idea is the most important point the author wants you to understand. Supporting details back it up.</a:t>
             </a:r>
             <a:endParaRPr lang="en-US" dirty="0"/>
           </a:p>
@@ -1572,7 +1572,8 @@
           <a:p>
             <a:r>
               <a:rPr lang="en-US" dirty="0"/>
-              <a:t>Read the model sentence aloud. Ask students: what do you notice about the punctuation and capitalization?</a:t>
+              <a:t>Corrected: Corrected: 
+Look for: After the letters are sorted by ZIP code , they are loaded onto trucks , trains , or airplanes .</a:t>
             </a:r>
             <a:endParaRPr lang="en-US" dirty="0"/>
           </a:p>
@@ -1660,7 +1661,8 @@
           <a:p>
             <a:r>
               <a:rPr lang="en-US" dirty="0"/>
-              <a:t>Give students 1-2 minutes to fix the sentence. Walk the room and check.</a:t>
+              <a:t>Corrected: Corrected: 
+Look for: After the letters are sorted by ZIP code , they are loaded onto trucks , trains , or airplanes .</a:t>
             </a:r>
             <a:endParaRPr lang="en-US" dirty="0"/>
           </a:p>
@@ -1748,7 +1750,7 @@
           <a:p>
             <a:r>
               <a:rPr lang="en-US" dirty="0"/>
-              <a:t>Reveal the corrected version. Point out each fix: capitalization, punctuation, spelling.</a:t>
+              <a:t>Break the word into base + word part. Ask what the part adds to the meaning.</a:t>
             </a:r>
             <a:endParaRPr lang="en-US" dirty="0"/>
           </a:p>
@@ -2129,8 +2131,8 @@
         </p:nvSpPr>
         <p:spPr>
           <a:xfrm>
-            <a:off x="457200" y="914400"/>
-            <a:ext cx="8229600" cy="1097280"/>
+            <a:off x="0" y="822960"/>
+            <a:ext cx="9144000" cy="822960"/>
           </a:xfrm>
           <a:prstGeom prst="rect">
             <a:avLst/>
@@ -2146,7 +2148,43 @@
               <a:buNone/>
             </a:pPr>
             <a:r>
-              <a:rPr lang="en-US" sz="4000" b="1" dirty="0">
+              <a:rPr lang="en-US" sz="5200" dirty="0">
+                <a:solidFill>
+                  <a:srgbClr val="000000"/>
+                </a:solidFill>
+              </a:rPr>
+              <a:t>🗺️</a:t>
+            </a:r>
+            <a:endParaRPr lang="en-US" sz="5200" dirty="0"/>
+          </a:p>
+        </p:txBody>
+      </p:sp>
+      <p:sp>
+        <p:nvSpPr>
+          <p:cNvPr id="3" name="Text 1"/>
+          <p:cNvSpPr/>
+          <p:nvPr/>
+        </p:nvSpPr>
+        <p:spPr>
+          <a:xfrm>
+            <a:off x="457200" y="1691640"/>
+            <a:ext cx="8229600" cy="566928"/>
+          </a:xfrm>
+          <a:prstGeom prst="rect">
+            <a:avLst/>
+          </a:prstGeom>
+          <a:noFill/>
+          <a:ln/>
+        </p:spPr>
+        <p:txBody>
+          <a:bodyPr wrap="square" lIns="0" tIns="0" rIns="0" bIns="0" rtlCol="0" anchor="ctr"/>
+          <a:lstStyle/>
+          <a:p>
+            <a:pPr algn="ctr" indent="0" marL="0">
+              <a:buNone/>
+            </a:pPr>
+            <a:r>
+              <a:rPr lang="en-US" sz="2600" b="1" dirty="0">
                 <a:solidFill>
                   <a:srgbClr val="FFFFFF"/>
                 </a:solidFill>
@@ -2154,22 +2192,22 @@
                 <a:ea typeface="Calibri" pitchFamily="34" charset="-122"/>
                 <a:cs typeface="Calibri" pitchFamily="34" charset="-120"/>
               </a:rPr>
-              <a:t>🗺️  Week 6 · Day 2</a:t>
-            </a:r>
-            <a:endParaRPr lang="en-US" sz="4000" dirty="0"/>
-          </a:p>
-        </p:txBody>
-      </p:sp>
-      <p:sp>
-        <p:nvSpPr>
-          <p:cNvPr id="3" name="Text 1"/>
-          <p:cNvSpPr/>
-          <p:nvPr/>
-        </p:nvSpPr>
-        <p:spPr>
-          <a:xfrm>
-            <a:off x="457200" y="2103120"/>
-            <a:ext cx="8229600" cy="731520"/>
+              <a:t>Nonfiction: Maps, Mail &amp; Places</a:t>
+            </a:r>
+            <a:endParaRPr lang="en-US" sz="2600" dirty="0"/>
+          </a:p>
+        </p:txBody>
+      </p:sp>
+      <p:sp>
+        <p:nvSpPr>
+          <p:cNvPr id="4" name="Text 2"/>
+          <p:cNvSpPr/>
+          <p:nvPr/>
+        </p:nvSpPr>
+        <p:spPr>
+          <a:xfrm>
+            <a:off x="457200" y="2331720"/>
+            <a:ext cx="8229600" cy="411480"/>
           </a:xfrm>
           <a:prstGeom prst="rect">
             <a:avLst/>
@@ -2185,7 +2223,7 @@
               <a:buNone/>
             </a:pPr>
             <a:r>
-              <a:rPr lang="en-US" sz="1800" dirty="0">
+              <a:rPr lang="en-US" sz="2000" dirty="0">
                 <a:solidFill>
                   <a:srgbClr val="5CB85C"/>
                 </a:solidFill>
@@ -2193,22 +2231,22 @@
                 <a:ea typeface="Calibri" pitchFamily="34" charset="-122"/>
                 <a:cs typeface="Calibri" pitchFamily="34" charset="-120"/>
               </a:rPr>
-              <a:t>Nonfiction Unit — Lesson 6.2</a:t>
-            </a:r>
-            <a:endParaRPr lang="en-US" sz="1800" dirty="0"/>
-          </a:p>
-        </p:txBody>
-      </p:sp>
-      <p:sp>
-        <p:nvSpPr>
-          <p:cNvPr id="4" name="Text 2"/>
-          <p:cNvSpPr/>
-          <p:nvPr/>
-        </p:nvSpPr>
-        <p:spPr>
-          <a:xfrm>
-            <a:off x="457200" y="4114800"/>
-            <a:ext cx="8229600" cy="457200"/>
+              <a:t>Lesson 6.2  ·  📰 Read: How Does a Letter Travel?</a:t>
+            </a:r>
+            <a:endParaRPr lang="en-US" sz="2000" dirty="0"/>
+          </a:p>
+        </p:txBody>
+      </p:sp>
+      <p:sp>
+        <p:nvSpPr>
+          <p:cNvPr id="5" name="Text 3"/>
+          <p:cNvSpPr/>
+          <p:nvPr/>
+        </p:nvSpPr>
+        <p:spPr>
+          <a:xfrm>
+            <a:off x="457200" y="2880360"/>
+            <a:ext cx="8229600" cy="320040"/>
           </a:xfrm>
           <a:prstGeom prst="rect">
             <a:avLst/>
@@ -2224,17 +2262,17 @@
               <a:buNone/>
             </a:pPr>
             <a:r>
-              <a:rPr lang="en-US" sz="1300" dirty="0">
-                <a:solidFill>
-                  <a:srgbClr val="AAAAAA"/>
-                </a:solidFill>
-                <a:latin typeface="Calibri" pitchFamily="34" charset="0"/>
-                <a:ea typeface="Calibri" pitchFamily="34" charset="-122"/>
-                <a:cs typeface="Calibri" pitchFamily="34" charset="-120"/>
-              </a:rPr>
-              <a:t>Optima Academy Online · 3rd Grade ELA</a:t>
-            </a:r>
-            <a:endParaRPr lang="en-US" sz="1300" dirty="0"/>
+              <a:rPr lang="en-US" sz="1400" dirty="0">
+                <a:solidFill>
+                  <a:srgbClr val="C9BCE4"/>
+                </a:solidFill>
+                <a:latin typeface="Calibri" pitchFamily="34" charset="0"/>
+                <a:ea typeface="Calibri" pitchFamily="34" charset="-122"/>
+                <a:cs typeface="Calibri" pitchFamily="34" charset="-120"/>
+              </a:rPr>
+              <a:t>Grade 3 ELA  ·  Virtue: Diligence</a:t>
+            </a:r>
+            <a:endParaRPr lang="en-US" sz="1400" dirty="0"/>
           </a:p>
         </p:txBody>
       </p:sp>
@@ -2272,65 +2310,62 @@
       </p:grpSpPr>
       <p:sp>
         <p:nvSpPr>
-          <p:cNvPr id="2" name="Text 0"/>
-          <p:cNvSpPr/>
-          <p:nvPr/>
-        </p:nvSpPr>
-        <p:spPr>
-          <a:xfrm>
-            <a:off x="365760" y="164592"/>
-            <a:ext cx="8412480" cy="566928"/>
-          </a:xfrm>
-          <a:prstGeom prst="rect">
-            <a:avLst/>
-          </a:prstGeom>
-          <a:noFill/>
-          <a:ln/>
-        </p:spPr>
-        <p:txBody>
-          <a:bodyPr wrap="square" lIns="0" tIns="0" rIns="0" bIns="0" rtlCol="0" anchor="ctr"/>
-          <a:lstStyle/>
-          <a:p>
-            <a:pPr algn="l" indent="0" marL="0">
-              <a:buNone/>
-            </a:pPr>
-            <a:r>
-              <a:rPr lang="en-US" sz="2800" b="1" dirty="0">
-                <a:solidFill>
-                  <a:srgbClr val="0E1C42"/>
-                </a:solidFill>
-                <a:latin typeface="Calibri" pitchFamily="34" charset="0"/>
-                <a:ea typeface="Calibri" pitchFamily="34" charset="-122"/>
-                <a:cs typeface="Calibri" pitchFamily="34" charset="-120"/>
-              </a:rPr>
-              <a:t>🌱 Morphology: Prefix mis- means wrong</a:t>
-            </a:r>
-            <a:endParaRPr lang="en-US" sz="2800" dirty="0"/>
-          </a:p>
-        </p:txBody>
-      </p:sp>
-      <p:sp>
-        <p:nvSpPr>
-          <p:cNvPr id="3" name="Shape 1"/>
-          <p:cNvSpPr/>
-          <p:nvPr/>
-        </p:nvSpPr>
-        <p:spPr>
-          <a:xfrm>
-            <a:off x="365760" y="749808"/>
-            <a:ext cx="8412480" cy="0"/>
-          </a:xfrm>
-          <a:prstGeom prst="line">
-            <a:avLst/>
-          </a:prstGeom>
-          <a:noFill/>
-          <a:ln w="19050">
-            <a:solidFill>
-              <a:srgbClr val="8B6FC0"/>
-            </a:solidFill>
-            <a:prstDash val="solid"/>
-          </a:ln>
-        </p:spPr>
+          <p:cNvPr id="2" name="Shape 0"/>
+          <p:cNvSpPr/>
+          <p:nvPr/>
+        </p:nvSpPr>
+        <p:spPr>
+          <a:xfrm>
+            <a:off x="0" y="0"/>
+            <a:ext cx="9144000" cy="566928"/>
+          </a:xfrm>
+          <a:prstGeom prst="rect">
+            <a:avLst/>
+          </a:prstGeom>
+          <a:solidFill>
+            <a:srgbClr val="55C8E8"/>
+          </a:solidFill>
+          <a:ln/>
+        </p:spPr>
+      </p:sp>
+      <p:sp>
+        <p:nvSpPr>
+          <p:cNvPr id="3" name="Text 1"/>
+          <p:cNvSpPr/>
+          <p:nvPr/>
+        </p:nvSpPr>
+        <p:spPr>
+          <a:xfrm>
+            <a:off x="365760" y="54864"/>
+            <a:ext cx="8412480" cy="457200"/>
+          </a:xfrm>
+          <a:prstGeom prst="rect">
+            <a:avLst/>
+          </a:prstGeom>
+          <a:noFill/>
+          <a:ln/>
+        </p:spPr>
+        <p:txBody>
+          <a:bodyPr wrap="square" lIns="0" tIns="0" rIns="0" bIns="0" rtlCol="0" anchor="ctr"/>
+          <a:lstStyle/>
+          <a:p>
+            <a:pPr indent="0" marL="0">
+              <a:buNone/>
+            </a:pPr>
+            <a:r>
+              <a:rPr lang="en-US" sz="2200" b="1" dirty="0">
+                <a:solidFill>
+                  <a:srgbClr val="FFFFFF"/>
+                </a:solidFill>
+                <a:latin typeface="Calibri" pitchFamily="34" charset="0"/>
+                <a:ea typeface="Calibri" pitchFamily="34" charset="-122"/>
+                <a:cs typeface="Calibri" pitchFamily="34" charset="-120"/>
+              </a:rPr>
+              <a:t>🔤  Vocabulary</a:t>
+            </a:r>
+            <a:endParaRPr lang="en-US" sz="2200" dirty="0"/>
+          </a:p>
+        </p:txBody>
       </p:sp>
       <p:sp>
         <p:nvSpPr>
@@ -2340,32 +2375,32 @@
         </p:nvSpPr>
         <p:spPr>
           <a:xfrm>
-            <a:off x="457200" y="1005840"/>
-            <a:ext cx="8046720" cy="292608"/>
-          </a:xfrm>
-          <a:prstGeom prst="rect">
-            <a:avLst/>
-          </a:prstGeom>
-          <a:noFill/>
-          <a:ln/>
-        </p:spPr>
-        <p:txBody>
-          <a:bodyPr wrap="square" lIns="0" tIns="0" rIns="0" bIns="0" rtlCol="0" anchor="ctr"/>
-          <a:lstStyle/>
-          <a:p>
-            <a:pPr indent="0" marL="0">
-              <a:buNone/>
-            </a:pPr>
-            <a:r>
-              <a:rPr lang="en-US" sz="1100" b="1" spc="200" kern="0" dirty="0">
-                <a:solidFill>
-                  <a:srgbClr val="8B6FC0"/>
-                </a:solidFill>
-                <a:latin typeface="Calibri" pitchFamily="34" charset="0"/>
-                <a:ea typeface="Calibri" pitchFamily="34" charset="-122"/>
-                <a:cs typeface="Calibri" pitchFamily="34" charset="-120"/>
-              </a:rPr>
-              <a:t>MATCH THE WORDS</a:t>
+            <a:off x="365760" y="804672"/>
+            <a:ext cx="8229600" cy="237744"/>
+          </a:xfrm>
+          <a:prstGeom prst="rect">
+            <a:avLst/>
+          </a:prstGeom>
+          <a:noFill/>
+          <a:ln/>
+        </p:spPr>
+        <p:txBody>
+          <a:bodyPr wrap="square" lIns="0" tIns="0" rIns="0" bIns="0" rtlCol="0" anchor="ctr"/>
+          <a:lstStyle/>
+          <a:p>
+            <a:pPr indent="0" marL="0">
+              <a:buNone/>
+            </a:pPr>
+            <a:r>
+              <a:rPr lang="en-US" sz="1100" b="1" spc="100" kern="0" dirty="0">
+                <a:solidFill>
+                  <a:srgbClr val="55C8E8"/>
+                </a:solidFill>
+                <a:latin typeface="Calibri" pitchFamily="34" charset="0"/>
+                <a:ea typeface="Calibri" pitchFamily="34" charset="-122"/>
+                <a:cs typeface="Calibri" pitchFamily="34" charset="-120"/>
+              </a:rPr>
+              <a:t>THIS WEEK’S WORDS</a:t>
             </a:r>
             <a:endParaRPr lang="en-US" sz="1100" dirty="0"/>
           </a:p>
@@ -2379,16 +2414,16 @@
         </p:nvSpPr>
         <p:spPr>
           <a:xfrm>
-            <a:off x="457200" y="1371600"/>
-            <a:ext cx="8229600" cy="411480"/>
+            <a:off x="365760" y="1097280"/>
+            <a:ext cx="8412480" cy="658368"/>
           </a:xfrm>
           <a:prstGeom prst="roundRect">
             <a:avLst>
-              <a:gd name="adj" fmla="val 22222"/>
+              <a:gd name="adj" fmla="val 13889"/>
             </a:avLst>
           </a:prstGeom>
           <a:solidFill>
-            <a:srgbClr val="F0E8FF"/>
+            <a:srgbClr val="E5F7FC"/>
           </a:solidFill>
           <a:ln/>
           <a:effectLst>
@@ -2408,24 +2443,38 @@
         </p:nvSpPr>
         <p:spPr>
           <a:xfrm>
-            <a:off x="640080" y="1417320"/>
-            <a:ext cx="7863840" cy="320040"/>
-          </a:xfrm>
-          <a:prstGeom prst="rect">
-            <a:avLst/>
-          </a:prstGeom>
-          <a:noFill/>
-          <a:ln/>
-        </p:spPr>
-        <p:txBody>
-          <a:bodyPr wrap="square" lIns="0" tIns="0" rIns="0" bIns="0" rtlCol="0" anchor="ctr"/>
-          <a:lstStyle/>
-          <a:p>
-            <a:pPr indent="0" marL="0">
-              <a:buNone/>
-            </a:pPr>
-            <a:r>
-              <a:rPr lang="en-US" sz="1500" dirty="0">
+            <a:off x="594360" y="1225296"/>
+            <a:ext cx="7863840" cy="420624"/>
+          </a:xfrm>
+          <a:prstGeom prst="rect">
+            <a:avLst/>
+          </a:prstGeom>
+          <a:noFill/>
+          <a:ln/>
+        </p:spPr>
+        <p:txBody>
+          <a:bodyPr wrap="square" lIns="0" tIns="0" rIns="0" bIns="0" rtlCol="0" anchor="ctr"/>
+          <a:lstStyle/>
+          <a:p>
+            <a:pPr indent="0" marL="0">
+              <a:buNone/>
+            </a:pPr>
+            <a:r>
+              <a:rPr lang="en-US" sz="1700" b="1" dirty="0">
+                <a:solidFill>
+                  <a:srgbClr val="0E1C42"/>
+                </a:solidFill>
+                <a:latin typeface="Calibri" pitchFamily="34" charset="0"/>
+                <a:ea typeface="Calibri" pitchFamily="34" charset="-122"/>
+                <a:cs typeface="Calibri" pitchFamily="34" charset="-120"/>
+              </a:rPr>
+              <a:t>map  </a:t>
+            </a:r>
+            <a:pPr indent="0" marL="0">
+              <a:buNone/>
+            </a:pPr>
+            <a:r>
+              <a:rPr lang="en-US" sz="1400" dirty="0">
                 <a:solidFill>
                   <a:srgbClr val="1E293B"/>
                 </a:solidFill>
@@ -2433,9 +2482,9 @@
                 <a:ea typeface="Calibri" pitchFamily="34" charset="-122"/>
                 <a:cs typeface="Calibri" pitchFamily="34" charset="-120"/>
               </a:rPr>
-              <a:t>misread → read</a:t>
-            </a:r>
-            <a:endParaRPr lang="en-US" sz="1500" dirty="0"/>
+              <a:t>A drawing that shows what a place looks like from above.</a:t>
+            </a:r>
+            <a:endParaRPr lang="en-US" sz="1700" dirty="0"/>
           </a:p>
         </p:txBody>
       </p:sp>
@@ -2447,16 +2496,16 @@
         </p:nvSpPr>
         <p:spPr>
           <a:xfrm>
-            <a:off x="457200" y="1847088"/>
-            <a:ext cx="8229600" cy="411480"/>
+            <a:off x="365760" y="1828800"/>
+            <a:ext cx="8412480" cy="658368"/>
           </a:xfrm>
           <a:prstGeom prst="roundRect">
             <a:avLst>
-              <a:gd name="adj" fmla="val 22222"/>
+              <a:gd name="adj" fmla="val 13889"/>
             </a:avLst>
           </a:prstGeom>
           <a:solidFill>
-            <a:srgbClr val="F0E8FF"/>
+            <a:srgbClr val="FFFFFF"/>
           </a:solidFill>
           <a:ln/>
           <a:effectLst>
@@ -2476,24 +2525,38 @@
         </p:nvSpPr>
         <p:spPr>
           <a:xfrm>
-            <a:off x="640080" y="1892808"/>
-            <a:ext cx="7863840" cy="320040"/>
-          </a:xfrm>
-          <a:prstGeom prst="rect">
-            <a:avLst/>
-          </a:prstGeom>
-          <a:noFill/>
-          <a:ln/>
-        </p:spPr>
-        <p:txBody>
-          <a:bodyPr wrap="square" lIns="0" tIns="0" rIns="0" bIns="0" rtlCol="0" anchor="ctr"/>
-          <a:lstStyle/>
-          <a:p>
-            <a:pPr indent="0" marL="0">
-              <a:buNone/>
-            </a:pPr>
-            <a:r>
-              <a:rPr lang="en-US" sz="1500" dirty="0">
+            <a:off x="594360" y="1956816"/>
+            <a:ext cx="7863840" cy="420624"/>
+          </a:xfrm>
+          <a:prstGeom prst="rect">
+            <a:avLst/>
+          </a:prstGeom>
+          <a:noFill/>
+          <a:ln/>
+        </p:spPr>
+        <p:txBody>
+          <a:bodyPr wrap="square" lIns="0" tIns="0" rIns="0" bIns="0" rtlCol="0" anchor="ctr"/>
+          <a:lstStyle/>
+          <a:p>
+            <a:pPr indent="0" marL="0">
+              <a:buNone/>
+            </a:pPr>
+            <a:r>
+              <a:rPr lang="en-US" sz="1700" b="1" dirty="0">
+                <a:solidFill>
+                  <a:srgbClr val="0E1C42"/>
+                </a:solidFill>
+                <a:latin typeface="Calibri" pitchFamily="34" charset="0"/>
+                <a:ea typeface="Calibri" pitchFamily="34" charset="-122"/>
+                <a:cs typeface="Calibri" pitchFamily="34" charset="-120"/>
+              </a:rPr>
+              <a:t>compass rose  </a:t>
+            </a:r>
+            <a:pPr indent="0" marL="0">
+              <a:buNone/>
+            </a:pPr>
+            <a:r>
+              <a:rPr lang="en-US" sz="1400" dirty="0">
                 <a:solidFill>
                   <a:srgbClr val="1E293B"/>
                 </a:solidFill>
@@ -2501,9 +2564,9 @@
                 <a:ea typeface="Calibri" pitchFamily="34" charset="-122"/>
                 <a:cs typeface="Calibri" pitchFamily="34" charset="-120"/>
               </a:rPr>
-              <a:t>misplace → place</a:t>
-            </a:r>
-            <a:endParaRPr lang="en-US" sz="1500" dirty="0"/>
+              <a:t>A symbol showing directions on a map.</a:t>
+            </a:r>
+            <a:endParaRPr lang="en-US" sz="1700" dirty="0"/>
           </a:p>
         </p:txBody>
       </p:sp>
@@ -2515,16 +2578,16 @@
         </p:nvSpPr>
         <p:spPr>
           <a:xfrm>
-            <a:off x="457200" y="2322576"/>
-            <a:ext cx="8229600" cy="411480"/>
+            <a:off x="365760" y="2560320"/>
+            <a:ext cx="8412480" cy="658368"/>
           </a:xfrm>
           <a:prstGeom prst="roundRect">
             <a:avLst>
-              <a:gd name="adj" fmla="val 22222"/>
+              <a:gd name="adj" fmla="val 13889"/>
             </a:avLst>
           </a:prstGeom>
           <a:solidFill>
-            <a:srgbClr val="F0E8FF"/>
+            <a:srgbClr val="E5F7FC"/>
           </a:solidFill>
           <a:ln/>
           <a:effectLst>
@@ -2544,24 +2607,38 @@
         </p:nvSpPr>
         <p:spPr>
           <a:xfrm>
-            <a:off x="640080" y="2368296"/>
-            <a:ext cx="7863840" cy="320040"/>
-          </a:xfrm>
-          <a:prstGeom prst="rect">
-            <a:avLst/>
-          </a:prstGeom>
-          <a:noFill/>
-          <a:ln/>
-        </p:spPr>
-        <p:txBody>
-          <a:bodyPr wrap="square" lIns="0" tIns="0" rIns="0" bIns="0" rtlCol="0" anchor="ctr"/>
-          <a:lstStyle/>
-          <a:p>
-            <a:pPr indent="0" marL="0">
-              <a:buNone/>
-            </a:pPr>
-            <a:r>
-              <a:rPr lang="en-US" sz="1500" dirty="0">
+            <a:off x="594360" y="2688336"/>
+            <a:ext cx="7863840" cy="420624"/>
+          </a:xfrm>
+          <a:prstGeom prst="rect">
+            <a:avLst/>
+          </a:prstGeom>
+          <a:noFill/>
+          <a:ln/>
+        </p:spPr>
+        <p:txBody>
+          <a:bodyPr wrap="square" lIns="0" tIns="0" rIns="0" bIns="0" rtlCol="0" anchor="ctr"/>
+          <a:lstStyle/>
+          <a:p>
+            <a:pPr indent="0" marL="0">
+              <a:buNone/>
+            </a:pPr>
+            <a:r>
+              <a:rPr lang="en-US" sz="1700" b="1" dirty="0">
+                <a:solidFill>
+                  <a:srgbClr val="0E1C42"/>
+                </a:solidFill>
+                <a:latin typeface="Calibri" pitchFamily="34" charset="0"/>
+                <a:ea typeface="Calibri" pitchFamily="34" charset="-122"/>
+                <a:cs typeface="Calibri" pitchFamily="34" charset="-120"/>
+              </a:rPr>
+              <a:t>scale  </a:t>
+            </a:r>
+            <a:pPr indent="0" marL="0">
+              <a:buNone/>
+            </a:pPr>
+            <a:r>
+              <a:rPr lang="en-US" sz="1400" dirty="0">
                 <a:solidFill>
                   <a:srgbClr val="1E293B"/>
                 </a:solidFill>
@@ -2569,9 +2646,9 @@
                 <a:ea typeface="Calibri" pitchFamily="34" charset="-122"/>
                 <a:cs typeface="Calibri" pitchFamily="34" charset="-120"/>
               </a:rPr>
-              <a:t>misuse → use</a:t>
-            </a:r>
-            <a:endParaRPr lang="en-US" sz="1500" dirty="0"/>
+              <a:t>A line that helps measure real distances on a map.</a:t>
+            </a:r>
+            <a:endParaRPr lang="en-US" sz="1700" dirty="0"/>
           </a:p>
         </p:txBody>
       </p:sp>
@@ -2583,16 +2660,16 @@
         </p:nvSpPr>
         <p:spPr>
           <a:xfrm>
-            <a:off x="457200" y="2798064"/>
-            <a:ext cx="8229600" cy="411480"/>
+            <a:off x="365760" y="3291840"/>
+            <a:ext cx="8412480" cy="658368"/>
           </a:xfrm>
           <a:prstGeom prst="roundRect">
             <a:avLst>
-              <a:gd name="adj" fmla="val 22222"/>
+              <a:gd name="adj" fmla="val 13889"/>
             </a:avLst>
           </a:prstGeom>
           <a:solidFill>
-            <a:srgbClr val="F0E8FF"/>
+            <a:srgbClr val="FFFFFF"/>
           </a:solidFill>
           <a:ln/>
           <a:effectLst>
@@ -2612,24 +2689,38 @@
         </p:nvSpPr>
         <p:spPr>
           <a:xfrm>
-            <a:off x="640080" y="2843784"/>
-            <a:ext cx="7863840" cy="320040"/>
-          </a:xfrm>
-          <a:prstGeom prst="rect">
-            <a:avLst/>
-          </a:prstGeom>
-          <a:noFill/>
-          <a:ln/>
-        </p:spPr>
-        <p:txBody>
-          <a:bodyPr wrap="square" lIns="0" tIns="0" rIns="0" bIns="0" rtlCol="0" anchor="ctr"/>
-          <a:lstStyle/>
-          <a:p>
-            <a:pPr indent="0" marL="0">
-              <a:buNone/>
-            </a:pPr>
-            <a:r>
-              <a:rPr lang="en-US" sz="1500" dirty="0">
+            <a:off x="594360" y="3419856"/>
+            <a:ext cx="7863840" cy="420624"/>
+          </a:xfrm>
+          <a:prstGeom prst="rect">
+            <a:avLst/>
+          </a:prstGeom>
+          <a:noFill/>
+          <a:ln/>
+        </p:spPr>
+        <p:txBody>
+          <a:bodyPr wrap="square" lIns="0" tIns="0" rIns="0" bIns="0" rtlCol="0" anchor="ctr"/>
+          <a:lstStyle/>
+          <a:p>
+            <a:pPr indent="0" marL="0">
+              <a:buNone/>
+            </a:pPr>
+            <a:r>
+              <a:rPr lang="en-US" sz="1700" b="1" dirty="0">
+                <a:solidFill>
+                  <a:srgbClr val="0E1C42"/>
+                </a:solidFill>
+                <a:latin typeface="Calibri" pitchFamily="34" charset="0"/>
+                <a:ea typeface="Calibri" pitchFamily="34" charset="-122"/>
+                <a:cs typeface="Calibri" pitchFamily="34" charset="-120"/>
+              </a:rPr>
+              <a:t>key  </a:t>
+            </a:r>
+            <a:pPr indent="0" marL="0">
+              <a:buNone/>
+            </a:pPr>
+            <a:r>
+              <a:rPr lang="en-US" sz="1400" dirty="0">
                 <a:solidFill>
                   <a:srgbClr val="1E293B"/>
                 </a:solidFill>
@@ -2637,87 +2728,9 @@
                 <a:ea typeface="Calibri" pitchFamily="34" charset="-122"/>
                 <a:cs typeface="Calibri" pitchFamily="34" charset="-120"/>
               </a:rPr>
-              <a:t>mislead → lead</a:t>
-            </a:r>
-            <a:endParaRPr lang="en-US" sz="1500" dirty="0"/>
-          </a:p>
-        </p:txBody>
-      </p:sp>
-      <p:sp>
-        <p:nvSpPr>
-          <p:cNvPr id="13" name="Text 11"/>
-          <p:cNvSpPr/>
-          <p:nvPr/>
-        </p:nvSpPr>
-        <p:spPr>
-          <a:xfrm>
-            <a:off x="457200" y="3273552"/>
-            <a:ext cx="8046720" cy="292608"/>
-          </a:xfrm>
-          <a:prstGeom prst="rect">
-            <a:avLst/>
-          </a:prstGeom>
-          <a:noFill/>
-          <a:ln/>
-        </p:spPr>
-        <p:txBody>
-          <a:bodyPr wrap="square" lIns="0" tIns="0" rIns="0" bIns="0" rtlCol="0" anchor="ctr"/>
-          <a:lstStyle/>
-          <a:p>
-            <a:pPr indent="0" marL="0">
-              <a:buNone/>
-            </a:pPr>
-            <a:r>
-              <a:rPr lang="en-US" sz="1100" b="1" spc="200" kern="0" dirty="0">
-                <a:solidFill>
-                  <a:srgbClr val="64748B"/>
-                </a:solidFill>
-                <a:latin typeface="Calibri" pitchFamily="34" charset="0"/>
-                <a:ea typeface="Calibri" pitchFamily="34" charset="-122"/>
-                <a:cs typeface="Calibri" pitchFamily="34" charset="-120"/>
-              </a:rPr>
-              <a:t>CONCEPT EXAMPLES</a:t>
-            </a:r>
-            <a:endParaRPr lang="en-US" sz="1100" dirty="0"/>
-          </a:p>
-        </p:txBody>
-      </p:sp>
-      <p:sp>
-        <p:nvSpPr>
-          <p:cNvPr id="14" name="Text 12"/>
-          <p:cNvSpPr/>
-          <p:nvPr/>
-        </p:nvSpPr>
-        <p:spPr>
-          <a:xfrm>
-            <a:off x="640080" y="3593592"/>
-            <a:ext cx="7863840" cy="320040"/>
-          </a:xfrm>
-          <a:prstGeom prst="rect">
-            <a:avLst/>
-          </a:prstGeom>
-          <a:noFill/>
-          <a:ln/>
-        </p:spPr>
-        <p:txBody>
-          <a:bodyPr wrap="square" lIns="0" tIns="0" rIns="0" bIns="0" rtlCol="0" anchor="ctr"/>
-          <a:lstStyle/>
-          <a:p>
-            <a:pPr indent="0" marL="0">
-              <a:buNone/>
-            </a:pPr>
-            <a:r>
-              <a:rPr lang="en-US" sz="1300" dirty="0">
-                <a:solidFill>
-                  <a:srgbClr val="1E293B"/>
-                </a:solidFill>
-                <a:latin typeface="Calibri" pitchFamily="34" charset="0"/>
-                <a:ea typeface="Calibri" pitchFamily="34" charset="-122"/>
-                <a:cs typeface="Calibri" pitchFamily="34" charset="-120"/>
-              </a:rPr>
-              <a:t>• 📌 Examples</a:t>
-            </a:r>
-            <a:endParaRPr lang="en-US" sz="1300" dirty="0"/>
+              <a:t>A box that explains symbols on a map.</a:t>
+            </a:r>
+            <a:endParaRPr lang="en-US" sz="1700" dirty="0"/>
           </a:p>
         </p:txBody>
       </p:sp>
@@ -2735,7 +2748,7 @@
     <p:bg>
       <p:bgPr>
         <a:solidFill>
-          <a:srgbClr val="FFFFFF"/>
+          <a:srgbClr val="F8FAFC"/>
         </a:solidFill>
       </p:bgPr>
     </p:bg>
@@ -2755,80 +2768,116 @@
       </p:grpSpPr>
       <p:sp>
         <p:nvSpPr>
-          <p:cNvPr id="2" name="Text 0"/>
-          <p:cNvSpPr/>
-          <p:nvPr/>
-        </p:nvSpPr>
-        <p:spPr>
-          <a:xfrm>
-            <a:off x="365760" y="164592"/>
-            <a:ext cx="8412480" cy="566928"/>
-          </a:xfrm>
-          <a:prstGeom prst="rect">
-            <a:avLst/>
-          </a:prstGeom>
-          <a:noFill/>
-          <a:ln/>
-        </p:spPr>
-        <p:txBody>
-          <a:bodyPr wrap="square" lIns="0" tIns="0" rIns="0" bIns="0" rtlCol="0" anchor="ctr"/>
-          <a:lstStyle/>
-          <a:p>
-            <a:pPr algn="l" indent="0" marL="0">
-              <a:buNone/>
-            </a:pPr>
-            <a:r>
-              <a:rPr lang="en-US" sz="2800" b="1" dirty="0">
-                <a:solidFill>
-                  <a:srgbClr val="0E1C42"/>
-                </a:solidFill>
-                <a:latin typeface="Calibri" pitchFamily="34" charset="0"/>
-                <a:ea typeface="Calibri" pitchFamily="34" charset="-122"/>
-                <a:cs typeface="Calibri" pitchFamily="34" charset="-120"/>
-              </a:rPr>
-              <a:t>🔤 Vocabulary</a:t>
-            </a:r>
-            <a:endParaRPr lang="en-US" sz="2800" dirty="0"/>
-          </a:p>
-        </p:txBody>
-      </p:sp>
-      <p:sp>
-        <p:nvSpPr>
-          <p:cNvPr id="3" name="Shape 1"/>
-          <p:cNvSpPr/>
-          <p:nvPr/>
-        </p:nvSpPr>
-        <p:spPr>
-          <a:xfrm>
-            <a:off x="365760" y="749808"/>
-            <a:ext cx="8412480" cy="0"/>
-          </a:xfrm>
-          <a:prstGeom prst="line">
-            <a:avLst/>
-          </a:prstGeom>
-          <a:noFill/>
-          <a:ln w="19050">
-            <a:solidFill>
-              <a:srgbClr val="55C8E8"/>
-            </a:solidFill>
-            <a:prstDash val="solid"/>
-          </a:ln>
-        </p:spPr>
-      </p:sp>
-      <p:sp>
-        <p:nvSpPr>
-          <p:cNvPr id="4" name="Shape 2"/>
-          <p:cNvSpPr/>
-          <p:nvPr/>
-        </p:nvSpPr>
-        <p:spPr>
-          <a:xfrm>
-            <a:off x="457200" y="1005840"/>
-            <a:ext cx="3840480" cy="640080"/>
+          <p:cNvPr id="2" name="Shape 0"/>
+          <p:cNvSpPr/>
+          <p:nvPr/>
+        </p:nvSpPr>
+        <p:spPr>
+          <a:xfrm>
+            <a:off x="0" y="0"/>
+            <a:ext cx="9144000" cy="566928"/>
+          </a:xfrm>
+          <a:prstGeom prst="rect">
+            <a:avLst/>
+          </a:prstGeom>
+          <a:solidFill>
+            <a:srgbClr val="C7922C"/>
+          </a:solidFill>
+          <a:ln/>
+        </p:spPr>
+      </p:sp>
+      <p:sp>
+        <p:nvSpPr>
+          <p:cNvPr id="3" name="Text 1"/>
+          <p:cNvSpPr/>
+          <p:nvPr/>
+        </p:nvSpPr>
+        <p:spPr>
+          <a:xfrm>
+            <a:off x="365760" y="54864"/>
+            <a:ext cx="8412480" cy="457200"/>
+          </a:xfrm>
+          <a:prstGeom prst="rect">
+            <a:avLst/>
+          </a:prstGeom>
+          <a:noFill/>
+          <a:ln/>
+        </p:spPr>
+        <p:txBody>
+          <a:bodyPr wrap="square" lIns="0" tIns="0" rIns="0" bIns="0" rtlCol="0" anchor="ctr"/>
+          <a:lstStyle/>
+          <a:p>
+            <a:pPr indent="0" marL="0">
+              <a:buNone/>
+            </a:pPr>
+            <a:r>
+              <a:rPr lang="en-US" sz="2200" b="1" dirty="0">
+                <a:solidFill>
+                  <a:srgbClr val="FFFFFF"/>
+                </a:solidFill>
+                <a:latin typeface="Calibri" pitchFamily="34" charset="0"/>
+                <a:ea typeface="Calibri" pitchFamily="34" charset="-122"/>
+                <a:cs typeface="Calibri" pitchFamily="34" charset="-120"/>
+              </a:rPr>
+              <a:t>✏️  Grammar</a:t>
+            </a:r>
+            <a:endParaRPr lang="en-US" sz="2200" dirty="0"/>
+          </a:p>
+        </p:txBody>
+      </p:sp>
+      <p:sp>
+        <p:nvSpPr>
+          <p:cNvPr id="4" name="Text 2"/>
+          <p:cNvSpPr/>
+          <p:nvPr/>
+        </p:nvSpPr>
+        <p:spPr>
+          <a:xfrm>
+            <a:off x="365760" y="777240"/>
+            <a:ext cx="8229600" cy="237744"/>
+          </a:xfrm>
+          <a:prstGeom prst="rect">
+            <a:avLst/>
+          </a:prstGeom>
+          <a:noFill/>
+          <a:ln/>
+        </p:spPr>
+        <p:txBody>
+          <a:bodyPr wrap="square" lIns="0" tIns="0" rIns="0" bIns="0" rtlCol="0" anchor="ctr"/>
+          <a:lstStyle/>
+          <a:p>
+            <a:pPr indent="0" marL="0">
+              <a:buNone/>
+            </a:pPr>
+            <a:r>
+              <a:rPr lang="en-US" sz="1100" b="1" spc="100" kern="0" dirty="0">
+                <a:solidFill>
+                  <a:srgbClr val="C7922C"/>
+                </a:solidFill>
+                <a:latin typeface="Calibri" pitchFamily="34" charset="0"/>
+                <a:ea typeface="Calibri" pitchFamily="34" charset="-122"/>
+                <a:cs typeface="Calibri" pitchFamily="34" charset="-120"/>
+              </a:rPr>
+              <a:t>COMMON AND PROPER NOUNS REVIEW</a:t>
+            </a:r>
+            <a:endParaRPr lang="en-US" sz="1100" dirty="0"/>
+          </a:p>
+        </p:txBody>
+      </p:sp>
+      <p:sp>
+        <p:nvSpPr>
+          <p:cNvPr id="5" name="Shape 3"/>
+          <p:cNvSpPr/>
+          <p:nvPr/>
+        </p:nvSpPr>
+        <p:spPr>
+          <a:xfrm>
+            <a:off x="365760" y="1078992"/>
+            <a:ext cx="8412480" cy="658368"/>
           </a:xfrm>
           <a:prstGeom prst="roundRect">
             <a:avLst>
-              <a:gd name="adj" fmla="val 14286"/>
+              <a:gd name="adj" fmla="val 13889"/>
             </a:avLst>
           </a:prstGeom>
           <a:solidFill>
@@ -2846,50 +2895,30 @@
       </p:sp>
       <p:sp>
         <p:nvSpPr>
-          <p:cNvPr id="5" name="Text 3"/>
-          <p:cNvSpPr/>
-          <p:nvPr/>
-        </p:nvSpPr>
-        <p:spPr>
-          <a:xfrm>
-            <a:off x="594360" y="1060704"/>
-            <a:ext cx="3566160" cy="530352"/>
-          </a:xfrm>
-          <a:prstGeom prst="rect">
-            <a:avLst/>
-          </a:prstGeom>
-          <a:noFill/>
-          <a:ln/>
-        </p:spPr>
-        <p:txBody>
-          <a:bodyPr wrap="square" lIns="0" tIns="0" rIns="0" bIns="0" rtlCol="0" anchor="ctr"/>
-          <a:lstStyle/>
-          <a:p>
-            <a:pPr indent="0" marL="0">
-              <a:buNone/>
-            </a:pPr>
-            <a:r>
-              <a:rPr lang="en-US" sz="1500" b="1" dirty="0">
-                <a:solidFill>
-                  <a:srgbClr val="0E1C42"/>
-                </a:solidFill>
-                <a:latin typeface="Calibri" pitchFamily="34" charset="0"/>
-                <a:ea typeface="Calibri" pitchFamily="34" charset="-122"/>
-                <a:cs typeface="Calibri" pitchFamily="34" charset="-120"/>
-              </a:rPr>
-              <a:t>map</a:t>
-            </a:r>
-            <a:pPr indent="0" marL="0">
-              <a:buNone/>
-            </a:pPr>
-            <a:endParaRPr lang="en-US" sz="1500" dirty="0"/>
-          </a:p>
-          <a:p>
-            <a:pPr indent="0" marL="0">
-              <a:buNone/>
-            </a:pPr>
-            <a:r>
-              <a:rPr lang="en-US" sz="1200" dirty="0">
+          <p:cNvPr id="6" name="Text 4"/>
+          <p:cNvSpPr/>
+          <p:nvPr/>
+        </p:nvSpPr>
+        <p:spPr>
+          <a:xfrm>
+            <a:off x="594360" y="1225296"/>
+            <a:ext cx="7863840" cy="402336"/>
+          </a:xfrm>
+          <a:prstGeom prst="rect">
+            <a:avLst/>
+          </a:prstGeom>
+          <a:noFill/>
+          <a:ln/>
+        </p:spPr>
+        <p:txBody>
+          <a:bodyPr wrap="square" lIns="0" tIns="0" rIns="0" bIns="0" rtlCol="0" anchor="ctr"/>
+          <a:lstStyle/>
+          <a:p>
+            <a:pPr indent="0" marL="0">
+              <a:buNone/>
+            </a:pPr>
+            <a:r>
+              <a:rPr lang="en-US" sz="1600" dirty="0">
                 <a:solidFill>
                   <a:srgbClr val="1E293B"/>
                 </a:solidFill>
@@ -2897,30 +2926,30 @@
                 <a:ea typeface="Calibri" pitchFamily="34" charset="-122"/>
                 <a:cs typeface="Calibri" pitchFamily="34" charset="-120"/>
               </a:rPr>
-              <a:t>A drawing that shows what a place looks like from above.</a:t>
-            </a:r>
-            <a:endParaRPr lang="en-US" sz="1500" dirty="0"/>
-          </a:p>
-        </p:txBody>
-      </p:sp>
-      <p:sp>
-        <p:nvSpPr>
-          <p:cNvPr id="6" name="Shape 4"/>
-          <p:cNvSpPr/>
-          <p:nvPr/>
-        </p:nvSpPr>
-        <p:spPr>
-          <a:xfrm>
-            <a:off x="4572000" y="1005840"/>
-            <a:ext cx="3840480" cy="640080"/>
+              <a:t>Stanley folded the letter and mailed it.</a:t>
+            </a:r>
+            <a:endParaRPr lang="en-US" sz="1600" dirty="0"/>
+          </a:p>
+        </p:txBody>
+      </p:sp>
+      <p:sp>
+        <p:nvSpPr>
+          <p:cNvPr id="7" name="Shape 5"/>
+          <p:cNvSpPr/>
+          <p:nvPr/>
+        </p:nvSpPr>
+        <p:spPr>
+          <a:xfrm>
+            <a:off x="365760" y="1810512"/>
+            <a:ext cx="8412480" cy="658368"/>
           </a:xfrm>
           <a:prstGeom prst="roundRect">
             <a:avLst>
-              <a:gd name="adj" fmla="val 14286"/>
+              <a:gd name="adj" fmla="val 13889"/>
             </a:avLst>
           </a:prstGeom>
           <a:solidFill>
-            <a:srgbClr val="FEF6E8"/>
+            <a:srgbClr val="FFFFFF"/>
           </a:solidFill>
           <a:ln/>
           <a:effectLst>
@@ -2934,50 +2963,30 @@
       </p:sp>
       <p:sp>
         <p:nvSpPr>
-          <p:cNvPr id="7" name="Text 5"/>
-          <p:cNvSpPr/>
-          <p:nvPr/>
-        </p:nvSpPr>
-        <p:spPr>
-          <a:xfrm>
-            <a:off x="4709160" y="1060704"/>
-            <a:ext cx="3566160" cy="530352"/>
-          </a:xfrm>
-          <a:prstGeom prst="rect">
-            <a:avLst/>
-          </a:prstGeom>
-          <a:noFill/>
-          <a:ln/>
-        </p:spPr>
-        <p:txBody>
-          <a:bodyPr wrap="square" lIns="0" tIns="0" rIns="0" bIns="0" rtlCol="0" anchor="ctr"/>
-          <a:lstStyle/>
-          <a:p>
-            <a:pPr indent="0" marL="0">
-              <a:buNone/>
-            </a:pPr>
-            <a:r>
-              <a:rPr lang="en-US" sz="1500" b="1" dirty="0">
-                <a:solidFill>
-                  <a:srgbClr val="0E1C42"/>
-                </a:solidFill>
-                <a:latin typeface="Calibri" pitchFamily="34" charset="0"/>
-                <a:ea typeface="Calibri" pitchFamily="34" charset="-122"/>
-                <a:cs typeface="Calibri" pitchFamily="34" charset="-120"/>
-              </a:rPr>
-              <a:t>compass rose</a:t>
-            </a:r>
-            <a:pPr indent="0" marL="0">
-              <a:buNone/>
-            </a:pPr>
-            <a:endParaRPr lang="en-US" sz="1500" dirty="0"/>
-          </a:p>
-          <a:p>
-            <a:pPr indent="0" marL="0">
-              <a:buNone/>
-            </a:pPr>
-            <a:r>
-              <a:rPr lang="en-US" sz="1200" dirty="0">
+          <p:cNvPr id="8" name="Text 6"/>
+          <p:cNvSpPr/>
+          <p:nvPr/>
+        </p:nvSpPr>
+        <p:spPr>
+          <a:xfrm>
+            <a:off x="594360" y="1956816"/>
+            <a:ext cx="7863840" cy="402336"/>
+          </a:xfrm>
+          <a:prstGeom prst="rect">
+            <a:avLst/>
+          </a:prstGeom>
+          <a:noFill/>
+          <a:ln/>
+        </p:spPr>
+        <p:txBody>
+          <a:bodyPr wrap="square" lIns="0" tIns="0" rIns="0" bIns="0" rtlCol="0" anchor="ctr"/>
+          <a:lstStyle/>
+          <a:p>
+            <a:pPr indent="0" marL="0">
+              <a:buNone/>
+            </a:pPr>
+            <a:r>
+              <a:rPr lang="en-US" sz="1600" dirty="0">
                 <a:solidFill>
                   <a:srgbClr val="1E293B"/>
                 </a:solidFill>
@@ -2985,26 +2994,26 @@
                 <a:ea typeface="Calibri" pitchFamily="34" charset="-122"/>
                 <a:cs typeface="Calibri" pitchFamily="34" charset="-120"/>
               </a:rPr>
-              <a:t>A symbol showing directions on a map.</a:t>
-            </a:r>
-            <a:endParaRPr lang="en-US" sz="1500" dirty="0"/>
-          </a:p>
-        </p:txBody>
-      </p:sp>
-      <p:sp>
-        <p:nvSpPr>
-          <p:cNvPr id="8" name="Shape 6"/>
-          <p:cNvSpPr/>
-          <p:nvPr/>
-        </p:nvSpPr>
-        <p:spPr>
-          <a:xfrm>
-            <a:off x="457200" y="1755648"/>
-            <a:ext cx="3840480" cy="640080"/>
+              <a:t>The postcard came from California last week.</a:t>
+            </a:r>
+            <a:endParaRPr lang="en-US" sz="1600" dirty="0"/>
+          </a:p>
+        </p:txBody>
+      </p:sp>
+      <p:sp>
+        <p:nvSpPr>
+          <p:cNvPr id="9" name="Shape 7"/>
+          <p:cNvSpPr/>
+          <p:nvPr/>
+        </p:nvSpPr>
+        <p:spPr>
+          <a:xfrm>
+            <a:off x="365760" y="2542032"/>
+            <a:ext cx="8412480" cy="658368"/>
           </a:xfrm>
           <a:prstGeom prst="roundRect">
             <a:avLst>
-              <a:gd name="adj" fmla="val 14286"/>
+              <a:gd name="adj" fmla="val 13889"/>
             </a:avLst>
           </a:prstGeom>
           <a:solidFill>
@@ -3022,50 +3031,30 @@
       </p:sp>
       <p:sp>
         <p:nvSpPr>
-          <p:cNvPr id="9" name="Text 7"/>
-          <p:cNvSpPr/>
-          <p:nvPr/>
-        </p:nvSpPr>
-        <p:spPr>
-          <a:xfrm>
-            <a:off x="594360" y="1810512"/>
-            <a:ext cx="3566160" cy="530352"/>
-          </a:xfrm>
-          <a:prstGeom prst="rect">
-            <a:avLst/>
-          </a:prstGeom>
-          <a:noFill/>
-          <a:ln/>
-        </p:spPr>
-        <p:txBody>
-          <a:bodyPr wrap="square" lIns="0" tIns="0" rIns="0" bIns="0" rtlCol="0" anchor="ctr"/>
-          <a:lstStyle/>
-          <a:p>
-            <a:pPr indent="0" marL="0">
-              <a:buNone/>
-            </a:pPr>
-            <a:r>
-              <a:rPr lang="en-US" sz="1500" b="1" dirty="0">
-                <a:solidFill>
-                  <a:srgbClr val="0E1C42"/>
-                </a:solidFill>
-                <a:latin typeface="Calibri" pitchFamily="34" charset="0"/>
-                <a:ea typeface="Calibri" pitchFamily="34" charset="-122"/>
-                <a:cs typeface="Calibri" pitchFamily="34" charset="-120"/>
-              </a:rPr>
-              <a:t>scale</a:t>
-            </a:r>
-            <a:pPr indent="0" marL="0">
-              <a:buNone/>
-            </a:pPr>
-            <a:endParaRPr lang="en-US" sz="1500" dirty="0"/>
-          </a:p>
-          <a:p>
-            <a:pPr indent="0" marL="0">
-              <a:buNone/>
-            </a:pPr>
-            <a:r>
-              <a:rPr lang="en-US" sz="1200" dirty="0">
+          <p:cNvPr id="10" name="Text 8"/>
+          <p:cNvSpPr/>
+          <p:nvPr/>
+        </p:nvSpPr>
+        <p:spPr>
+          <a:xfrm>
+            <a:off x="594360" y="2688336"/>
+            <a:ext cx="7863840" cy="402336"/>
+          </a:xfrm>
+          <a:prstGeom prst="rect">
+            <a:avLst/>
+          </a:prstGeom>
+          <a:noFill/>
+          <a:ln/>
+        </p:spPr>
+        <p:txBody>
+          <a:bodyPr wrap="square" lIns="0" tIns="0" rIns="0" bIns="0" rtlCol="0" anchor="ctr"/>
+          <a:lstStyle/>
+          <a:p>
+            <a:pPr indent="0" marL="0">
+              <a:buNone/>
+            </a:pPr>
+            <a:r>
+              <a:rPr lang="en-US" sz="1600" dirty="0">
                 <a:solidFill>
                   <a:srgbClr val="1E293B"/>
                 </a:solidFill>
@@ -3073,30 +3062,30 @@
                 <a:ea typeface="Calibri" pitchFamily="34" charset="-122"/>
                 <a:cs typeface="Calibri" pitchFamily="34" charset="-120"/>
               </a:rPr>
-              <a:t>A line that helps measure real distances on a map.</a:t>
-            </a:r>
-            <a:endParaRPr lang="en-US" sz="1500" dirty="0"/>
-          </a:p>
-        </p:txBody>
-      </p:sp>
-      <p:sp>
-        <p:nvSpPr>
-          <p:cNvPr id="10" name="Shape 8"/>
-          <p:cNvSpPr/>
-          <p:nvPr/>
-        </p:nvSpPr>
-        <p:spPr>
-          <a:xfrm>
-            <a:off x="4572000" y="1755648"/>
-            <a:ext cx="3840480" cy="640080"/>
+              <a:t>A mail carrier brings letters to every house.</a:t>
+            </a:r>
+            <a:endParaRPr lang="en-US" sz="1600" dirty="0"/>
+          </a:p>
+        </p:txBody>
+      </p:sp>
+      <p:sp>
+        <p:nvSpPr>
+          <p:cNvPr id="11" name="Shape 9"/>
+          <p:cNvSpPr/>
+          <p:nvPr/>
+        </p:nvSpPr>
+        <p:spPr>
+          <a:xfrm>
+            <a:off x="365760" y="3273552"/>
+            <a:ext cx="8412480" cy="658368"/>
           </a:xfrm>
           <a:prstGeom prst="roundRect">
             <a:avLst>
-              <a:gd name="adj" fmla="val 14286"/>
+              <a:gd name="adj" fmla="val 13889"/>
             </a:avLst>
           </a:prstGeom>
           <a:solidFill>
-            <a:srgbClr val="FEF6E8"/>
+            <a:srgbClr val="FFFFFF"/>
           </a:solidFill>
           <a:ln/>
           <a:effectLst>
@@ -3110,50 +3099,30 @@
       </p:sp>
       <p:sp>
         <p:nvSpPr>
-          <p:cNvPr id="11" name="Text 9"/>
-          <p:cNvSpPr/>
-          <p:nvPr/>
-        </p:nvSpPr>
-        <p:spPr>
-          <a:xfrm>
-            <a:off x="4709160" y="1810512"/>
-            <a:ext cx="3566160" cy="530352"/>
-          </a:xfrm>
-          <a:prstGeom prst="rect">
-            <a:avLst/>
-          </a:prstGeom>
-          <a:noFill/>
-          <a:ln/>
-        </p:spPr>
-        <p:txBody>
-          <a:bodyPr wrap="square" lIns="0" tIns="0" rIns="0" bIns="0" rtlCol="0" anchor="ctr"/>
-          <a:lstStyle/>
-          <a:p>
-            <a:pPr indent="0" marL="0">
-              <a:buNone/>
-            </a:pPr>
-            <a:r>
-              <a:rPr lang="en-US" sz="1500" b="1" dirty="0">
-                <a:solidFill>
-                  <a:srgbClr val="0E1C42"/>
-                </a:solidFill>
-                <a:latin typeface="Calibri" pitchFamily="34" charset="0"/>
-                <a:ea typeface="Calibri" pitchFamily="34" charset="-122"/>
-                <a:cs typeface="Calibri" pitchFamily="34" charset="-120"/>
-              </a:rPr>
-              <a:t>key</a:t>
-            </a:r>
-            <a:pPr indent="0" marL="0">
-              <a:buNone/>
-            </a:pPr>
-            <a:endParaRPr lang="en-US" sz="1500" dirty="0"/>
-          </a:p>
-          <a:p>
-            <a:pPr indent="0" marL="0">
-              <a:buNone/>
-            </a:pPr>
-            <a:r>
-              <a:rPr lang="en-US" sz="1200" dirty="0">
+          <p:cNvPr id="12" name="Text 10"/>
+          <p:cNvSpPr/>
+          <p:nvPr/>
+        </p:nvSpPr>
+        <p:spPr>
+          <a:xfrm>
+            <a:off x="594360" y="3419856"/>
+            <a:ext cx="7863840" cy="402336"/>
+          </a:xfrm>
+          <a:prstGeom prst="rect">
+            <a:avLst/>
+          </a:prstGeom>
+          <a:noFill/>
+          <a:ln/>
+        </p:spPr>
+        <p:txBody>
+          <a:bodyPr wrap="square" lIns="0" tIns="0" rIns="0" bIns="0" rtlCol="0" anchor="ctr"/>
+          <a:lstStyle/>
+          <a:p>
+            <a:pPr indent="0" marL="0">
+              <a:buNone/>
+            </a:pPr>
+            <a:r>
+              <a:rPr lang="en-US" sz="1600" dirty="0">
                 <a:solidFill>
                   <a:srgbClr val="1E293B"/>
                 </a:solidFill>
@@ -3161,7 +3130,46 @@
                 <a:ea typeface="Calibri" pitchFamily="34" charset="-122"/>
                 <a:cs typeface="Calibri" pitchFamily="34" charset="-120"/>
               </a:rPr>
-              <a:t>A box that explains symbols on a map.</a:t>
+              <a:t>The Mississippi River runs south through many states.</a:t>
+            </a:r>
+            <a:endParaRPr lang="en-US" sz="1600" dirty="0"/>
+          </a:p>
+        </p:txBody>
+      </p:sp>
+      <p:sp>
+        <p:nvSpPr>
+          <p:cNvPr id="13" name="Text 11"/>
+          <p:cNvSpPr/>
+          <p:nvPr/>
+        </p:nvSpPr>
+        <p:spPr>
+          <a:xfrm>
+            <a:off x="365760" y="4050792"/>
+            <a:ext cx="8412480" cy="365760"/>
+          </a:xfrm>
+          <a:prstGeom prst="rect">
+            <a:avLst/>
+          </a:prstGeom>
+          <a:noFill/>
+          <a:ln/>
+        </p:spPr>
+        <p:txBody>
+          <a:bodyPr wrap="square" lIns="0" tIns="0" rIns="0" bIns="0" rtlCol="0" anchor="ctr"/>
+          <a:lstStyle/>
+          <a:p>
+            <a:pPr indent="0" marL="0">
+              <a:buNone/>
+            </a:pPr>
+            <a:r>
+              <a:rPr lang="en-US" sz="1500" i="1" dirty="0">
+                <a:solidFill>
+                  <a:srgbClr val="64748B"/>
+                </a:solidFill>
+                <a:latin typeface="Calibri" pitchFamily="34" charset="0"/>
+                <a:ea typeface="Calibri" pitchFamily="34" charset="-122"/>
+                <a:cs typeface="Calibri" pitchFamily="34" charset="-120"/>
+              </a:rPr>
+              <a:t>Your turn. Tap the proper noun in each sentence — the one that names a specific place and starts with a capital letter. Tap a word to check — green means you got it.</a:t>
             </a:r>
             <a:endParaRPr lang="en-US" sz="1500" dirty="0"/>
           </a:p>
@@ -3181,7 +3189,7 @@
     <p:bg>
       <p:bgPr>
         <a:solidFill>
-          <a:srgbClr val="E5F7FC"/>
+          <a:srgbClr val="F8FAFC"/>
         </a:solidFill>
       </p:bgPr>
     </p:bg>
@@ -3201,180 +3209,116 @@
       </p:grpSpPr>
       <p:sp>
         <p:nvSpPr>
-          <p:cNvPr id="2" name="Text 0"/>
-          <p:cNvSpPr/>
-          <p:nvPr/>
-        </p:nvSpPr>
-        <p:spPr>
-          <a:xfrm>
-            <a:off x="365760" y="164592"/>
-            <a:ext cx="5943600" cy="566928"/>
-          </a:xfrm>
-          <a:prstGeom prst="rect">
-            <a:avLst/>
-          </a:prstGeom>
-          <a:noFill/>
-          <a:ln/>
-        </p:spPr>
-        <p:txBody>
-          <a:bodyPr wrap="square" lIns="0" tIns="0" rIns="0" bIns="0" rtlCol="0" anchor="ctr"/>
-          <a:lstStyle/>
-          <a:p>
-            <a:pPr algn="l" indent="0" marL="0">
-              <a:buNone/>
-            </a:pPr>
-            <a:r>
-              <a:rPr lang="en-US" sz="2800" b="1" dirty="0">
-                <a:solidFill>
-                  <a:srgbClr val="0E1C42"/>
-                </a:solidFill>
-                <a:latin typeface="Calibri" pitchFamily="34" charset="0"/>
-                <a:ea typeface="Calibri" pitchFamily="34" charset="-122"/>
-                <a:cs typeface="Calibri" pitchFamily="34" charset="-120"/>
-              </a:rPr>
-              <a:t>🔠 Spelling: Compound words</a:t>
-            </a:r>
-            <a:endParaRPr lang="en-US" sz="2800" dirty="0"/>
-          </a:p>
-        </p:txBody>
-      </p:sp>
-      <p:sp>
-        <p:nvSpPr>
-          <p:cNvPr id="3" name="Shape 1"/>
-          <p:cNvSpPr/>
-          <p:nvPr/>
-        </p:nvSpPr>
-        <p:spPr>
-          <a:xfrm>
-            <a:off x="365760" y="749808"/>
-            <a:ext cx="8412480" cy="0"/>
-          </a:xfrm>
-          <a:prstGeom prst="line">
-            <a:avLst/>
-          </a:prstGeom>
-          <a:noFill/>
-          <a:ln w="19050">
-            <a:solidFill>
-              <a:srgbClr val="5CB85C"/>
-            </a:solidFill>
-            <a:prstDash val="solid"/>
-          </a:ln>
-        </p:spPr>
-      </p:sp>
-      <p:sp>
-        <p:nvSpPr>
-          <p:cNvPr id="4" name="Shape 2"/>
-          <p:cNvSpPr/>
-          <p:nvPr/>
-        </p:nvSpPr>
-        <p:spPr>
-          <a:xfrm>
-            <a:off x="6492240" y="173736"/>
-            <a:ext cx="2286000" cy="502920"/>
+          <p:cNvPr id="2" name="Shape 0"/>
+          <p:cNvSpPr/>
+          <p:nvPr/>
+        </p:nvSpPr>
+        <p:spPr>
+          <a:xfrm>
+            <a:off x="0" y="0"/>
+            <a:ext cx="9144000" cy="566928"/>
+          </a:xfrm>
+          <a:prstGeom prst="rect">
+            <a:avLst/>
+          </a:prstGeom>
+          <a:solidFill>
+            <a:srgbClr val="C7922C"/>
+          </a:solidFill>
+          <a:ln/>
+        </p:spPr>
+      </p:sp>
+      <p:sp>
+        <p:nvSpPr>
+          <p:cNvPr id="3" name="Text 1"/>
+          <p:cNvSpPr/>
+          <p:nvPr/>
+        </p:nvSpPr>
+        <p:spPr>
+          <a:xfrm>
+            <a:off x="365760" y="54864"/>
+            <a:ext cx="8412480" cy="457200"/>
+          </a:xfrm>
+          <a:prstGeom prst="rect">
+            <a:avLst/>
+          </a:prstGeom>
+          <a:noFill/>
+          <a:ln/>
+        </p:spPr>
+        <p:txBody>
+          <a:bodyPr wrap="square" lIns="0" tIns="0" rIns="0" bIns="0" rtlCol="0" anchor="ctr"/>
+          <a:lstStyle/>
+          <a:p>
+            <a:pPr indent="0" marL="0">
+              <a:buNone/>
+            </a:pPr>
+            <a:r>
+              <a:rPr lang="en-US" sz="2200" b="1" dirty="0">
+                <a:solidFill>
+                  <a:srgbClr val="FFFFFF"/>
+                </a:solidFill>
+                <a:latin typeface="Calibri" pitchFamily="34" charset="0"/>
+                <a:ea typeface="Calibri" pitchFamily="34" charset="-122"/>
+                <a:cs typeface="Calibri" pitchFamily="34" charset="-120"/>
+              </a:rPr>
+              <a:t>✏️  Grammar</a:t>
+            </a:r>
+            <a:endParaRPr lang="en-US" sz="2200" dirty="0"/>
+          </a:p>
+        </p:txBody>
+      </p:sp>
+      <p:sp>
+        <p:nvSpPr>
+          <p:cNvPr id="4" name="Text 2"/>
+          <p:cNvSpPr/>
+          <p:nvPr/>
+        </p:nvSpPr>
+        <p:spPr>
+          <a:xfrm>
+            <a:off x="365760" y="777240"/>
+            <a:ext cx="8229600" cy="237744"/>
+          </a:xfrm>
+          <a:prstGeom prst="rect">
+            <a:avLst/>
+          </a:prstGeom>
+          <a:noFill/>
+          <a:ln/>
+        </p:spPr>
+        <p:txBody>
+          <a:bodyPr wrap="square" lIns="0" tIns="0" rIns="0" bIns="0" rtlCol="0" anchor="ctr"/>
+          <a:lstStyle/>
+          <a:p>
+            <a:pPr indent="0" marL="0">
+              <a:buNone/>
+            </a:pPr>
+            <a:r>
+              <a:rPr lang="en-US" sz="1100" b="1" spc="100" kern="0" dirty="0">
+                <a:solidFill>
+                  <a:srgbClr val="C7922C"/>
+                </a:solidFill>
+                <a:latin typeface="Calibri" pitchFamily="34" charset="0"/>
+                <a:ea typeface="Calibri" pitchFamily="34" charset="-122"/>
+                <a:cs typeface="Calibri" pitchFamily="34" charset="-120"/>
+              </a:rPr>
+              <a:t>COMMON AND PROPER NOUNS REVIEW</a:t>
+            </a:r>
+            <a:endParaRPr lang="en-US" sz="1100" dirty="0"/>
+          </a:p>
+        </p:txBody>
+      </p:sp>
+      <p:sp>
+        <p:nvSpPr>
+          <p:cNvPr id="5" name="Shape 3"/>
+          <p:cNvSpPr/>
+          <p:nvPr/>
+        </p:nvSpPr>
+        <p:spPr>
+          <a:xfrm>
+            <a:off x="365760" y="1078992"/>
+            <a:ext cx="8412480" cy="658368"/>
           </a:xfrm>
           <a:prstGeom prst="roundRect">
             <a:avLst>
-              <a:gd name="adj" fmla="val 21818"/>
-            </a:avLst>
-          </a:prstGeom>
-          <a:solidFill>
-            <a:srgbClr val="5CB85C"/>
-          </a:solidFill>
-          <a:ln/>
-        </p:spPr>
-      </p:sp>
-      <p:sp>
-        <p:nvSpPr>
-          <p:cNvPr id="5" name="Text 3"/>
-          <p:cNvSpPr/>
-          <p:nvPr/>
-        </p:nvSpPr>
-        <p:spPr>
-          <a:xfrm>
-            <a:off x="6492240" y="173736"/>
-            <a:ext cx="2286000" cy="502920"/>
-          </a:xfrm>
-          <a:prstGeom prst="rect">
-            <a:avLst/>
-          </a:prstGeom>
-          <a:noFill/>
-          <a:ln/>
-        </p:spPr>
-        <p:txBody>
-          <a:bodyPr wrap="square" lIns="0" tIns="0" rIns="0" bIns="0" rtlCol="0" anchor="ctr"/>
-          <a:lstStyle/>
-          <a:p>
-            <a:pPr algn="ctr" indent="0" marL="0">
-              <a:buNone/>
-            </a:pPr>
-            <a:r>
-              <a:rPr lang="en-US" sz="1100" b="1" dirty="0">
-                <a:solidFill>
-                  <a:srgbClr val="0E1C42"/>
-                </a:solidFill>
-                <a:latin typeface="Calibri" pitchFamily="34" charset="0"/>
-                <a:ea typeface="Calibri" pitchFamily="34" charset="-122"/>
-                <a:cs typeface="Calibri" pitchFamily="34" charset="-120"/>
-              </a:rPr>
-              <a:t>CHAT PROMPT</a:t>
-            </a:r>
-            <a:endParaRPr lang="en-US" sz="1100" dirty="0"/>
-          </a:p>
-        </p:txBody>
-      </p:sp>
-      <p:sp>
-        <p:nvSpPr>
-          <p:cNvPr id="6" name="Text 4"/>
-          <p:cNvSpPr/>
-          <p:nvPr/>
-        </p:nvSpPr>
-        <p:spPr>
-          <a:xfrm>
-            <a:off x="457200" y="1005840"/>
-            <a:ext cx="8046720" cy="292608"/>
-          </a:xfrm>
-          <a:prstGeom prst="rect">
-            <a:avLst/>
-          </a:prstGeom>
-          <a:noFill/>
-          <a:ln/>
-        </p:spPr>
-        <p:txBody>
-          <a:bodyPr wrap="square" lIns="0" tIns="0" rIns="0" bIns="0" rtlCol="0" anchor="ctr"/>
-          <a:lstStyle/>
-          <a:p>
-            <a:pPr indent="0" marL="0">
-              <a:buNone/>
-            </a:pPr>
-            <a:r>
-              <a:rPr lang="en-US" sz="1100" b="1" spc="200" kern="0" dirty="0">
-                <a:solidFill>
-                  <a:srgbClr val="C7922C"/>
-                </a:solidFill>
-                <a:latin typeface="Calibri" pitchFamily="34" charset="0"/>
-                <a:ea typeface="Calibri" pitchFamily="34" charset="-122"/>
-                <a:cs typeface="Calibri" pitchFamily="34" charset="-120"/>
-              </a:rPr>
-              <a:t>WORD BANK — Sort these words!</a:t>
-            </a:r>
-            <a:endParaRPr lang="en-US" sz="1100" dirty="0"/>
-          </a:p>
-        </p:txBody>
-      </p:sp>
-      <p:sp>
-        <p:nvSpPr>
-          <p:cNvPr id="7" name="Shape 5"/>
-          <p:cNvSpPr/>
-          <p:nvPr/>
-        </p:nvSpPr>
-        <p:spPr>
-          <a:xfrm>
-            <a:off x="457200" y="1371600"/>
-            <a:ext cx="8229600" cy="914400"/>
-          </a:xfrm>
-          <a:prstGeom prst="roundRect">
-            <a:avLst>
-              <a:gd name="adj" fmla="val 10000"/>
+              <a:gd name="adj" fmla="val 13889"/>
             </a:avLst>
           </a:prstGeom>
           <a:solidFill>
@@ -3392,38 +3336,52 @@
       </p:sp>
       <p:sp>
         <p:nvSpPr>
-          <p:cNvPr id="8" name="Text 6"/>
-          <p:cNvSpPr/>
-          <p:nvPr/>
-        </p:nvSpPr>
-        <p:spPr>
-          <a:xfrm>
-            <a:off x="640080" y="1463040"/>
-            <a:ext cx="7863840" cy="731520"/>
-          </a:xfrm>
-          <a:prstGeom prst="rect">
-            <a:avLst/>
-          </a:prstGeom>
-          <a:noFill/>
-          <a:ln/>
-        </p:spPr>
-        <p:txBody>
-          <a:bodyPr wrap="square" lIns="0" tIns="0" rIns="0" bIns="0" rtlCol="0" anchor="ctr"/>
-          <a:lstStyle/>
-          <a:p>
-            <a:pPr algn="ctr" indent="0" marL="0">
+          <p:cNvPr id="6" name="Text 4"/>
+          <p:cNvSpPr/>
+          <p:nvPr/>
+        </p:nvSpPr>
+        <p:spPr>
+          <a:xfrm>
+            <a:off x="594360" y="1225296"/>
+            <a:ext cx="7863840" cy="402336"/>
+          </a:xfrm>
+          <a:prstGeom prst="rect">
+            <a:avLst/>
+          </a:prstGeom>
+          <a:noFill/>
+          <a:ln/>
+        </p:spPr>
+        <p:txBody>
+          <a:bodyPr wrap="square" lIns="0" tIns="0" rIns="0" bIns="0" rtlCol="0" anchor="ctr"/>
+          <a:lstStyle/>
+          <a:p>
+            <a:pPr indent="0" marL="0">
+              <a:buNone/>
+            </a:pPr>
+            <a:r>
+              <a:rPr lang="en-US" sz="1600" b="1" dirty="0">
+                <a:solidFill>
+                  <a:srgbClr val="34B76F"/>
+                </a:solidFill>
+                <a:latin typeface="Calibri" pitchFamily="34" charset="0"/>
+                <a:ea typeface="Calibri" pitchFamily="34" charset="-122"/>
+                <a:cs typeface="Calibri" pitchFamily="34" charset="-120"/>
+              </a:rPr>
+              <a:t>Stanley</a:t>
+            </a:r>
+            <a:pPr indent="0" marL="0">
               <a:buNone/>
             </a:pPr>
             <a:r>
               <a:rPr lang="en-US" sz="1600" dirty="0">
                 <a:solidFill>
-                  <a:srgbClr val="0E1C42"/>
-                </a:solidFill>
-                <a:latin typeface="Calibri" pitchFamily="34" charset="0"/>
-                <a:ea typeface="Calibri" pitchFamily="34" charset="-122"/>
-                <a:cs typeface="Calibri" pitchFamily="34" charset="-120"/>
-              </a:rPr>
-              <a:t>mailbox     postcard     zipcode     doorstep     railroad     airport     daytime     somewhere</a:t>
+                  <a:srgbClr val="1E293B"/>
+                </a:solidFill>
+                <a:latin typeface="Calibri" pitchFamily="34" charset="0"/>
+                <a:ea typeface="Calibri" pitchFamily="34" charset="-122"/>
+                <a:cs typeface="Calibri" pitchFamily="34" charset="-120"/>
+              </a:rPr>
+              <a:t> folded the letter and mailed it.</a:t>
             </a:r>
             <a:endParaRPr lang="en-US" sz="1600" dirty="0"/>
           </a:p>
@@ -3431,22 +3389,22 @@
       </p:sp>
       <p:sp>
         <p:nvSpPr>
-          <p:cNvPr id="9" name="Shape 7"/>
-          <p:cNvSpPr/>
-          <p:nvPr/>
-        </p:nvSpPr>
-        <p:spPr>
-          <a:xfrm>
-            <a:off x="457200" y="2468880"/>
-            <a:ext cx="7680960" cy="457200"/>
+          <p:cNvPr id="7" name="Shape 5"/>
+          <p:cNvSpPr/>
+          <p:nvPr/>
+        </p:nvSpPr>
+        <p:spPr>
+          <a:xfrm>
+            <a:off x="365760" y="1810512"/>
+            <a:ext cx="8412480" cy="658368"/>
           </a:xfrm>
           <a:prstGeom prst="roundRect">
             <a:avLst>
-              <a:gd name="adj" fmla="val 20000"/>
+              <a:gd name="adj" fmla="val 13889"/>
             </a:avLst>
           </a:prstGeom>
           <a:solidFill>
-            <a:srgbClr val="F0E8FF"/>
+            <a:srgbClr val="FFFFFF"/>
           </a:solidFill>
           <a:ln/>
           <a:effectLst>
@@ -3460,40 +3418,285 @@
       </p:sp>
       <p:sp>
         <p:nvSpPr>
+          <p:cNvPr id="8" name="Text 6"/>
+          <p:cNvSpPr/>
+          <p:nvPr/>
+        </p:nvSpPr>
+        <p:spPr>
+          <a:xfrm>
+            <a:off x="594360" y="1956816"/>
+            <a:ext cx="7863840" cy="402336"/>
+          </a:xfrm>
+          <a:prstGeom prst="rect">
+            <a:avLst/>
+          </a:prstGeom>
+          <a:noFill/>
+          <a:ln/>
+        </p:spPr>
+        <p:txBody>
+          <a:bodyPr wrap="square" lIns="0" tIns="0" rIns="0" bIns="0" rtlCol="0" anchor="ctr"/>
+          <a:lstStyle/>
+          <a:p>
+            <a:pPr indent="0" marL="0">
+              <a:buNone/>
+            </a:pPr>
+            <a:r>
+              <a:rPr lang="en-US" sz="1600" dirty="0">
+                <a:solidFill>
+                  <a:srgbClr val="1E293B"/>
+                </a:solidFill>
+                <a:latin typeface="Calibri" pitchFamily="34" charset="0"/>
+                <a:ea typeface="Calibri" pitchFamily="34" charset="-122"/>
+                <a:cs typeface="Calibri" pitchFamily="34" charset="-120"/>
+              </a:rPr>
+              <a:t>The postcard came from </a:t>
+            </a:r>
+            <a:pPr indent="0" marL="0">
+              <a:buNone/>
+            </a:pPr>
+            <a:r>
+              <a:rPr lang="en-US" sz="1600" b="1" dirty="0">
+                <a:solidFill>
+                  <a:srgbClr val="34B76F"/>
+                </a:solidFill>
+                <a:latin typeface="Calibri" pitchFamily="34" charset="0"/>
+                <a:ea typeface="Calibri" pitchFamily="34" charset="-122"/>
+                <a:cs typeface="Calibri" pitchFamily="34" charset="-120"/>
+              </a:rPr>
+              <a:t>California</a:t>
+            </a:r>
+            <a:pPr indent="0" marL="0">
+              <a:buNone/>
+            </a:pPr>
+            <a:r>
+              <a:rPr lang="en-US" sz="1600" dirty="0">
+                <a:solidFill>
+                  <a:srgbClr val="1E293B"/>
+                </a:solidFill>
+                <a:latin typeface="Calibri" pitchFamily="34" charset="0"/>
+                <a:ea typeface="Calibri" pitchFamily="34" charset="-122"/>
+                <a:cs typeface="Calibri" pitchFamily="34" charset="-120"/>
+              </a:rPr>
+              <a:t> last week.</a:t>
+            </a:r>
+            <a:endParaRPr lang="en-US" sz="1600" dirty="0"/>
+          </a:p>
+        </p:txBody>
+      </p:sp>
+      <p:sp>
+        <p:nvSpPr>
+          <p:cNvPr id="9" name="Shape 7"/>
+          <p:cNvSpPr/>
+          <p:nvPr/>
+        </p:nvSpPr>
+        <p:spPr>
+          <a:xfrm>
+            <a:off x="365760" y="2542032"/>
+            <a:ext cx="8412480" cy="658368"/>
+          </a:xfrm>
+          <a:prstGeom prst="roundRect">
+            <a:avLst>
+              <a:gd name="adj" fmla="val 13889"/>
+            </a:avLst>
+          </a:prstGeom>
+          <a:solidFill>
+            <a:srgbClr val="FEF6E8"/>
+          </a:solidFill>
+          <a:ln/>
+          <a:effectLst>
+            <a:outerShdw sx="100000" sy="100000" kx="0" ky="0" algn="bl" rotWithShape="0" blurRad="101600" dist="38100" dir="2700000">
+              <a:srgbClr val="000000">
+                <a:alpha val="12000"/>
+              </a:srgbClr>
+            </a:outerShdw>
+          </a:effectLst>
+        </p:spPr>
+      </p:sp>
+      <p:sp>
+        <p:nvSpPr>
           <p:cNvPr id="10" name="Text 8"/>
           <p:cNvSpPr/>
           <p:nvPr/>
         </p:nvSpPr>
         <p:spPr>
           <a:xfrm>
-            <a:off x="548640" y="2514600"/>
-            <a:ext cx="7498080" cy="365760"/>
-          </a:xfrm>
-          <a:prstGeom prst="rect">
-            <a:avLst/>
-          </a:prstGeom>
-          <a:noFill/>
-          <a:ln/>
-        </p:spPr>
-        <p:txBody>
-          <a:bodyPr wrap="square" lIns="0" tIns="0" rIns="0" bIns="0" rtlCol="0" anchor="ctr"/>
-          <a:lstStyle/>
-          <a:p>
-            <a:pPr algn="ctr" indent="0" marL="0">
-              <a:buNone/>
-            </a:pPr>
-            <a:r>
-              <a:rPr lang="en-US" sz="1400" b="1" dirty="0">
-                <a:solidFill>
-                  <a:srgbClr val="0E1C42"/>
-                </a:solidFill>
-                <a:latin typeface="Calibri" pitchFamily="34" charset="0"/>
-                <a:ea typeface="Calibri" pitchFamily="34" charset="-122"/>
-                <a:cs typeface="Calibri" pitchFamily="34" charset="-120"/>
-              </a:rPr>
-              <a:t>compound</a:t>
-            </a:r>
-            <a:endParaRPr lang="en-US" sz="1400" dirty="0"/>
+            <a:off x="594360" y="2688336"/>
+            <a:ext cx="7863840" cy="402336"/>
+          </a:xfrm>
+          <a:prstGeom prst="rect">
+            <a:avLst/>
+          </a:prstGeom>
+          <a:noFill/>
+          <a:ln/>
+        </p:spPr>
+        <p:txBody>
+          <a:bodyPr wrap="square" lIns="0" tIns="0" rIns="0" bIns="0" rtlCol="0" anchor="ctr"/>
+          <a:lstStyle/>
+          <a:p>
+            <a:pPr indent="0" marL="0">
+              <a:buNone/>
+            </a:pPr>
+            <a:r>
+              <a:rPr lang="en-US" sz="1600" b="1" dirty="0">
+                <a:solidFill>
+                  <a:srgbClr val="34B76F"/>
+                </a:solidFill>
+                <a:latin typeface="Calibri" pitchFamily="34" charset="0"/>
+                <a:ea typeface="Calibri" pitchFamily="34" charset="-122"/>
+                <a:cs typeface="Calibri" pitchFamily="34" charset="-120"/>
+              </a:rPr>
+              <a:t>A</a:t>
+            </a:r>
+            <a:pPr indent="0" marL="0">
+              <a:buNone/>
+            </a:pPr>
+            <a:r>
+              <a:rPr lang="en-US" sz="1600" dirty="0">
+                <a:solidFill>
+                  <a:srgbClr val="1E293B"/>
+                </a:solidFill>
+                <a:latin typeface="Calibri" pitchFamily="34" charset="0"/>
+                <a:ea typeface="Calibri" pitchFamily="34" charset="-122"/>
+                <a:cs typeface="Calibri" pitchFamily="34" charset="-120"/>
+              </a:rPr>
+              <a:t> mail carrier brings letters to every house.</a:t>
+            </a:r>
+            <a:endParaRPr lang="en-US" sz="1600" dirty="0"/>
+          </a:p>
+        </p:txBody>
+      </p:sp>
+      <p:sp>
+        <p:nvSpPr>
+          <p:cNvPr id="11" name="Shape 9"/>
+          <p:cNvSpPr/>
+          <p:nvPr/>
+        </p:nvSpPr>
+        <p:spPr>
+          <a:xfrm>
+            <a:off x="365760" y="3273552"/>
+            <a:ext cx="8412480" cy="658368"/>
+          </a:xfrm>
+          <a:prstGeom prst="roundRect">
+            <a:avLst>
+              <a:gd name="adj" fmla="val 13889"/>
+            </a:avLst>
+          </a:prstGeom>
+          <a:solidFill>
+            <a:srgbClr val="FFFFFF"/>
+          </a:solidFill>
+          <a:ln/>
+          <a:effectLst>
+            <a:outerShdw sx="100000" sy="100000" kx="0" ky="0" algn="bl" rotWithShape="0" blurRad="101600" dist="38100" dir="2700000">
+              <a:srgbClr val="000000">
+                <a:alpha val="12000"/>
+              </a:srgbClr>
+            </a:outerShdw>
+          </a:effectLst>
+        </p:spPr>
+      </p:sp>
+      <p:sp>
+        <p:nvSpPr>
+          <p:cNvPr id="12" name="Text 10"/>
+          <p:cNvSpPr/>
+          <p:nvPr/>
+        </p:nvSpPr>
+        <p:spPr>
+          <a:xfrm>
+            <a:off x="594360" y="3419856"/>
+            <a:ext cx="7863840" cy="402336"/>
+          </a:xfrm>
+          <a:prstGeom prst="rect">
+            <a:avLst/>
+          </a:prstGeom>
+          <a:noFill/>
+          <a:ln/>
+        </p:spPr>
+        <p:txBody>
+          <a:bodyPr wrap="square" lIns="0" tIns="0" rIns="0" bIns="0" rtlCol="0" anchor="ctr"/>
+          <a:lstStyle/>
+          <a:p>
+            <a:pPr indent="0" marL="0">
+              <a:buNone/>
+            </a:pPr>
+            <a:r>
+              <a:rPr lang="en-US" sz="1600" dirty="0">
+                <a:solidFill>
+                  <a:srgbClr val="1E293B"/>
+                </a:solidFill>
+                <a:latin typeface="Calibri" pitchFamily="34" charset="0"/>
+                <a:ea typeface="Calibri" pitchFamily="34" charset="-122"/>
+                <a:cs typeface="Calibri" pitchFamily="34" charset="-120"/>
+              </a:rPr>
+              <a:t>The </a:t>
+            </a:r>
+            <a:pPr indent="0" marL="0">
+              <a:buNone/>
+            </a:pPr>
+            <a:r>
+              <a:rPr lang="en-US" sz="1600" b="1" dirty="0">
+                <a:solidFill>
+                  <a:srgbClr val="34B76F"/>
+                </a:solidFill>
+                <a:latin typeface="Calibri" pitchFamily="34" charset="0"/>
+                <a:ea typeface="Calibri" pitchFamily="34" charset="-122"/>
+                <a:cs typeface="Calibri" pitchFamily="34" charset="-120"/>
+              </a:rPr>
+              <a:t>Mississippi</a:t>
+            </a:r>
+            <a:pPr indent="0" marL="0">
+              <a:buNone/>
+            </a:pPr>
+            <a:r>
+              <a:rPr lang="en-US" sz="1600" dirty="0">
+                <a:solidFill>
+                  <a:srgbClr val="1E293B"/>
+                </a:solidFill>
+                <a:latin typeface="Calibri" pitchFamily="34" charset="0"/>
+                <a:ea typeface="Calibri" pitchFamily="34" charset="-122"/>
+                <a:cs typeface="Calibri" pitchFamily="34" charset="-120"/>
+              </a:rPr>
+              <a:t> River runs south through many states.</a:t>
+            </a:r>
+            <a:endParaRPr lang="en-US" sz="1600" dirty="0"/>
+          </a:p>
+        </p:txBody>
+      </p:sp>
+      <p:sp>
+        <p:nvSpPr>
+          <p:cNvPr id="13" name="Text 11"/>
+          <p:cNvSpPr/>
+          <p:nvPr/>
+        </p:nvSpPr>
+        <p:spPr>
+          <a:xfrm>
+            <a:off x="365760" y="4050792"/>
+            <a:ext cx="8412480" cy="365760"/>
+          </a:xfrm>
+          <a:prstGeom prst="rect">
+            <a:avLst/>
+          </a:prstGeom>
+          <a:noFill/>
+          <a:ln/>
+        </p:spPr>
+        <p:txBody>
+          <a:bodyPr wrap="square" lIns="0" tIns="0" rIns="0" bIns="0" rtlCol="0" anchor="ctr"/>
+          <a:lstStyle/>
+          <a:p>
+            <a:pPr indent="0" marL="0">
+              <a:buNone/>
+            </a:pPr>
+            <a:r>
+              <a:rPr lang="en-US" sz="1500" b="1" dirty="0">
+                <a:solidFill>
+                  <a:srgbClr val="34B76F"/>
+                </a:solidFill>
+                <a:latin typeface="Calibri" pitchFamily="34" charset="0"/>
+                <a:ea typeface="Calibri" pitchFamily="34" charset="-122"/>
+                <a:cs typeface="Calibri" pitchFamily="34" charset="-120"/>
+              </a:rPr>
+              <a:t>✅  Answers revealed</a:t>
+            </a:r>
+            <a:endParaRPr lang="en-US" sz="1500" dirty="0"/>
           </a:p>
         </p:txBody>
       </p:sp>
@@ -3511,7 +3714,7 @@
     <p:bg>
       <p:bgPr>
         <a:solidFill>
-          <a:srgbClr val="E5F7FC"/>
+          <a:srgbClr val="F8FAFC"/>
         </a:solidFill>
       </p:bgPr>
     </p:bg>
@@ -3531,30 +3734,89 @@
       </p:grpSpPr>
       <p:sp>
         <p:nvSpPr>
-          <p:cNvPr id="2" name="Text 0"/>
-          <p:cNvSpPr/>
-          <p:nvPr/>
-        </p:nvSpPr>
-        <p:spPr>
-          <a:xfrm>
-            <a:off x="365760" y="164592"/>
-            <a:ext cx="5943600" cy="566928"/>
-          </a:xfrm>
-          <a:prstGeom prst="rect">
-            <a:avLst/>
-          </a:prstGeom>
-          <a:noFill/>
-          <a:ln/>
-        </p:spPr>
-        <p:txBody>
-          <a:bodyPr wrap="square" lIns="0" tIns="0" rIns="0" bIns="0" rtlCol="0" anchor="ctr"/>
-          <a:lstStyle/>
-          <a:p>
-            <a:pPr algn="l" indent="0" marL="0">
-              <a:buNone/>
-            </a:pPr>
-            <a:r>
-              <a:rPr lang="en-US" sz="2800" b="1" dirty="0">
+          <p:cNvPr id="2" name="Shape 0"/>
+          <p:cNvSpPr/>
+          <p:nvPr/>
+        </p:nvSpPr>
+        <p:spPr>
+          <a:xfrm>
+            <a:off x="0" y="0"/>
+            <a:ext cx="9144000" cy="566928"/>
+          </a:xfrm>
+          <a:prstGeom prst="rect">
+            <a:avLst/>
+          </a:prstGeom>
+          <a:solidFill>
+            <a:srgbClr val="0E1C42"/>
+          </a:solidFill>
+          <a:ln/>
+        </p:spPr>
+      </p:sp>
+      <p:sp>
+        <p:nvSpPr>
+          <p:cNvPr id="3" name="Text 1"/>
+          <p:cNvSpPr/>
+          <p:nvPr/>
+        </p:nvSpPr>
+        <p:spPr>
+          <a:xfrm>
+            <a:off x="365760" y="54864"/>
+            <a:ext cx="8412480" cy="457200"/>
+          </a:xfrm>
+          <a:prstGeom prst="rect">
+            <a:avLst/>
+          </a:prstGeom>
+          <a:noFill/>
+          <a:ln/>
+        </p:spPr>
+        <p:txBody>
+          <a:bodyPr wrap="square" lIns="0" tIns="0" rIns="0" bIns="0" rtlCol="0" anchor="ctr"/>
+          <a:lstStyle/>
+          <a:p>
+            <a:pPr indent="0" marL="0">
+              <a:buNone/>
+            </a:pPr>
+            <a:r>
+              <a:rPr lang="en-US" sz="2200" b="1" dirty="0">
+                <a:solidFill>
+                  <a:srgbClr val="FFFFFF"/>
+                </a:solidFill>
+                <a:latin typeface="Calibri" pitchFamily="34" charset="0"/>
+                <a:ea typeface="Calibri" pitchFamily="34" charset="-122"/>
+                <a:cs typeface="Calibri" pitchFamily="34" charset="-120"/>
+              </a:rPr>
+              <a:t>🔠  Spelling</a:t>
+            </a:r>
+            <a:endParaRPr lang="en-US" sz="2200" dirty="0"/>
+          </a:p>
+        </p:txBody>
+      </p:sp>
+      <p:sp>
+        <p:nvSpPr>
+          <p:cNvPr id="4" name="Text 2"/>
+          <p:cNvSpPr/>
+          <p:nvPr/>
+        </p:nvSpPr>
+        <p:spPr>
+          <a:xfrm>
+            <a:off x="365760" y="777240"/>
+            <a:ext cx="8229600" cy="237744"/>
+          </a:xfrm>
+          <a:prstGeom prst="rect">
+            <a:avLst/>
+          </a:prstGeom>
+          <a:noFill/>
+          <a:ln/>
+        </p:spPr>
+        <p:txBody>
+          <a:bodyPr wrap="square" lIns="0" tIns="0" rIns="0" bIns="0" rtlCol="0" anchor="ctr"/>
+          <a:lstStyle/>
+          <a:p>
+            <a:pPr indent="0" marL="0">
+              <a:buNone/>
+            </a:pPr>
+            <a:r>
+              <a:rPr lang="en-US" sz="1100" b="1" spc="100" kern="0" dirty="0">
                 <a:solidFill>
                   <a:srgbClr val="0E1C42"/>
                 </a:solidFill>
@@ -3562,116 +3824,76 @@
                 <a:ea typeface="Calibri" pitchFamily="34" charset="-122"/>
                 <a:cs typeface="Calibri" pitchFamily="34" charset="-120"/>
               </a:rPr>
-              <a:t>🔠 Spelling: Compound words — Sorted</a:t>
-            </a:r>
-            <a:endParaRPr lang="en-US" sz="2800" dirty="0"/>
-          </a:p>
-        </p:txBody>
-      </p:sp>
-      <p:sp>
-        <p:nvSpPr>
-          <p:cNvPr id="3" name="Shape 1"/>
-          <p:cNvSpPr/>
-          <p:nvPr/>
-        </p:nvSpPr>
-        <p:spPr>
-          <a:xfrm>
-            <a:off x="365760" y="749808"/>
-            <a:ext cx="8412480" cy="0"/>
-          </a:xfrm>
-          <a:prstGeom prst="line">
-            <a:avLst/>
-          </a:prstGeom>
-          <a:noFill/>
+              <a:t>COMPOUND WORDS</a:t>
+            </a:r>
+            <a:endParaRPr lang="en-US" sz="1100" dirty="0"/>
+          </a:p>
+        </p:txBody>
+      </p:sp>
+      <p:sp>
+        <p:nvSpPr>
+          <p:cNvPr id="5" name="Text 3"/>
+          <p:cNvSpPr/>
+          <p:nvPr/>
+        </p:nvSpPr>
+        <p:spPr>
+          <a:xfrm>
+            <a:off x="365760" y="1078992"/>
+            <a:ext cx="8229600" cy="237744"/>
+          </a:xfrm>
+          <a:prstGeom prst="rect">
+            <a:avLst/>
+          </a:prstGeom>
+          <a:noFill/>
+          <a:ln/>
+        </p:spPr>
+        <p:txBody>
+          <a:bodyPr wrap="square" lIns="0" tIns="0" rIns="0" bIns="0" rtlCol="0" anchor="ctr"/>
+          <a:lstStyle/>
+          <a:p>
+            <a:pPr indent="0" marL="0">
+              <a:buNone/>
+            </a:pPr>
+            <a:r>
+              <a:rPr lang="en-US" sz="1100" b="1" spc="100" kern="0" dirty="0">
+                <a:solidFill>
+                  <a:srgbClr val="64748B"/>
+                </a:solidFill>
+                <a:latin typeface="Calibri" pitchFamily="34" charset="0"/>
+                <a:ea typeface="Calibri" pitchFamily="34" charset="-122"/>
+                <a:cs typeface="Calibri" pitchFamily="34" charset="-120"/>
+              </a:rPr>
+              <a:t>WORD BANK</a:t>
+            </a:r>
+            <a:endParaRPr lang="en-US" sz="1100" dirty="0"/>
+          </a:p>
+        </p:txBody>
+      </p:sp>
+      <p:sp>
+        <p:nvSpPr>
+          <p:cNvPr id="6" name="Shape 4"/>
+          <p:cNvSpPr/>
+          <p:nvPr/>
+        </p:nvSpPr>
+        <p:spPr>
+          <a:xfrm>
+            <a:off x="365760" y="1353312"/>
+            <a:ext cx="8412480" cy="1005840"/>
+          </a:xfrm>
+          <a:prstGeom prst="roundRect">
+            <a:avLst>
+              <a:gd name="adj" fmla="val 9091"/>
+            </a:avLst>
+          </a:prstGeom>
+          <a:solidFill>
+            <a:srgbClr val="FFFFFF"/>
+          </a:solidFill>
           <a:ln w="19050">
             <a:solidFill>
-              <a:srgbClr val="5CB85C"/>
+              <a:srgbClr val="0E1C42"/>
             </a:solidFill>
             <a:prstDash val="solid"/>
           </a:ln>
-        </p:spPr>
-      </p:sp>
-      <p:sp>
-        <p:nvSpPr>
-          <p:cNvPr id="4" name="Shape 2"/>
-          <p:cNvSpPr/>
-          <p:nvPr/>
-        </p:nvSpPr>
-        <p:spPr>
-          <a:xfrm>
-            <a:off x="6492240" y="173736"/>
-            <a:ext cx="2286000" cy="502920"/>
-          </a:xfrm>
-          <a:prstGeom prst="roundRect">
-            <a:avLst>
-              <a:gd name="adj" fmla="val 21818"/>
-            </a:avLst>
-          </a:prstGeom>
-          <a:solidFill>
-            <a:srgbClr val="5CB85C"/>
-          </a:solidFill>
-          <a:ln/>
-        </p:spPr>
-      </p:sp>
-      <p:sp>
-        <p:nvSpPr>
-          <p:cNvPr id="5" name="Text 3"/>
-          <p:cNvSpPr/>
-          <p:nvPr/>
-        </p:nvSpPr>
-        <p:spPr>
-          <a:xfrm>
-            <a:off x="6492240" y="173736"/>
-            <a:ext cx="2286000" cy="502920"/>
-          </a:xfrm>
-          <a:prstGeom prst="rect">
-            <a:avLst/>
-          </a:prstGeom>
-          <a:noFill/>
-          <a:ln/>
-        </p:spPr>
-        <p:txBody>
-          <a:bodyPr wrap="square" lIns="0" tIns="0" rIns="0" bIns="0" rtlCol="0" anchor="ctr"/>
-          <a:lstStyle/>
-          <a:p>
-            <a:pPr algn="ctr" indent="0" marL="0">
-              <a:buNone/>
-            </a:pPr>
-            <a:r>
-              <a:rPr lang="en-US" sz="1100" b="1" dirty="0">
-                <a:solidFill>
-                  <a:srgbClr val="0E1C42"/>
-                </a:solidFill>
-                <a:latin typeface="Calibri" pitchFamily="34" charset="0"/>
-                <a:ea typeface="Calibri" pitchFamily="34" charset="-122"/>
-                <a:cs typeface="Calibri" pitchFamily="34" charset="-120"/>
-              </a:rPr>
-              <a:t>CHAT PROMPT</a:t>
-            </a:r>
-            <a:endParaRPr lang="en-US" sz="1100" dirty="0"/>
-          </a:p>
-        </p:txBody>
-      </p:sp>
-      <p:sp>
-        <p:nvSpPr>
-          <p:cNvPr id="6" name="Shape 4"/>
-          <p:cNvSpPr/>
-          <p:nvPr/>
-        </p:nvSpPr>
-        <p:spPr>
-          <a:xfrm>
-            <a:off x="457200" y="1005840"/>
-            <a:ext cx="7680960" cy="457200"/>
-          </a:xfrm>
-          <a:prstGeom prst="roundRect">
-            <a:avLst>
-              <a:gd name="adj" fmla="val 20000"/>
-            </a:avLst>
-          </a:prstGeom>
-          <a:solidFill>
-            <a:srgbClr val="F0E8FF"/>
-          </a:solidFill>
-          <a:ln/>
           <a:effectLst>
             <a:outerShdw sx="100000" sy="100000" kx="0" ky="0" algn="bl" rotWithShape="0" blurRad="101600" dist="38100" dir="2700000">
               <a:srgbClr val="000000">
@@ -3689,24 +3911,24 @@
         </p:nvSpPr>
         <p:spPr>
           <a:xfrm>
-            <a:off x="548640" y="1051560"/>
-            <a:ext cx="7498080" cy="365760"/>
-          </a:xfrm>
-          <a:prstGeom prst="rect">
-            <a:avLst/>
-          </a:prstGeom>
-          <a:noFill/>
-          <a:ln/>
-        </p:spPr>
-        <p:txBody>
-          <a:bodyPr wrap="square" lIns="0" tIns="0" rIns="0" bIns="0" rtlCol="0" anchor="ctr"/>
-          <a:lstStyle/>
-          <a:p>
-            <a:pPr algn="ctr" indent="0" marL="0">
-              <a:buNone/>
-            </a:pPr>
-            <a:r>
-              <a:rPr lang="en-US" sz="1400" b="1" dirty="0">
+            <a:off x="594360" y="1481328"/>
+            <a:ext cx="7955280" cy="749808"/>
+          </a:xfrm>
+          <a:prstGeom prst="rect">
+            <a:avLst/>
+          </a:prstGeom>
+          <a:noFill/>
+          <a:ln/>
+        </p:spPr>
+        <p:txBody>
+          <a:bodyPr wrap="square" lIns="0" tIns="0" rIns="0" bIns="0" rtlCol="0" anchor="ctr"/>
+          <a:lstStyle/>
+          <a:p>
+            <a:pPr indent="0" marL="0">
+              <a:buNone/>
+            </a:pPr>
+            <a:r>
+              <a:rPr lang="en-US" sz="1700" dirty="0">
                 <a:solidFill>
                   <a:srgbClr val="0E1C42"/>
                 </a:solidFill>
@@ -3714,9 +3936,9 @@
                 <a:ea typeface="Calibri" pitchFamily="34" charset="-122"/>
                 <a:cs typeface="Calibri" pitchFamily="34" charset="-120"/>
               </a:rPr>
-              <a:t>compound</a:t>
-            </a:r>
-            <a:endParaRPr lang="en-US" sz="1400" dirty="0"/>
+              <a:t>mailbox   ·   postcard   ·   landmark   ·   notebook   ·   compass   ·   envelope   ·   journey   ·   letter</a:t>
+            </a:r>
+            <a:endParaRPr lang="en-US" sz="1700" dirty="0"/>
           </a:p>
         </p:txBody>
       </p:sp>
@@ -3728,307 +3950,34 @@
         </p:nvSpPr>
         <p:spPr>
           <a:xfrm>
-            <a:off x="548640" y="1554480"/>
-            <a:ext cx="7498080" cy="320040"/>
-          </a:xfrm>
-          <a:prstGeom prst="rect">
-            <a:avLst/>
-          </a:prstGeom>
-          <a:noFill/>
-          <a:ln/>
-        </p:spPr>
-        <p:txBody>
-          <a:bodyPr wrap="square" lIns="0" tIns="0" rIns="0" bIns="0" rtlCol="0" anchor="ctr"/>
-          <a:lstStyle/>
-          <a:p>
-            <a:pPr algn="ctr" indent="0" marL="0">
-              <a:buNone/>
-            </a:pPr>
-            <a:r>
-              <a:rPr lang="en-US" sz="1400" b="1" dirty="0">
-                <a:solidFill>
-                  <a:srgbClr val="34B76F"/>
-                </a:solidFill>
-                <a:latin typeface="Calibri" pitchFamily="34" charset="0"/>
-                <a:ea typeface="Calibri" pitchFamily="34" charset="-122"/>
-                <a:cs typeface="Calibri" pitchFamily="34" charset="-120"/>
-              </a:rPr>
-              <a:t>mailbox</a:t>
-            </a:r>
-            <a:endParaRPr lang="en-US" sz="1400" dirty="0"/>
-          </a:p>
-        </p:txBody>
-      </p:sp>
-      <p:sp>
-        <p:nvSpPr>
-          <p:cNvPr id="9" name="Text 7"/>
-          <p:cNvSpPr/>
-          <p:nvPr/>
-        </p:nvSpPr>
-        <p:spPr>
-          <a:xfrm>
-            <a:off x="548640" y="1901952"/>
-            <a:ext cx="7498080" cy="320040"/>
-          </a:xfrm>
-          <a:prstGeom prst="rect">
-            <a:avLst/>
-          </a:prstGeom>
-          <a:noFill/>
-          <a:ln/>
-        </p:spPr>
-        <p:txBody>
-          <a:bodyPr wrap="square" lIns="0" tIns="0" rIns="0" bIns="0" rtlCol="0" anchor="ctr"/>
-          <a:lstStyle/>
-          <a:p>
-            <a:pPr algn="ctr" indent="0" marL="0">
-              <a:buNone/>
-            </a:pPr>
-            <a:r>
-              <a:rPr lang="en-US" sz="1400" b="1" dirty="0">
-                <a:solidFill>
-                  <a:srgbClr val="34B76F"/>
-                </a:solidFill>
-                <a:latin typeface="Calibri" pitchFamily="34" charset="0"/>
-                <a:ea typeface="Calibri" pitchFamily="34" charset="-122"/>
-                <a:cs typeface="Calibri" pitchFamily="34" charset="-120"/>
-              </a:rPr>
-              <a:t>postcard</a:t>
-            </a:r>
-            <a:endParaRPr lang="en-US" sz="1400" dirty="0"/>
-          </a:p>
-        </p:txBody>
-      </p:sp>
-      <p:sp>
-        <p:nvSpPr>
-          <p:cNvPr id="10" name="Text 8"/>
-          <p:cNvSpPr/>
-          <p:nvPr/>
-        </p:nvSpPr>
-        <p:spPr>
-          <a:xfrm>
-            <a:off x="548640" y="2249424"/>
-            <a:ext cx="7498080" cy="320040"/>
-          </a:xfrm>
-          <a:prstGeom prst="rect">
-            <a:avLst/>
-          </a:prstGeom>
-          <a:noFill/>
-          <a:ln/>
-        </p:spPr>
-        <p:txBody>
-          <a:bodyPr wrap="square" lIns="0" tIns="0" rIns="0" bIns="0" rtlCol="0" anchor="ctr"/>
-          <a:lstStyle/>
-          <a:p>
-            <a:pPr algn="ctr" indent="0" marL="0">
-              <a:buNone/>
-            </a:pPr>
-            <a:r>
-              <a:rPr lang="en-US" sz="1400" b="1" dirty="0">
-                <a:solidFill>
-                  <a:srgbClr val="34B76F"/>
-                </a:solidFill>
-                <a:latin typeface="Calibri" pitchFamily="34" charset="0"/>
-                <a:ea typeface="Calibri" pitchFamily="34" charset="-122"/>
-                <a:cs typeface="Calibri" pitchFamily="34" charset="-120"/>
-              </a:rPr>
-              <a:t>zipcode</a:t>
-            </a:r>
-            <a:endParaRPr lang="en-US" sz="1400" dirty="0"/>
-          </a:p>
-        </p:txBody>
-      </p:sp>
-      <p:sp>
-        <p:nvSpPr>
-          <p:cNvPr id="11" name="Text 9"/>
-          <p:cNvSpPr/>
-          <p:nvPr/>
-        </p:nvSpPr>
-        <p:spPr>
-          <a:xfrm>
-            <a:off x="548640" y="2596896"/>
-            <a:ext cx="7498080" cy="320040"/>
-          </a:xfrm>
-          <a:prstGeom prst="rect">
-            <a:avLst/>
-          </a:prstGeom>
-          <a:noFill/>
-          <a:ln/>
-        </p:spPr>
-        <p:txBody>
-          <a:bodyPr wrap="square" lIns="0" tIns="0" rIns="0" bIns="0" rtlCol="0" anchor="ctr"/>
-          <a:lstStyle/>
-          <a:p>
-            <a:pPr algn="ctr" indent="0" marL="0">
-              <a:buNone/>
-            </a:pPr>
-            <a:r>
-              <a:rPr lang="en-US" sz="1400" b="1" dirty="0">
-                <a:solidFill>
-                  <a:srgbClr val="34B76F"/>
-                </a:solidFill>
-                <a:latin typeface="Calibri" pitchFamily="34" charset="0"/>
-                <a:ea typeface="Calibri" pitchFamily="34" charset="-122"/>
-                <a:cs typeface="Calibri" pitchFamily="34" charset="-120"/>
-              </a:rPr>
-              <a:t>doorstep</a:t>
-            </a:r>
-            <a:endParaRPr lang="en-US" sz="1400" dirty="0"/>
-          </a:p>
-        </p:txBody>
-      </p:sp>
-      <p:sp>
-        <p:nvSpPr>
-          <p:cNvPr id="12" name="Text 10"/>
-          <p:cNvSpPr/>
-          <p:nvPr/>
-        </p:nvSpPr>
-        <p:spPr>
-          <a:xfrm>
-            <a:off x="548640" y="2944368"/>
-            <a:ext cx="7498080" cy="320040"/>
-          </a:xfrm>
-          <a:prstGeom prst="rect">
-            <a:avLst/>
-          </a:prstGeom>
-          <a:noFill/>
-          <a:ln/>
-        </p:spPr>
-        <p:txBody>
-          <a:bodyPr wrap="square" lIns="0" tIns="0" rIns="0" bIns="0" rtlCol="0" anchor="ctr"/>
-          <a:lstStyle/>
-          <a:p>
-            <a:pPr algn="ctr" indent="0" marL="0">
-              <a:buNone/>
-            </a:pPr>
-            <a:r>
-              <a:rPr lang="en-US" sz="1400" b="1" dirty="0">
-                <a:solidFill>
-                  <a:srgbClr val="34B76F"/>
-                </a:solidFill>
-                <a:latin typeface="Calibri" pitchFamily="34" charset="0"/>
-                <a:ea typeface="Calibri" pitchFamily="34" charset="-122"/>
-                <a:cs typeface="Calibri" pitchFamily="34" charset="-120"/>
-              </a:rPr>
-              <a:t>railroad</a:t>
-            </a:r>
-            <a:endParaRPr lang="en-US" sz="1400" dirty="0"/>
-          </a:p>
-        </p:txBody>
-      </p:sp>
-      <p:sp>
-        <p:nvSpPr>
-          <p:cNvPr id="13" name="Text 11"/>
-          <p:cNvSpPr/>
-          <p:nvPr/>
-        </p:nvSpPr>
-        <p:spPr>
-          <a:xfrm>
-            <a:off x="548640" y="3291840"/>
-            <a:ext cx="7498080" cy="320040"/>
-          </a:xfrm>
-          <a:prstGeom prst="rect">
-            <a:avLst/>
-          </a:prstGeom>
-          <a:noFill/>
-          <a:ln/>
-        </p:spPr>
-        <p:txBody>
-          <a:bodyPr wrap="square" lIns="0" tIns="0" rIns="0" bIns="0" rtlCol="0" anchor="ctr"/>
-          <a:lstStyle/>
-          <a:p>
-            <a:pPr algn="ctr" indent="0" marL="0">
-              <a:buNone/>
-            </a:pPr>
-            <a:r>
-              <a:rPr lang="en-US" sz="1400" b="1" dirty="0">
-                <a:solidFill>
-                  <a:srgbClr val="34B76F"/>
-                </a:solidFill>
-                <a:latin typeface="Calibri" pitchFamily="34" charset="0"/>
-                <a:ea typeface="Calibri" pitchFamily="34" charset="-122"/>
-                <a:cs typeface="Calibri" pitchFamily="34" charset="-120"/>
-              </a:rPr>
-              <a:t>airport</a:t>
-            </a:r>
-            <a:endParaRPr lang="en-US" sz="1400" dirty="0"/>
-          </a:p>
-        </p:txBody>
-      </p:sp>
-      <p:sp>
-        <p:nvSpPr>
-          <p:cNvPr id="14" name="Text 12"/>
-          <p:cNvSpPr/>
-          <p:nvPr/>
-        </p:nvSpPr>
-        <p:spPr>
-          <a:xfrm>
-            <a:off x="548640" y="3639312"/>
-            <a:ext cx="7498080" cy="320040"/>
-          </a:xfrm>
-          <a:prstGeom prst="rect">
-            <a:avLst/>
-          </a:prstGeom>
-          <a:noFill/>
-          <a:ln/>
-        </p:spPr>
-        <p:txBody>
-          <a:bodyPr wrap="square" lIns="0" tIns="0" rIns="0" bIns="0" rtlCol="0" anchor="ctr"/>
-          <a:lstStyle/>
-          <a:p>
-            <a:pPr algn="ctr" indent="0" marL="0">
-              <a:buNone/>
-            </a:pPr>
-            <a:r>
-              <a:rPr lang="en-US" sz="1400" b="1" dirty="0">
-                <a:solidFill>
-                  <a:srgbClr val="34B76F"/>
-                </a:solidFill>
-                <a:latin typeface="Calibri" pitchFamily="34" charset="0"/>
-                <a:ea typeface="Calibri" pitchFamily="34" charset="-122"/>
-                <a:cs typeface="Calibri" pitchFamily="34" charset="-120"/>
-              </a:rPr>
-              <a:t>daytime</a:t>
-            </a:r>
-            <a:endParaRPr lang="en-US" sz="1400" dirty="0"/>
-          </a:p>
-        </p:txBody>
-      </p:sp>
-      <p:sp>
-        <p:nvSpPr>
-          <p:cNvPr id="15" name="Text 13"/>
-          <p:cNvSpPr/>
-          <p:nvPr/>
-        </p:nvSpPr>
-        <p:spPr>
-          <a:xfrm>
-            <a:off x="548640" y="3986784"/>
-            <a:ext cx="7498080" cy="320040"/>
-          </a:xfrm>
-          <a:prstGeom prst="rect">
-            <a:avLst/>
-          </a:prstGeom>
-          <a:noFill/>
-          <a:ln/>
-        </p:spPr>
-        <p:txBody>
-          <a:bodyPr wrap="square" lIns="0" tIns="0" rIns="0" bIns="0" rtlCol="0" anchor="ctr"/>
-          <a:lstStyle/>
-          <a:p>
-            <a:pPr algn="ctr" indent="0" marL="0">
-              <a:buNone/>
-            </a:pPr>
-            <a:r>
-              <a:rPr lang="en-US" sz="1400" b="1" dirty="0">
-                <a:solidFill>
-                  <a:srgbClr val="34B76F"/>
-                </a:solidFill>
-                <a:latin typeface="Calibri" pitchFamily="34" charset="0"/>
-                <a:ea typeface="Calibri" pitchFamily="34" charset="-122"/>
-                <a:cs typeface="Calibri" pitchFamily="34" charset="-120"/>
-              </a:rPr>
-              <a:t>somewhere</a:t>
-            </a:r>
-            <a:endParaRPr lang="en-US" sz="1400" dirty="0"/>
+            <a:off x="365760" y="2514600"/>
+            <a:ext cx="8412480" cy="457200"/>
+          </a:xfrm>
+          <a:prstGeom prst="rect">
+            <a:avLst/>
+          </a:prstGeom>
+          <a:noFill/>
+          <a:ln/>
+        </p:spPr>
+        <p:txBody>
+          <a:bodyPr wrap="square" lIns="0" tIns="0" rIns="0" bIns="0" rtlCol="0" anchor="ctr"/>
+          <a:lstStyle/>
+          <a:p>
+            <a:pPr indent="0" marL="0">
+              <a:buNone/>
+            </a:pPr>
+            <a:r>
+              <a:rPr lang="en-US" sz="1500" i="1" dirty="0">
+                <a:solidFill>
+                  <a:srgbClr val="64748B"/>
+                </a:solidFill>
+                <a:latin typeface="Calibri" pitchFamily="34" charset="0"/>
+                <a:ea typeface="Calibri" pitchFamily="34" charset="-122"/>
+                <a:cs typeface="Calibri" pitchFamily="34" charset="-120"/>
+              </a:rPr>
+              <a:t>Which column does each word belong in?  Columns: Compound word  |  Not a compound word</a:t>
+            </a:r>
+            <a:endParaRPr lang="en-US" sz="1500" dirty="0"/>
           </a:p>
         </p:txBody>
       </p:sp>
@@ -4046,7 +3995,7 @@
     <p:bg>
       <p:bgPr>
         <a:solidFill>
-          <a:srgbClr val="FFFFFF"/>
+          <a:srgbClr val="F8FAFC"/>
         </a:solidFill>
       </p:bgPr>
     </p:bg>
@@ -4066,30 +4015,89 @@
       </p:grpSpPr>
       <p:sp>
         <p:nvSpPr>
-          <p:cNvPr id="2" name="Text 0"/>
-          <p:cNvSpPr/>
-          <p:nvPr/>
-        </p:nvSpPr>
-        <p:spPr>
-          <a:xfrm>
-            <a:off x="365760" y="164592"/>
-            <a:ext cx="8412480" cy="566928"/>
-          </a:xfrm>
-          <a:prstGeom prst="rect">
-            <a:avLst/>
-          </a:prstGeom>
-          <a:noFill/>
-          <a:ln/>
-        </p:spPr>
-        <p:txBody>
-          <a:bodyPr wrap="square" lIns="0" tIns="0" rIns="0" bIns="0" rtlCol="0" anchor="ctr"/>
-          <a:lstStyle/>
-          <a:p>
-            <a:pPr algn="l" indent="0" marL="0">
-              <a:buNone/>
-            </a:pPr>
-            <a:r>
-              <a:rPr lang="en-US" sz="2800" b="1" dirty="0">
+          <p:cNvPr id="2" name="Shape 0"/>
+          <p:cNvSpPr/>
+          <p:nvPr/>
+        </p:nvSpPr>
+        <p:spPr>
+          <a:xfrm>
+            <a:off x="0" y="0"/>
+            <a:ext cx="9144000" cy="566928"/>
+          </a:xfrm>
+          <a:prstGeom prst="rect">
+            <a:avLst/>
+          </a:prstGeom>
+          <a:solidFill>
+            <a:srgbClr val="0E1C42"/>
+          </a:solidFill>
+          <a:ln/>
+        </p:spPr>
+      </p:sp>
+      <p:sp>
+        <p:nvSpPr>
+          <p:cNvPr id="3" name="Text 1"/>
+          <p:cNvSpPr/>
+          <p:nvPr/>
+        </p:nvSpPr>
+        <p:spPr>
+          <a:xfrm>
+            <a:off x="365760" y="54864"/>
+            <a:ext cx="8412480" cy="457200"/>
+          </a:xfrm>
+          <a:prstGeom prst="rect">
+            <a:avLst/>
+          </a:prstGeom>
+          <a:noFill/>
+          <a:ln/>
+        </p:spPr>
+        <p:txBody>
+          <a:bodyPr wrap="square" lIns="0" tIns="0" rIns="0" bIns="0" rtlCol="0" anchor="ctr"/>
+          <a:lstStyle/>
+          <a:p>
+            <a:pPr indent="0" marL="0">
+              <a:buNone/>
+            </a:pPr>
+            <a:r>
+              <a:rPr lang="en-US" sz="2200" b="1" dirty="0">
+                <a:solidFill>
+                  <a:srgbClr val="FFFFFF"/>
+                </a:solidFill>
+                <a:latin typeface="Calibri" pitchFamily="34" charset="0"/>
+                <a:ea typeface="Calibri" pitchFamily="34" charset="-122"/>
+                <a:cs typeface="Calibri" pitchFamily="34" charset="-120"/>
+              </a:rPr>
+              <a:t>🔠  Spelling</a:t>
+            </a:r>
+            <a:endParaRPr lang="en-US" sz="2200" dirty="0"/>
+          </a:p>
+        </p:txBody>
+      </p:sp>
+      <p:sp>
+        <p:nvSpPr>
+          <p:cNvPr id="4" name="Text 2"/>
+          <p:cNvSpPr/>
+          <p:nvPr/>
+        </p:nvSpPr>
+        <p:spPr>
+          <a:xfrm>
+            <a:off x="365760" y="777240"/>
+            <a:ext cx="8229600" cy="237744"/>
+          </a:xfrm>
+          <a:prstGeom prst="rect">
+            <a:avLst/>
+          </a:prstGeom>
+          <a:noFill/>
+          <a:ln/>
+        </p:spPr>
+        <p:txBody>
+          <a:bodyPr wrap="square" lIns="0" tIns="0" rIns="0" bIns="0" rtlCol="0" anchor="ctr"/>
+          <a:lstStyle/>
+          <a:p>
+            <a:pPr indent="0" marL="0">
+              <a:buNone/>
+            </a:pPr>
+            <a:r>
+              <a:rPr lang="en-US" sz="1100" b="1" spc="100" kern="0" dirty="0">
                 <a:solidFill>
                   <a:srgbClr val="0E1C42"/>
                 </a:solidFill>
@@ -4097,69 +4105,7 @@
                 <a:ea typeface="Calibri" pitchFamily="34" charset="-122"/>
                 <a:cs typeface="Calibri" pitchFamily="34" charset="-120"/>
               </a:rPr>
-              <a:t>📕 Reading Focus</a:t>
-            </a:r>
-            <a:endParaRPr lang="en-US" sz="2800" dirty="0"/>
-          </a:p>
-        </p:txBody>
-      </p:sp>
-      <p:sp>
-        <p:nvSpPr>
-          <p:cNvPr id="3" name="Shape 1"/>
-          <p:cNvSpPr/>
-          <p:nvPr/>
-        </p:nvSpPr>
-        <p:spPr>
-          <a:xfrm>
-            <a:off x="365760" y="749808"/>
-            <a:ext cx="8412480" cy="0"/>
-          </a:xfrm>
-          <a:prstGeom prst="line">
-            <a:avLst/>
-          </a:prstGeom>
-          <a:noFill/>
-          <a:ln w="19050">
-            <a:solidFill>
-              <a:srgbClr val="55C8E8"/>
-            </a:solidFill>
-            <a:prstDash val="solid"/>
-          </a:ln>
-        </p:spPr>
-      </p:sp>
-      <p:sp>
-        <p:nvSpPr>
-          <p:cNvPr id="4" name="Text 2"/>
-          <p:cNvSpPr/>
-          <p:nvPr/>
-        </p:nvSpPr>
-        <p:spPr>
-          <a:xfrm>
-            <a:off x="457200" y="1005840"/>
-            <a:ext cx="8046720" cy="292608"/>
-          </a:xfrm>
-          <a:prstGeom prst="rect">
-            <a:avLst/>
-          </a:prstGeom>
-          <a:noFill/>
-          <a:ln/>
-        </p:spPr>
-        <p:txBody>
-          <a:bodyPr wrap="square" lIns="0" tIns="0" rIns="0" bIns="0" rtlCol="0" anchor="ctr"/>
-          <a:lstStyle/>
-          <a:p>
-            <a:pPr indent="0" marL="0">
-              <a:buNone/>
-            </a:pPr>
-            <a:r>
-              <a:rPr lang="en-US" sz="1100" b="1" spc="200" kern="0" dirty="0">
-                <a:solidFill>
-                  <a:srgbClr val="55C8E8"/>
-                </a:solidFill>
-                <a:latin typeface="Calibri" pitchFamily="34" charset="0"/>
-                <a:ea typeface="Calibri" pitchFamily="34" charset="-122"/>
-                <a:cs typeface="Calibri" pitchFamily="34" charset="-120"/>
-              </a:rPr>
-              <a:t>PAUSE &amp; THINK</a:t>
+              <a:t>COMPOUND WORDS</a:t>
             </a:r>
             <a:endParaRPr lang="en-US" sz="1100" dirty="0"/>
           </a:p>
@@ -4167,30 +4113,120 @@
       </p:sp>
       <p:sp>
         <p:nvSpPr>
-          <p:cNvPr id="5" name="Text 3"/>
-          <p:cNvSpPr/>
-          <p:nvPr/>
-        </p:nvSpPr>
-        <p:spPr>
-          <a:xfrm>
-            <a:off x="640080" y="1325880"/>
-            <a:ext cx="7863840" cy="548640"/>
-          </a:xfrm>
-          <a:prstGeom prst="rect">
-            <a:avLst/>
-          </a:prstGeom>
-          <a:noFill/>
-          <a:ln/>
-        </p:spPr>
-        <p:txBody>
-          <a:bodyPr wrap="square" lIns="0" tIns="0" rIns="0" bIns="0" rtlCol="0" anchor="ctr"/>
-          <a:lstStyle/>
-          <a:p>
-            <a:pPr indent="0" marL="0">
-              <a:buNone/>
-            </a:pPr>
-            <a:r>
-              <a:rPr lang="en-US" sz="1400" i="1" dirty="0">
+          <p:cNvPr id="5" name="Shape 3"/>
+          <p:cNvSpPr/>
+          <p:nvPr/>
+        </p:nvSpPr>
+        <p:spPr>
+          <a:xfrm>
+            <a:off x="411480" y="1078992"/>
+            <a:ext cx="4114800" cy="457200"/>
+          </a:xfrm>
+          <a:prstGeom prst="roundRect">
+            <a:avLst>
+              <a:gd name="adj" fmla="val 16000"/>
+            </a:avLst>
+          </a:prstGeom>
+          <a:solidFill>
+            <a:srgbClr val="0E1C42"/>
+          </a:solidFill>
+          <a:ln/>
+        </p:spPr>
+      </p:sp>
+      <p:sp>
+        <p:nvSpPr>
+          <p:cNvPr id="6" name="Text 4"/>
+          <p:cNvSpPr/>
+          <p:nvPr/>
+        </p:nvSpPr>
+        <p:spPr>
+          <a:xfrm>
+            <a:off x="457200" y="1133856"/>
+            <a:ext cx="4023360" cy="347472"/>
+          </a:xfrm>
+          <a:prstGeom prst="rect">
+            <a:avLst/>
+          </a:prstGeom>
+          <a:noFill/>
+          <a:ln/>
+        </p:spPr>
+        <p:txBody>
+          <a:bodyPr wrap="square" lIns="0" tIns="0" rIns="0" bIns="0" rtlCol="0" anchor="ctr"/>
+          <a:lstStyle/>
+          <a:p>
+            <a:pPr algn="ctr" indent="0" marL="0">
+              <a:buNone/>
+            </a:pPr>
+            <a:r>
+              <a:rPr lang="en-US" sz="1300" b="1" dirty="0">
+                <a:solidFill>
+                  <a:srgbClr val="FFFFFF"/>
+                </a:solidFill>
+                <a:latin typeface="Calibri" pitchFamily="34" charset="0"/>
+                <a:ea typeface="Calibri" pitchFamily="34" charset="-122"/>
+                <a:cs typeface="Calibri" pitchFamily="34" charset="-120"/>
+              </a:rPr>
+              <a:t>Compound word</a:t>
+            </a:r>
+            <a:endParaRPr lang="en-US" sz="1300" dirty="0"/>
+          </a:p>
+        </p:txBody>
+      </p:sp>
+      <p:sp>
+        <p:nvSpPr>
+          <p:cNvPr id="7" name="Shape 5"/>
+          <p:cNvSpPr/>
+          <p:nvPr/>
+        </p:nvSpPr>
+        <p:spPr>
+          <a:xfrm>
+            <a:off x="411480" y="1591056"/>
+            <a:ext cx="4114800" cy="2103120"/>
+          </a:xfrm>
+          <a:prstGeom prst="roundRect">
+            <a:avLst>
+              <a:gd name="adj" fmla="val 4348"/>
+            </a:avLst>
+          </a:prstGeom>
+          <a:solidFill>
+            <a:srgbClr val="FFFFFF"/>
+          </a:solidFill>
+          <a:ln/>
+          <a:effectLst>
+            <a:outerShdw sx="100000" sy="100000" kx="0" ky="0" algn="bl" rotWithShape="0" blurRad="101600" dist="38100" dir="2700000">
+              <a:srgbClr val="000000">
+                <a:alpha val="12000"/>
+              </a:srgbClr>
+            </a:outerShdw>
+          </a:effectLst>
+        </p:spPr>
+      </p:sp>
+      <p:sp>
+        <p:nvSpPr>
+          <p:cNvPr id="8" name="Text 6"/>
+          <p:cNvSpPr/>
+          <p:nvPr/>
+        </p:nvSpPr>
+        <p:spPr>
+          <a:xfrm>
+            <a:off x="502920" y="1700784"/>
+            <a:ext cx="3931920" cy="1883664"/>
+          </a:xfrm>
+          <a:prstGeom prst="rect">
+            <a:avLst/>
+          </a:prstGeom>
+          <a:noFill/>
+          <a:ln/>
+        </p:spPr>
+        <p:txBody>
+          <a:bodyPr wrap="square" lIns="0" tIns="0" rIns="0" bIns="0" rtlCol="0" anchor="ctr"/>
+          <a:lstStyle/>
+          <a:p>
+            <a:pPr algn="ctr" indent="0" marL="0">
+              <a:buNone/>
+            </a:pPr>
+            <a:r>
+              <a:rPr lang="en-US" sz="1400" dirty="0">
                 <a:solidFill>
                   <a:srgbClr val="1E293B"/>
                 </a:solidFill>
@@ -4198,7 +4234,238 @@
                 <a:ea typeface="Calibri" pitchFamily="34" charset="-122"/>
                 <a:cs typeface="Calibri" pitchFamily="34" charset="-120"/>
               </a:rPr>
-              <a:t>The text says the whole trip can take one day for nearby mail or a week for far-away mail. Why do you think distance makes such a big difference?</a:t>
+              <a:t>mailbox</a:t>
+            </a:r>
+            <a:endParaRPr lang="en-US" sz="1400" dirty="0"/>
+          </a:p>
+          <a:p>
+            <a:pPr algn="ctr" indent="0" marL="0">
+              <a:buNone/>
+            </a:pPr>
+            <a:r>
+              <a:rPr lang="en-US" sz="1400" dirty="0">
+                <a:solidFill>
+                  <a:srgbClr val="1E293B"/>
+                </a:solidFill>
+                <a:latin typeface="Calibri" pitchFamily="34" charset="0"/>
+                <a:ea typeface="Calibri" pitchFamily="34" charset="-122"/>
+                <a:cs typeface="Calibri" pitchFamily="34" charset="-120"/>
+              </a:rPr>
+              <a:t>postcard</a:t>
+            </a:r>
+            <a:endParaRPr lang="en-US" sz="1400" dirty="0"/>
+          </a:p>
+          <a:p>
+            <a:pPr algn="ctr" indent="0" marL="0">
+              <a:buNone/>
+            </a:pPr>
+            <a:r>
+              <a:rPr lang="en-US" sz="1400" dirty="0">
+                <a:solidFill>
+                  <a:srgbClr val="1E293B"/>
+                </a:solidFill>
+                <a:latin typeface="Calibri" pitchFamily="34" charset="0"/>
+                <a:ea typeface="Calibri" pitchFamily="34" charset="-122"/>
+                <a:cs typeface="Calibri" pitchFamily="34" charset="-120"/>
+              </a:rPr>
+              <a:t>landmark</a:t>
+            </a:r>
+            <a:endParaRPr lang="en-US" sz="1400" dirty="0"/>
+          </a:p>
+          <a:p>
+            <a:pPr algn="ctr" indent="0" marL="0">
+              <a:buNone/>
+            </a:pPr>
+            <a:r>
+              <a:rPr lang="en-US" sz="1400" dirty="0">
+                <a:solidFill>
+                  <a:srgbClr val="1E293B"/>
+                </a:solidFill>
+                <a:latin typeface="Calibri" pitchFamily="34" charset="0"/>
+                <a:ea typeface="Calibri" pitchFamily="34" charset="-122"/>
+                <a:cs typeface="Calibri" pitchFamily="34" charset="-120"/>
+              </a:rPr>
+              <a:t>notebook</a:t>
+            </a:r>
+            <a:endParaRPr lang="en-US" sz="1400" dirty="0"/>
+          </a:p>
+        </p:txBody>
+      </p:sp>
+      <p:sp>
+        <p:nvSpPr>
+          <p:cNvPr id="9" name="Shape 7"/>
+          <p:cNvSpPr/>
+          <p:nvPr/>
+        </p:nvSpPr>
+        <p:spPr>
+          <a:xfrm>
+            <a:off x="4617720" y="1078992"/>
+            <a:ext cx="4114800" cy="457200"/>
+          </a:xfrm>
+          <a:prstGeom prst="roundRect">
+            <a:avLst>
+              <a:gd name="adj" fmla="val 16000"/>
+            </a:avLst>
+          </a:prstGeom>
+          <a:solidFill>
+            <a:srgbClr val="0E1C42"/>
+          </a:solidFill>
+          <a:ln/>
+        </p:spPr>
+      </p:sp>
+      <p:sp>
+        <p:nvSpPr>
+          <p:cNvPr id="10" name="Text 8"/>
+          <p:cNvSpPr/>
+          <p:nvPr/>
+        </p:nvSpPr>
+        <p:spPr>
+          <a:xfrm>
+            <a:off x="4663440" y="1133856"/>
+            <a:ext cx="4023360" cy="347472"/>
+          </a:xfrm>
+          <a:prstGeom prst="rect">
+            <a:avLst/>
+          </a:prstGeom>
+          <a:noFill/>
+          <a:ln/>
+        </p:spPr>
+        <p:txBody>
+          <a:bodyPr wrap="square" lIns="0" tIns="0" rIns="0" bIns="0" rtlCol="0" anchor="ctr"/>
+          <a:lstStyle/>
+          <a:p>
+            <a:pPr algn="ctr" indent="0" marL="0">
+              <a:buNone/>
+            </a:pPr>
+            <a:r>
+              <a:rPr lang="en-US" sz="1300" b="1" dirty="0">
+                <a:solidFill>
+                  <a:srgbClr val="FFFFFF"/>
+                </a:solidFill>
+                <a:latin typeface="Calibri" pitchFamily="34" charset="0"/>
+                <a:ea typeface="Calibri" pitchFamily="34" charset="-122"/>
+                <a:cs typeface="Calibri" pitchFamily="34" charset="-120"/>
+              </a:rPr>
+              <a:t>Not a compound word</a:t>
+            </a:r>
+            <a:endParaRPr lang="en-US" sz="1300" dirty="0"/>
+          </a:p>
+        </p:txBody>
+      </p:sp>
+      <p:sp>
+        <p:nvSpPr>
+          <p:cNvPr id="11" name="Shape 9"/>
+          <p:cNvSpPr/>
+          <p:nvPr/>
+        </p:nvSpPr>
+        <p:spPr>
+          <a:xfrm>
+            <a:off x="4617720" y="1591056"/>
+            <a:ext cx="4114800" cy="2103120"/>
+          </a:xfrm>
+          <a:prstGeom prst="roundRect">
+            <a:avLst>
+              <a:gd name="adj" fmla="val 4348"/>
+            </a:avLst>
+          </a:prstGeom>
+          <a:solidFill>
+            <a:srgbClr val="FFFFFF"/>
+          </a:solidFill>
+          <a:ln/>
+          <a:effectLst>
+            <a:outerShdw sx="100000" sy="100000" kx="0" ky="0" algn="bl" rotWithShape="0" blurRad="101600" dist="38100" dir="2700000">
+              <a:srgbClr val="000000">
+                <a:alpha val="12000"/>
+              </a:srgbClr>
+            </a:outerShdw>
+          </a:effectLst>
+        </p:spPr>
+      </p:sp>
+      <p:sp>
+        <p:nvSpPr>
+          <p:cNvPr id="12" name="Text 10"/>
+          <p:cNvSpPr/>
+          <p:nvPr/>
+        </p:nvSpPr>
+        <p:spPr>
+          <a:xfrm>
+            <a:off x="4709160" y="1700784"/>
+            <a:ext cx="3931920" cy="1883664"/>
+          </a:xfrm>
+          <a:prstGeom prst="rect">
+            <a:avLst/>
+          </a:prstGeom>
+          <a:noFill/>
+          <a:ln/>
+        </p:spPr>
+        <p:txBody>
+          <a:bodyPr wrap="square" lIns="0" tIns="0" rIns="0" bIns="0" rtlCol="0" anchor="ctr"/>
+          <a:lstStyle/>
+          <a:p>
+            <a:pPr algn="ctr" indent="0" marL="0">
+              <a:buNone/>
+            </a:pPr>
+            <a:r>
+              <a:rPr lang="en-US" sz="1400" dirty="0">
+                <a:solidFill>
+                  <a:srgbClr val="1E293B"/>
+                </a:solidFill>
+                <a:latin typeface="Calibri" pitchFamily="34" charset="0"/>
+                <a:ea typeface="Calibri" pitchFamily="34" charset="-122"/>
+                <a:cs typeface="Calibri" pitchFamily="34" charset="-120"/>
+              </a:rPr>
+              <a:t>compass</a:t>
+            </a:r>
+            <a:endParaRPr lang="en-US" sz="1400" dirty="0"/>
+          </a:p>
+          <a:p>
+            <a:pPr algn="ctr" indent="0" marL="0">
+              <a:buNone/>
+            </a:pPr>
+            <a:r>
+              <a:rPr lang="en-US" sz="1400" dirty="0">
+                <a:solidFill>
+                  <a:srgbClr val="1E293B"/>
+                </a:solidFill>
+                <a:latin typeface="Calibri" pitchFamily="34" charset="0"/>
+                <a:ea typeface="Calibri" pitchFamily="34" charset="-122"/>
+                <a:cs typeface="Calibri" pitchFamily="34" charset="-120"/>
+              </a:rPr>
+              <a:t>envelope</a:t>
+            </a:r>
+            <a:endParaRPr lang="en-US" sz="1400" dirty="0"/>
+          </a:p>
+          <a:p>
+            <a:pPr algn="ctr" indent="0" marL="0">
+              <a:buNone/>
+            </a:pPr>
+            <a:r>
+              <a:rPr lang="en-US" sz="1400" dirty="0">
+                <a:solidFill>
+                  <a:srgbClr val="1E293B"/>
+                </a:solidFill>
+                <a:latin typeface="Calibri" pitchFamily="34" charset="0"/>
+                <a:ea typeface="Calibri" pitchFamily="34" charset="-122"/>
+                <a:cs typeface="Calibri" pitchFamily="34" charset="-120"/>
+              </a:rPr>
+              <a:t>journey</a:t>
+            </a:r>
+            <a:endParaRPr lang="en-US" sz="1400" dirty="0"/>
+          </a:p>
+          <a:p>
+            <a:pPr algn="ctr" indent="0" marL="0">
+              <a:buNone/>
+            </a:pPr>
+            <a:r>
+              <a:rPr lang="en-US" sz="1400" dirty="0">
+                <a:solidFill>
+                  <a:srgbClr val="1E293B"/>
+                </a:solidFill>
+                <a:latin typeface="Calibri" pitchFamily="34" charset="0"/>
+                <a:ea typeface="Calibri" pitchFamily="34" charset="-122"/>
+                <a:cs typeface="Calibri" pitchFamily="34" charset="-120"/>
+              </a:rPr>
+              <a:t>letter</a:t>
             </a:r>
             <a:endParaRPr lang="en-US" sz="1400" dirty="0"/>
           </a:p>
@@ -4238,30 +4505,89 @@
       </p:grpSpPr>
       <p:sp>
         <p:nvSpPr>
-          <p:cNvPr id="2" name="Text 0"/>
-          <p:cNvSpPr/>
-          <p:nvPr/>
-        </p:nvSpPr>
-        <p:spPr>
-          <a:xfrm>
-            <a:off x="365760" y="164592"/>
-            <a:ext cx="8412480" cy="566928"/>
-          </a:xfrm>
-          <a:prstGeom prst="rect">
-            <a:avLst/>
-          </a:prstGeom>
-          <a:noFill/>
-          <a:ln/>
-        </p:spPr>
-        <p:txBody>
-          <a:bodyPr wrap="square" lIns="0" tIns="0" rIns="0" bIns="0" rtlCol="0" anchor="ctr"/>
-          <a:lstStyle/>
-          <a:p>
-            <a:pPr algn="l" indent="0" marL="0">
-              <a:buNone/>
-            </a:pPr>
-            <a:r>
-              <a:rPr lang="en-US" sz="2800" b="1" dirty="0">
+          <p:cNvPr id="2" name="Shape 0"/>
+          <p:cNvSpPr/>
+          <p:nvPr/>
+        </p:nvSpPr>
+        <p:spPr>
+          <a:xfrm>
+            <a:off x="0" y="0"/>
+            <a:ext cx="9144000" cy="566928"/>
+          </a:xfrm>
+          <a:prstGeom prst="rect">
+            <a:avLst/>
+          </a:prstGeom>
+          <a:solidFill>
+            <a:srgbClr val="5CB85C"/>
+          </a:solidFill>
+          <a:ln/>
+        </p:spPr>
+      </p:sp>
+      <p:sp>
+        <p:nvSpPr>
+          <p:cNvPr id="3" name="Text 1"/>
+          <p:cNvSpPr/>
+          <p:nvPr/>
+        </p:nvSpPr>
+        <p:spPr>
+          <a:xfrm>
+            <a:off x="365760" y="54864"/>
+            <a:ext cx="8412480" cy="457200"/>
+          </a:xfrm>
+          <a:prstGeom prst="rect">
+            <a:avLst/>
+          </a:prstGeom>
+          <a:noFill/>
+          <a:ln/>
+        </p:spPr>
+        <p:txBody>
+          <a:bodyPr wrap="square" lIns="0" tIns="0" rIns="0" bIns="0" rtlCol="0" anchor="ctr"/>
+          <a:lstStyle/>
+          <a:p>
+            <a:pPr indent="0" marL="0">
+              <a:buNone/>
+            </a:pPr>
+            <a:r>
+              <a:rPr lang="en-US" sz="2200" b="1" dirty="0">
+                <a:solidFill>
+                  <a:srgbClr val="FFFFFF"/>
+                </a:solidFill>
+                <a:latin typeface="Calibri" pitchFamily="34" charset="0"/>
+                <a:ea typeface="Calibri" pitchFamily="34" charset="-122"/>
+                <a:cs typeface="Calibri" pitchFamily="34" charset="-120"/>
+              </a:rPr>
+              <a:t>📕  Read</a:t>
+            </a:r>
+            <a:endParaRPr lang="en-US" sz="2200" dirty="0"/>
+          </a:p>
+        </p:txBody>
+      </p:sp>
+      <p:sp>
+        <p:nvSpPr>
+          <p:cNvPr id="4" name="Text 2"/>
+          <p:cNvSpPr/>
+          <p:nvPr/>
+        </p:nvSpPr>
+        <p:spPr>
+          <a:xfrm>
+            <a:off x="365760" y="868680"/>
+            <a:ext cx="8412480" cy="502920"/>
+          </a:xfrm>
+          <a:prstGeom prst="rect">
+            <a:avLst/>
+          </a:prstGeom>
+          <a:noFill/>
+          <a:ln/>
+        </p:spPr>
+        <p:txBody>
+          <a:bodyPr wrap="square" lIns="0" tIns="0" rIns="0" bIns="0" rtlCol="0" anchor="ctr"/>
+          <a:lstStyle/>
+          <a:p>
+            <a:pPr indent="0" marL="0">
+              <a:buNone/>
+            </a:pPr>
+            <a:r>
+              <a:rPr lang="en-US" sz="2600" b="1" dirty="0">
                 <a:solidFill>
                   <a:srgbClr val="0E1C42"/>
                 </a:solidFill>
@@ -4269,61 +4595,77 @@
                 <a:ea typeface="Calibri" pitchFamily="34" charset="-122"/>
                 <a:cs typeface="Calibri" pitchFamily="34" charset="-120"/>
               </a:rPr>
-              <a:t>📝 Reading-Writing Connection (RWM)</a:t>
-            </a:r>
-            <a:endParaRPr lang="en-US" sz="2800" dirty="0"/>
-          </a:p>
-        </p:txBody>
-      </p:sp>
-      <p:sp>
-        <p:nvSpPr>
-          <p:cNvPr id="3" name="Shape 1"/>
-          <p:cNvSpPr/>
-          <p:nvPr/>
-        </p:nvSpPr>
-        <p:spPr>
-          <a:xfrm>
-            <a:off x="365760" y="749808"/>
-            <a:ext cx="8412480" cy="0"/>
-          </a:xfrm>
-          <a:prstGeom prst="line">
-            <a:avLst/>
-          </a:prstGeom>
-          <a:noFill/>
-          <a:ln w="19050">
-            <a:solidFill>
-              <a:srgbClr val="34B76F"/>
-            </a:solidFill>
-            <a:prstDash val="solid"/>
-          </a:ln>
-        </p:spPr>
-      </p:sp>
-      <p:sp>
-        <p:nvSpPr>
-          <p:cNvPr id="4" name="Text 2"/>
-          <p:cNvSpPr/>
-          <p:nvPr/>
-        </p:nvSpPr>
-        <p:spPr>
-          <a:xfrm>
-            <a:off x="640080" y="1371600"/>
-            <a:ext cx="7863840" cy="457200"/>
-          </a:xfrm>
-          <a:prstGeom prst="rect">
-            <a:avLst/>
-          </a:prstGeom>
-          <a:noFill/>
-          <a:ln/>
-        </p:spPr>
-        <p:txBody>
-          <a:bodyPr wrap="square" lIns="0" tIns="0" rIns="0" bIns="0" rtlCol="0" anchor="ctr"/>
-          <a:lstStyle/>
-          <a:p>
-            <a:pPr indent="0" marL="0">
-              <a:buNone/>
-            </a:pPr>
-            <a:r>
-              <a:rPr lang="en-US" sz="1600" dirty="0">
+              <a:t>📰 Read: How Does a Letter Travel?</a:t>
+            </a:r>
+            <a:endParaRPr lang="en-US" sz="2600" dirty="0"/>
+          </a:p>
+        </p:txBody>
+      </p:sp>
+      <p:sp>
+        <p:nvSpPr>
+          <p:cNvPr id="5" name="Text 3"/>
+          <p:cNvSpPr/>
+          <p:nvPr/>
+        </p:nvSpPr>
+        <p:spPr>
+          <a:xfrm>
+            <a:off x="365760" y="1463040"/>
+            <a:ext cx="8229600" cy="237744"/>
+          </a:xfrm>
+          <a:prstGeom prst="rect">
+            <a:avLst/>
+          </a:prstGeom>
+          <a:noFill/>
+          <a:ln/>
+        </p:spPr>
+        <p:txBody>
+          <a:bodyPr wrap="square" lIns="0" tIns="0" rIns="0" bIns="0" rtlCol="0" anchor="ctr"/>
+          <a:lstStyle/>
+          <a:p>
+            <a:pPr indent="0" marL="0">
+              <a:buNone/>
+            </a:pPr>
+            <a:r>
+              <a:rPr lang="en-US" sz="1100" b="1" spc="100" kern="0" dirty="0">
+                <a:solidFill>
+                  <a:srgbClr val="C7922C"/>
+                </a:solidFill>
+                <a:latin typeface="Calibri" pitchFamily="34" charset="0"/>
+                <a:ea typeface="Calibri" pitchFamily="34" charset="-122"/>
+                <a:cs typeface="Calibri" pitchFamily="34" charset="-120"/>
+              </a:rPr>
+              <a:t>PAUSE &amp; THINK</a:t>
+            </a:r>
+            <a:endParaRPr lang="en-US" sz="1100" dirty="0"/>
+          </a:p>
+        </p:txBody>
+      </p:sp>
+      <p:sp>
+        <p:nvSpPr>
+          <p:cNvPr id="6" name="Text 4"/>
+          <p:cNvSpPr/>
+          <p:nvPr/>
+        </p:nvSpPr>
+        <p:spPr>
+          <a:xfrm>
+            <a:off x="365760" y="1719072"/>
+            <a:ext cx="8412480" cy="914400"/>
+          </a:xfrm>
+          <a:prstGeom prst="rect">
+            <a:avLst/>
+          </a:prstGeom>
+          <a:noFill/>
+          <a:ln/>
+        </p:spPr>
+        <p:txBody>
+          <a:bodyPr wrap="square" lIns="0" tIns="0" rIns="0" bIns="0" rtlCol="0" anchor="ctr"/>
+          <a:lstStyle/>
+          <a:p>
+            <a:pPr indent="0" marL="0">
+              <a:buNone/>
+            </a:pPr>
+            <a:r>
+              <a:rPr lang="en-US" sz="1500" dirty="0">
                 <a:solidFill>
                   <a:srgbClr val="1E293B"/>
                 </a:solidFill>
@@ -4331,48 +4673,26 @@
                 <a:ea typeface="Calibri" pitchFamily="34" charset="-122"/>
                 <a:cs typeface="Calibri" pitchFamily="34" charset="-120"/>
               </a:rPr>
-              <a:t>Open your writing assignment in Canvas.</a:t>
-            </a:r>
-            <a:endParaRPr lang="en-US" sz="1600" dirty="0"/>
-          </a:p>
-        </p:txBody>
-      </p:sp>
-      <p:sp>
-        <p:nvSpPr>
-          <p:cNvPr id="5" name="Text 3"/>
-          <p:cNvSpPr/>
-          <p:nvPr/>
-        </p:nvSpPr>
-        <p:spPr>
-          <a:xfrm>
-            <a:off x="640080" y="2011680"/>
-            <a:ext cx="7863840" cy="457200"/>
-          </a:xfrm>
-          <a:prstGeom prst="rect">
-            <a:avLst/>
-          </a:prstGeom>
-          <a:noFill/>
-          <a:ln/>
-        </p:spPr>
-        <p:txBody>
-          <a:bodyPr wrap="square" lIns="0" tIns="0" rIns="0" bIns="0" rtlCol="0" anchor="ctr"/>
-          <a:lstStyle/>
-          <a:p>
-            <a:pPr indent="0" marL="0">
-              <a:buNone/>
-            </a:pPr>
-            <a:r>
-              <a:rPr lang="en-US" sz="1400" dirty="0">
-                <a:solidFill>
-                  <a:srgbClr val="64748B"/>
-                </a:solidFill>
-                <a:latin typeface="Calibri" pitchFamily="34" charset="0"/>
-                <a:ea typeface="Calibri" pitchFamily="34" charset="-122"/>
-                <a:cs typeface="Calibri" pitchFamily="34" charset="-120"/>
-              </a:rPr>
-              <a:t>Follow the writing prompt for today's workshop.</a:t>
-            </a:r>
-            <a:endParaRPr lang="en-US" sz="1400" dirty="0"/>
+              <a:t>•  What happens to a letter between the moment you drop it in a mailbox and the moment someone opens it?</a:t>
+            </a:r>
+            <a:endParaRPr lang="en-US" sz="1500" dirty="0"/>
+          </a:p>
+          <a:p>
+            <a:pPr indent="0" marL="0">
+              <a:buNone/>
+            </a:pPr>
+            <a:r>
+              <a:rPr lang="en-US" sz="1500" dirty="0">
+                <a:solidFill>
+                  <a:srgbClr val="1E293B"/>
+                </a:solidFill>
+                <a:latin typeface="Calibri" pitchFamily="34" charset="0"/>
+                <a:ea typeface="Calibri" pitchFamily="34" charset="-122"/>
+                <a:cs typeface="Calibri" pitchFamily="34" charset="-120"/>
+              </a:rPr>
+              <a:t>•  The text says the whole trip can take one day for nearby mail or a week for far-away mail. Why do you think distance makes such a big difference?</a:t>
+            </a:r>
+            <a:endParaRPr lang="en-US" sz="1500" dirty="0"/>
           </a:p>
         </p:txBody>
       </p:sp>
@@ -4410,65 +4730,62 @@
       </p:grpSpPr>
       <p:sp>
         <p:nvSpPr>
-          <p:cNvPr id="2" name="Text 0"/>
-          <p:cNvSpPr/>
-          <p:nvPr/>
-        </p:nvSpPr>
-        <p:spPr>
-          <a:xfrm>
-            <a:off x="365760" y="164592"/>
-            <a:ext cx="8412480" cy="566928"/>
-          </a:xfrm>
-          <a:prstGeom prst="rect">
-            <a:avLst/>
-          </a:prstGeom>
-          <a:noFill/>
-          <a:ln/>
-        </p:spPr>
-        <p:txBody>
-          <a:bodyPr wrap="square" lIns="0" tIns="0" rIns="0" bIns="0" rtlCol="0" anchor="ctr"/>
-          <a:lstStyle/>
-          <a:p>
-            <a:pPr algn="l" indent="0" marL="0">
-              <a:buNone/>
-            </a:pPr>
-            <a:r>
-              <a:rPr lang="en-US" sz="2800" b="1" dirty="0">
-                <a:solidFill>
-                  <a:srgbClr val="0E1C42"/>
-                </a:solidFill>
-                <a:latin typeface="Calibri" pitchFamily="34" charset="0"/>
-                <a:ea typeface="Calibri" pitchFamily="34" charset="-122"/>
-                <a:cs typeface="Calibri" pitchFamily="34" charset="-120"/>
-              </a:rPr>
-              <a:t>✏️ 10-Minute Write</a:t>
-            </a:r>
-            <a:endParaRPr lang="en-US" sz="2800" dirty="0"/>
-          </a:p>
-        </p:txBody>
-      </p:sp>
-      <p:sp>
-        <p:nvSpPr>
-          <p:cNvPr id="3" name="Shape 1"/>
-          <p:cNvSpPr/>
-          <p:nvPr/>
-        </p:nvSpPr>
-        <p:spPr>
-          <a:xfrm>
-            <a:off x="365760" y="749808"/>
-            <a:ext cx="8412480" cy="0"/>
-          </a:xfrm>
-          <a:prstGeom prst="line">
-            <a:avLst/>
-          </a:prstGeom>
-          <a:noFill/>
-          <a:ln w="19050">
-            <a:solidFill>
-              <a:srgbClr val="C7922C"/>
-            </a:solidFill>
-            <a:prstDash val="solid"/>
-          </a:ln>
-        </p:spPr>
+          <p:cNvPr id="2" name="Shape 0"/>
+          <p:cNvSpPr/>
+          <p:nvPr/>
+        </p:nvSpPr>
+        <p:spPr>
+          <a:xfrm>
+            <a:off x="0" y="0"/>
+            <a:ext cx="9144000" cy="566928"/>
+          </a:xfrm>
+          <a:prstGeom prst="rect">
+            <a:avLst/>
+          </a:prstGeom>
+          <a:solidFill>
+            <a:srgbClr val="C7922C"/>
+          </a:solidFill>
+          <a:ln/>
+        </p:spPr>
+      </p:sp>
+      <p:sp>
+        <p:nvSpPr>
+          <p:cNvPr id="3" name="Text 1"/>
+          <p:cNvSpPr/>
+          <p:nvPr/>
+        </p:nvSpPr>
+        <p:spPr>
+          <a:xfrm>
+            <a:off x="365760" y="54864"/>
+            <a:ext cx="8412480" cy="457200"/>
+          </a:xfrm>
+          <a:prstGeom prst="rect">
+            <a:avLst/>
+          </a:prstGeom>
+          <a:noFill/>
+          <a:ln/>
+        </p:spPr>
+        <p:txBody>
+          <a:bodyPr wrap="square" lIns="0" tIns="0" rIns="0" bIns="0" rtlCol="0" anchor="ctr"/>
+          <a:lstStyle/>
+          <a:p>
+            <a:pPr indent="0" marL="0">
+              <a:buNone/>
+            </a:pPr>
+            <a:r>
+              <a:rPr lang="en-US" sz="2200" b="1" dirty="0">
+                <a:solidFill>
+                  <a:srgbClr val="FFFFFF"/>
+                </a:solidFill>
+                <a:latin typeface="Calibri" pitchFamily="34" charset="0"/>
+                <a:ea typeface="Calibri" pitchFamily="34" charset="-122"/>
+                <a:cs typeface="Calibri" pitchFamily="34" charset="-120"/>
+              </a:rPr>
+              <a:t>✍️  10-Minute Write</a:t>
+            </a:r>
+            <a:endParaRPr lang="en-US" sz="2200" dirty="0"/>
+          </a:p>
+        </p:txBody>
       </p:sp>
       <p:sp>
         <p:nvSpPr>
@@ -4478,24 +4795,24 @@
         </p:nvSpPr>
         <p:spPr>
           <a:xfrm>
-            <a:off x="457200" y="1005840"/>
-            <a:ext cx="8046720" cy="292608"/>
-          </a:xfrm>
-          <a:prstGeom prst="rect">
-            <a:avLst/>
-          </a:prstGeom>
-          <a:noFill/>
-          <a:ln/>
-        </p:spPr>
-        <p:txBody>
-          <a:bodyPr wrap="square" lIns="0" tIns="0" rIns="0" bIns="0" rtlCol="0" anchor="ctr"/>
-          <a:lstStyle/>
-          <a:p>
-            <a:pPr indent="0" marL="0">
-              <a:buNone/>
-            </a:pPr>
-            <a:r>
-              <a:rPr lang="en-US" sz="1100" b="1" spc="200" kern="0" dirty="0">
+            <a:off x="365760" y="822960"/>
+            <a:ext cx="8229600" cy="237744"/>
+          </a:xfrm>
+          <a:prstGeom prst="rect">
+            <a:avLst/>
+          </a:prstGeom>
+          <a:noFill/>
+          <a:ln/>
+        </p:spPr>
+        <p:txBody>
+          <a:bodyPr wrap="square" lIns="0" tIns="0" rIns="0" bIns="0" rtlCol="0" anchor="ctr"/>
+          <a:lstStyle/>
+          <a:p>
+            <a:pPr indent="0" marL="0">
+              <a:buNone/>
+            </a:pPr>
+            <a:r>
+              <a:rPr lang="en-US" sz="1100" b="1" spc="100" kern="0" dirty="0">
                 <a:solidFill>
                   <a:srgbClr val="C7922C"/>
                 </a:solidFill>
@@ -4503,7 +4820,7 @@
                 <a:ea typeface="Calibri" pitchFamily="34" charset="-122"/>
                 <a:cs typeface="Calibri" pitchFamily="34" charset="-120"/>
               </a:rPr>
-              <a:t>📖 READ THE PROMPT — 1 MINUTE</a:t>
+              <a:t>READ THE PROMPT — 1 MINUTE</a:t>
             </a:r>
             <a:endParaRPr lang="en-US" sz="1100" dirty="0"/>
           </a:p>
@@ -4517,18 +4834,18 @@
         </p:nvSpPr>
         <p:spPr>
           <a:xfrm>
-            <a:off x="457200" y="1417320"/>
-            <a:ext cx="8229600" cy="1645920"/>
+            <a:off x="365760" y="1143000"/>
+            <a:ext cx="8412480" cy="1737360"/>
           </a:xfrm>
           <a:prstGeom prst="roundRect">
             <a:avLst>
-              <a:gd name="adj" fmla="val 5556"/>
+              <a:gd name="adj" fmla="val 5263"/>
             </a:avLst>
           </a:prstGeom>
           <a:solidFill>
             <a:srgbClr val="FEF6E8"/>
           </a:solidFill>
-          <a:ln w="12700">
+          <a:ln w="19050">
             <a:solidFill>
               <a:srgbClr val="C7922C"/>
             </a:solidFill>
@@ -4551,24 +4868,24 @@
         </p:nvSpPr>
         <p:spPr>
           <a:xfrm>
-            <a:off x="640080" y="1527048"/>
-            <a:ext cx="7863840" cy="1417320"/>
-          </a:xfrm>
-          <a:prstGeom prst="rect">
-            <a:avLst/>
-          </a:prstGeom>
-          <a:noFill/>
-          <a:ln/>
-        </p:spPr>
-        <p:txBody>
-          <a:bodyPr wrap="square" lIns="0" tIns="0" rIns="0" bIns="0" rtlCol="0" anchor="ctr"/>
-          <a:lstStyle/>
-          <a:p>
-            <a:pPr indent="0" marL="0">
-              <a:buNone/>
-            </a:pPr>
-            <a:r>
-              <a:rPr lang="en-US" sz="1800" i="1" dirty="0">
+            <a:off x="594360" y="1271016"/>
+            <a:ext cx="7955280" cy="1481328"/>
+          </a:xfrm>
+          <a:prstGeom prst="rect">
+            <a:avLst/>
+          </a:prstGeom>
+          <a:noFill/>
+          <a:ln/>
+        </p:spPr>
+        <p:txBody>
+          <a:bodyPr wrap="square" lIns="0" tIns="0" rIns="0" bIns="0" rtlCol="0" anchor="ctr"/>
+          <a:lstStyle/>
+          <a:p>
+            <a:pPr indent="0" marL="0">
+              <a:buNone/>
+            </a:pPr>
+            <a:r>
+              <a:rPr lang="en-US" sz="1700" dirty="0">
                 <a:solidFill>
                   <a:srgbClr val="1E293B"/>
                 </a:solidFill>
@@ -4576,9 +4893,9 @@
                 <a:ea typeface="Calibri" pitchFamily="34" charset="-122"/>
                 <a:cs typeface="Calibri" pitchFamily="34" charset="-120"/>
               </a:rPr>
-              <a:t>Imagine you are a mail carrier and today is the strangest day on your route. What weird or wonderful things happen as you deliver the mail? Start with: 'It started like a normal day, but then...'</a:t>
-            </a:r>
-            <a:endParaRPr lang="en-US" sz="1800" dirty="0"/>
+              <a:t>Write about a letter or package you have received. Who was it from?</a:t>
+            </a:r>
+            <a:endParaRPr lang="en-US" sz="1700" dirty="0"/>
           </a:p>
         </p:txBody>
       </p:sp>
@@ -4590,76 +4907,34 @@
         </p:nvSpPr>
         <p:spPr>
           <a:xfrm>
-            <a:off x="640080" y="3246120"/>
-            <a:ext cx="7863840" cy="457200"/>
-          </a:xfrm>
-          <a:prstGeom prst="rect">
-            <a:avLst/>
-          </a:prstGeom>
-          <a:noFill/>
-          <a:ln/>
-        </p:spPr>
-        <p:txBody>
-          <a:bodyPr wrap="square" lIns="0" tIns="0" rIns="0" bIns="0" rtlCol="0" anchor="ctr"/>
-          <a:lstStyle/>
-          <a:p>
-            <a:pPr indent="0" marL="0">
-              <a:buNone/>
-            </a:pPr>
-            <a:r>
-              <a:rPr lang="en-US" sz="1400" b="1" dirty="0">
-                <a:solidFill>
-                  <a:srgbClr val="0E1C42"/>
-                </a:solidFill>
-                <a:latin typeface="Calibri" pitchFamily="34" charset="0"/>
-                <a:ea typeface="Calibri" pitchFamily="34" charset="-122"/>
-                <a:cs typeface="Calibri" pitchFamily="34" charset="-120"/>
-              </a:rPr>
-              <a:t>Type in the chat </a:t>
-            </a:r>
-            <a:pPr indent="0" marL="0">
-              <a:buNone/>
-            </a:pPr>
-            <a:r>
-              <a:rPr lang="en-US" sz="1400" dirty="0">
-                <a:solidFill>
-                  <a:srgbClr val="1E293B"/>
-                </a:solidFill>
-                <a:latin typeface="Calibri" pitchFamily="34" charset="0"/>
-                <a:ea typeface="Calibri" pitchFamily="34" charset="-122"/>
-                <a:cs typeface="Calibri" pitchFamily="34" charset="-120"/>
-              </a:rPr>
-              <a:t>or </a:t>
-            </a:r>
-            <a:pPr indent="0" marL="0">
-              <a:buNone/>
-            </a:pPr>
-            <a:r>
-              <a:rPr lang="en-US" sz="1400" b="1" dirty="0">
-                <a:solidFill>
-                  <a:srgbClr val="0E1C42"/>
-                </a:solidFill>
-                <a:latin typeface="Calibri" pitchFamily="34" charset="0"/>
-                <a:ea typeface="Calibri" pitchFamily="34" charset="-122"/>
-                <a:cs typeface="Calibri" pitchFamily="34" charset="-120"/>
-              </a:rPr>
-              <a:t>write on paper</a:t>
-            </a:r>
-            <a:pPr indent="0" marL="0">
-              <a:buNone/>
-            </a:pPr>
-            <a:r>
-              <a:rPr lang="en-US" sz="1400" dirty="0">
-                <a:solidFill>
-                  <a:srgbClr val="1E293B"/>
-                </a:solidFill>
-                <a:latin typeface="Calibri" pitchFamily="34" charset="0"/>
-                <a:ea typeface="Calibri" pitchFamily="34" charset="-122"/>
-                <a:cs typeface="Calibri" pitchFamily="34" charset="-120"/>
-              </a:rPr>
-              <a:t> to hold up when we share.</a:t>
-            </a:r>
-            <a:endParaRPr lang="en-US" sz="1400" dirty="0"/>
+            <a:off x="365760" y="3063240"/>
+            <a:ext cx="8412480" cy="365760"/>
+          </a:xfrm>
+          <a:prstGeom prst="rect">
+            <a:avLst/>
+          </a:prstGeom>
+          <a:noFill/>
+          <a:ln/>
+        </p:spPr>
+        <p:txBody>
+          <a:bodyPr wrap="square" lIns="0" tIns="0" rIns="0" bIns="0" rtlCol="0" anchor="ctr"/>
+          <a:lstStyle/>
+          <a:p>
+            <a:pPr indent="0" marL="0">
+              <a:buNone/>
+            </a:pPr>
+            <a:r>
+              <a:rPr lang="en-US" sz="1600" i="1" dirty="0">
+                <a:solidFill>
+                  <a:srgbClr val="64748B"/>
+                </a:solidFill>
+                <a:latin typeface="Calibri" pitchFamily="34" charset="0"/>
+                <a:ea typeface="Calibri" pitchFamily="34" charset="-122"/>
+                <a:cs typeface="Calibri" pitchFamily="34" charset="-120"/>
+              </a:rPr>
+              <a:t>Think first. You will have five minutes to write.</a:t>
+            </a:r>
+            <a:endParaRPr lang="en-US" sz="1600" dirty="0"/>
           </a:p>
         </p:txBody>
       </p:sp>
@@ -4697,30 +4972,89 @@
       </p:grpSpPr>
       <p:sp>
         <p:nvSpPr>
-          <p:cNvPr id="2" name="Text 0"/>
-          <p:cNvSpPr/>
-          <p:nvPr/>
-        </p:nvSpPr>
-        <p:spPr>
-          <a:xfrm>
-            <a:off x="457200" y="228600"/>
-            <a:ext cx="8229600" cy="640080"/>
-          </a:xfrm>
-          <a:prstGeom prst="rect">
-            <a:avLst/>
-          </a:prstGeom>
-          <a:noFill/>
-          <a:ln/>
-        </p:spPr>
-        <p:txBody>
-          <a:bodyPr wrap="square" lIns="0" tIns="0" rIns="0" bIns="0" rtlCol="0" anchor="ctr"/>
-          <a:lstStyle/>
-          <a:p>
-            <a:pPr algn="ctr" indent="0" marL="0">
-              <a:buNone/>
-            </a:pPr>
-            <a:r>
-              <a:rPr lang="en-US" sz="3200" b="1" dirty="0">
+          <p:cNvPr id="2" name="Shape 0"/>
+          <p:cNvSpPr/>
+          <p:nvPr/>
+        </p:nvSpPr>
+        <p:spPr>
+          <a:xfrm>
+            <a:off x="0" y="0"/>
+            <a:ext cx="9144000" cy="566928"/>
+          </a:xfrm>
+          <a:prstGeom prst="rect">
+            <a:avLst/>
+          </a:prstGeom>
+          <a:solidFill>
+            <a:srgbClr val="C7922C"/>
+          </a:solidFill>
+          <a:ln/>
+        </p:spPr>
+      </p:sp>
+      <p:sp>
+        <p:nvSpPr>
+          <p:cNvPr id="3" name="Text 1"/>
+          <p:cNvSpPr/>
+          <p:nvPr/>
+        </p:nvSpPr>
+        <p:spPr>
+          <a:xfrm>
+            <a:off x="365760" y="54864"/>
+            <a:ext cx="8412480" cy="457200"/>
+          </a:xfrm>
+          <a:prstGeom prst="rect">
+            <a:avLst/>
+          </a:prstGeom>
+          <a:noFill/>
+          <a:ln/>
+        </p:spPr>
+        <p:txBody>
+          <a:bodyPr wrap="square" lIns="0" tIns="0" rIns="0" bIns="0" rtlCol="0" anchor="ctr"/>
+          <a:lstStyle/>
+          <a:p>
+            <a:pPr indent="0" marL="0">
+              <a:buNone/>
+            </a:pPr>
+            <a:r>
+              <a:rPr lang="en-US" sz="2200" b="1" dirty="0">
+                <a:solidFill>
+                  <a:srgbClr val="FFFFFF"/>
+                </a:solidFill>
+                <a:latin typeface="Calibri" pitchFamily="34" charset="0"/>
+                <a:ea typeface="Calibri" pitchFamily="34" charset="-122"/>
+                <a:cs typeface="Calibri" pitchFamily="34" charset="-120"/>
+              </a:rPr>
+              <a:t>✍️  Writing Time</a:t>
+            </a:r>
+            <a:endParaRPr lang="en-US" sz="2200" dirty="0"/>
+          </a:p>
+        </p:txBody>
+      </p:sp>
+      <p:sp>
+        <p:nvSpPr>
+          <p:cNvPr id="4" name="Text 2"/>
+          <p:cNvSpPr/>
+          <p:nvPr/>
+        </p:nvSpPr>
+        <p:spPr>
+          <a:xfrm>
+            <a:off x="365760" y="868680"/>
+            <a:ext cx="8412480" cy="502920"/>
+          </a:xfrm>
+          <a:prstGeom prst="rect">
+            <a:avLst/>
+          </a:prstGeom>
+          <a:noFill/>
+          <a:ln/>
+        </p:spPr>
+        <p:txBody>
+          <a:bodyPr wrap="square" lIns="0" tIns="0" rIns="0" bIns="0" rtlCol="0" anchor="ctr"/>
+          <a:lstStyle/>
+          <a:p>
+            <a:pPr indent="0" marL="0">
+              <a:buNone/>
+            </a:pPr>
+            <a:r>
+              <a:rPr lang="en-US" sz="2600" b="1" dirty="0">
                 <a:solidFill>
                   <a:srgbClr val="0E1C42"/>
                 </a:solidFill>
@@ -4728,38 +5062,38 @@
                 <a:ea typeface="Calibri" pitchFamily="34" charset="-122"/>
                 <a:cs typeface="Calibri" pitchFamily="34" charset="-120"/>
               </a:rPr>
-              <a:t>✏️  Writing Time</a:t>
-            </a:r>
-            <a:endParaRPr lang="en-US" sz="3200" dirty="0"/>
-          </a:p>
-        </p:txBody>
-      </p:sp>
-      <p:sp>
-        <p:nvSpPr>
-          <p:cNvPr id="3" name="Text 1"/>
-          <p:cNvSpPr/>
-          <p:nvPr/>
-        </p:nvSpPr>
-        <p:spPr>
-          <a:xfrm>
-            <a:off x="914400" y="822960"/>
-            <a:ext cx="7315200" cy="365760"/>
-          </a:xfrm>
-          <a:prstGeom prst="rect">
-            <a:avLst/>
-          </a:prstGeom>
-          <a:noFill/>
-          <a:ln/>
-        </p:spPr>
-        <p:txBody>
-          <a:bodyPr wrap="square" lIns="0" tIns="0" rIns="0" bIns="0" rtlCol="0" anchor="ctr"/>
-          <a:lstStyle/>
-          <a:p>
-            <a:pPr algn="ctr" indent="0" marL="0">
-              <a:buNone/>
-            </a:pPr>
-            <a:r>
-              <a:rPr lang="en-US" sz="1600" dirty="0">
+              <a:t>5 minutes — keep your pencil moving!</a:t>
+            </a:r>
+            <a:endParaRPr lang="en-US" sz="2600" dirty="0"/>
+          </a:p>
+        </p:txBody>
+      </p:sp>
+      <p:sp>
+        <p:nvSpPr>
+          <p:cNvPr id="5" name="Text 3"/>
+          <p:cNvSpPr/>
+          <p:nvPr/>
+        </p:nvSpPr>
+        <p:spPr>
+          <a:xfrm>
+            <a:off x="365760" y="1463040"/>
+            <a:ext cx="8229600" cy="237744"/>
+          </a:xfrm>
+          <a:prstGeom prst="rect">
+            <a:avLst/>
+          </a:prstGeom>
+          <a:noFill/>
+          <a:ln/>
+        </p:spPr>
+        <p:txBody>
+          <a:bodyPr wrap="square" lIns="0" tIns="0" rIns="0" bIns="0" rtlCol="0" anchor="ctr"/>
+          <a:lstStyle/>
+          <a:p>
+            <a:pPr indent="0" marL="0">
+              <a:buNone/>
+            </a:pPr>
+            <a:r>
+              <a:rPr lang="en-US" sz="1100" b="1" spc="100" kern="0" dirty="0">
                 <a:solidFill>
                   <a:srgbClr val="C7922C"/>
                 </a:solidFill>
@@ -4767,32 +5101,32 @@
                 <a:ea typeface="Calibri" pitchFamily="34" charset="-122"/>
                 <a:cs typeface="Calibri" pitchFamily="34" charset="-120"/>
               </a:rPr>
-              <a:t>5 minutes — keep your pencil moving!</a:t>
-            </a:r>
-            <a:endParaRPr lang="en-US" sz="1600" dirty="0"/>
-          </a:p>
-        </p:txBody>
-      </p:sp>
-      <p:sp>
-        <p:nvSpPr>
-          <p:cNvPr id="4" name="Shape 2"/>
-          <p:cNvSpPr/>
-          <p:nvPr/>
-        </p:nvSpPr>
-        <p:spPr>
-          <a:xfrm>
-            <a:off x="457200" y="1371600"/>
-            <a:ext cx="8229600" cy="1280160"/>
+              <a:t>YOUR PROMPT</a:t>
+            </a:r>
+            <a:endParaRPr lang="en-US" sz="1100" dirty="0"/>
+          </a:p>
+        </p:txBody>
+      </p:sp>
+      <p:sp>
+        <p:nvSpPr>
+          <p:cNvPr id="6" name="Shape 4"/>
+          <p:cNvSpPr/>
+          <p:nvPr/>
+        </p:nvSpPr>
+        <p:spPr>
+          <a:xfrm>
+            <a:off x="365760" y="1737360"/>
+            <a:ext cx="8412480" cy="1417320"/>
           </a:xfrm>
           <a:prstGeom prst="roundRect">
             <a:avLst>
-              <a:gd name="adj" fmla="val 7143"/>
+              <a:gd name="adj" fmla="val 6452"/>
             </a:avLst>
           </a:prstGeom>
           <a:solidFill>
             <a:srgbClr val="FFFFFF"/>
           </a:solidFill>
-          <a:ln w="12700">
+          <a:ln w="19050">
             <a:solidFill>
               <a:srgbClr val="C7922C"/>
             </a:solidFill>
@@ -4809,44 +5143,30 @@
       </p:sp>
       <p:sp>
         <p:nvSpPr>
-          <p:cNvPr id="5" name="Text 3"/>
-          <p:cNvSpPr/>
-          <p:nvPr/>
-        </p:nvSpPr>
-        <p:spPr>
-          <a:xfrm>
-            <a:off x="640080" y="1417320"/>
-            <a:ext cx="7863840" cy="1188720"/>
-          </a:xfrm>
-          <a:prstGeom prst="rect">
-            <a:avLst/>
-          </a:prstGeom>
-          <a:noFill/>
-          <a:ln/>
-        </p:spPr>
-        <p:txBody>
-          <a:bodyPr wrap="square" lIns="0" tIns="0" rIns="0" bIns="0" rtlCol="0" anchor="t"/>
-          <a:lstStyle/>
-          <a:p>
-            <a:pPr indent="0" marL="0">
-              <a:buNone/>
-            </a:pPr>
-            <a:r>
-              <a:rPr lang="en-US" sz="1200" b="1" dirty="0">
-                <a:solidFill>
-                  <a:srgbClr val="C7922C"/>
-                </a:solidFill>
-                <a:latin typeface="Calibri" pitchFamily="34" charset="0"/>
-                <a:ea typeface="Calibri" pitchFamily="34" charset="-122"/>
-                <a:cs typeface="Calibri" pitchFamily="34" charset="-120"/>
-              </a:rPr>
-              <a:t>📖 Prompt: </a:t>
-            </a:r>
-            <a:pPr indent="0" marL="0">
-              <a:buNone/>
-            </a:pPr>
-            <a:r>
-              <a:rPr lang="en-US" sz="1200" i="1" dirty="0">
+          <p:cNvPr id="7" name="Text 5"/>
+          <p:cNvSpPr/>
+          <p:nvPr/>
+        </p:nvSpPr>
+        <p:spPr>
+          <a:xfrm>
+            <a:off x="594360" y="1865376"/>
+            <a:ext cx="7955280" cy="1161288"/>
+          </a:xfrm>
+          <a:prstGeom prst="rect">
+            <a:avLst/>
+          </a:prstGeom>
+          <a:noFill/>
+          <a:ln/>
+        </p:spPr>
+        <p:txBody>
+          <a:bodyPr wrap="square" lIns="0" tIns="0" rIns="0" bIns="0" rtlCol="0" anchor="ctr"/>
+          <a:lstStyle/>
+          <a:p>
+            <a:pPr indent="0" marL="0">
+              <a:buNone/>
+            </a:pPr>
+            <a:r>
+              <a:rPr lang="en-US" sz="1700" dirty="0">
                 <a:solidFill>
                   <a:srgbClr val="1E293B"/>
                 </a:solidFill>
@@ -4854,122 +5174,48 @@
                 <a:ea typeface="Calibri" pitchFamily="34" charset="-122"/>
                 <a:cs typeface="Calibri" pitchFamily="34" charset="-120"/>
               </a:rPr>
-              <a:t>Imagine you are a mail carrier and today is the strangest day on your route. What weird or wonderful things happen as you deliver the mail? Start with: 'It started like a normal day, but then...'</a:t>
-            </a:r>
-            <a:endParaRPr lang="en-US" sz="1200" dirty="0"/>
-          </a:p>
-        </p:txBody>
-      </p:sp>
-      <p:sp>
-        <p:nvSpPr>
-          <p:cNvPr id="6" name="Shape 4"/>
-          <p:cNvSpPr/>
-          <p:nvPr/>
-        </p:nvSpPr>
-        <p:spPr>
-          <a:xfrm>
-            <a:off x="2286000" y="2926080"/>
-            <a:ext cx="4572000" cy="1280160"/>
-          </a:xfrm>
-          <a:prstGeom prst="roundRect">
-            <a:avLst>
-              <a:gd name="adj" fmla="val 8571"/>
-            </a:avLst>
-          </a:prstGeom>
-          <a:solidFill>
-            <a:srgbClr val="FFFFFF"/>
-          </a:solidFill>
-          <a:ln/>
-          <a:effectLst>
-            <a:outerShdw sx="100000" sy="100000" kx="0" ky="0" algn="bl" rotWithShape="0" blurRad="101600" dist="38100" dir="2700000">
-              <a:srgbClr val="000000">
-                <a:alpha val="12000"/>
-              </a:srgbClr>
-            </a:outerShdw>
-          </a:effectLst>
-        </p:spPr>
-      </p:sp>
-      <p:sp>
-        <p:nvSpPr>
-          <p:cNvPr id="7" name="Text 5"/>
-          <p:cNvSpPr/>
-          <p:nvPr/>
-        </p:nvSpPr>
-        <p:spPr>
-          <a:xfrm>
-            <a:off x="2468880" y="3017520"/>
-            <a:ext cx="4206240" cy="1097280"/>
-          </a:xfrm>
-          <a:prstGeom prst="rect">
-            <a:avLst/>
-          </a:prstGeom>
-          <a:noFill/>
-          <a:ln/>
-        </p:spPr>
-        <p:txBody>
-          <a:bodyPr wrap="square" lIns="0" tIns="0" rIns="0" bIns="0" rtlCol="0" anchor="t"/>
-          <a:lstStyle/>
-          <a:p>
-            <a:pPr indent="0" marL="0">
-              <a:buNone/>
-            </a:pPr>
-            <a:r>
-              <a:rPr lang="en-US" sz="1400" b="1" dirty="0">
-                <a:solidFill>
-                  <a:srgbClr val="0E1C42"/>
-                </a:solidFill>
-                <a:latin typeface="Calibri" pitchFamily="34" charset="0"/>
-                <a:ea typeface="Calibri" pitchFamily="34" charset="-122"/>
-                <a:cs typeface="Calibri" pitchFamily="34" charset="-120"/>
-              </a:rPr>
-              <a:t>If you get stuck:
-</a:t>
-            </a:r>
-            <a:pPr indent="0" marL="0">
-              <a:buNone/>
-            </a:pPr>
-            <a:r>
-              <a:rPr lang="en-US" sz="1300" dirty="0">
-                <a:solidFill>
-                  <a:srgbClr val="1E293B"/>
-                </a:solidFill>
-                <a:latin typeface="Calibri" pitchFamily="34" charset="0"/>
-                <a:ea typeface="Calibri" pitchFamily="34" charset="-122"/>
-                <a:cs typeface="Calibri" pitchFamily="34" charset="-120"/>
-              </a:rPr>
-              <a:t>• Reread the prompt above
-</a:t>
-            </a:r>
-            <a:pPr indent="0" marL="0">
-              <a:buNone/>
-            </a:pPr>
-            <a:r>
-              <a:rPr lang="en-US" sz="1300" dirty="0">
-                <a:solidFill>
-                  <a:srgbClr val="1E293B"/>
-                </a:solidFill>
-                <a:latin typeface="Calibri" pitchFamily="34" charset="0"/>
-                <a:ea typeface="Calibri" pitchFamily="34" charset="-122"/>
-                <a:cs typeface="Calibri" pitchFamily="34" charset="-120"/>
-              </a:rPr>
-              <a:t>• Write "I'm thinking..." until a new idea comes
-</a:t>
-            </a:r>
-            <a:pPr indent="0" marL="0">
-              <a:buNone/>
-            </a:pPr>
-            <a:r>
-              <a:rPr lang="en-US" sz="1300" dirty="0">
-                <a:solidFill>
-                  <a:srgbClr val="1E293B"/>
-                </a:solidFill>
-                <a:latin typeface="Calibri" pitchFamily="34" charset="0"/>
-                <a:ea typeface="Calibri" pitchFamily="34" charset="-122"/>
-                <a:cs typeface="Calibri" pitchFamily="34" charset="-120"/>
-              </a:rPr>
-              <a:t>• Keep going — don't erase!</a:t>
-            </a:r>
-            <a:endParaRPr lang="en-US" sz="1400" dirty="0"/>
+              <a:t>Write about a letter or package you have received. Who was it from?</a:t>
+            </a:r>
+            <a:endParaRPr lang="en-US" sz="1700" dirty="0"/>
+          </a:p>
+        </p:txBody>
+      </p:sp>
+      <p:sp>
+        <p:nvSpPr>
+          <p:cNvPr id="8" name="Text 6"/>
+          <p:cNvSpPr/>
+          <p:nvPr/>
+        </p:nvSpPr>
+        <p:spPr>
+          <a:xfrm>
+            <a:off x="365760" y="3291840"/>
+            <a:ext cx="8412480" cy="365760"/>
+          </a:xfrm>
+          <a:prstGeom prst="rect">
+            <a:avLst/>
+          </a:prstGeom>
+          <a:noFill/>
+          <a:ln/>
+        </p:spPr>
+        <p:txBody>
+          <a:bodyPr wrap="square" lIns="0" tIns="0" rIns="0" bIns="0" rtlCol="0" anchor="ctr"/>
+          <a:lstStyle/>
+          <a:p>
+            <a:pPr indent="0" marL="0">
+              <a:buNone/>
+            </a:pPr>
+            <a:r>
+              <a:rPr lang="en-US" sz="1500" i="1" dirty="0">
+                <a:solidFill>
+                  <a:srgbClr val="64748B"/>
+                </a:solidFill>
+                <a:latin typeface="Calibri" pitchFamily="34" charset="0"/>
+                <a:ea typeface="Calibri" pitchFamily="34" charset="-122"/>
+                <a:cs typeface="Calibri" pitchFamily="34" charset="-120"/>
+              </a:rPr>
+              <a:t>Do not stop to erase. If you get stuck, write the last word again and keep going.</a:t>
+            </a:r>
+            <a:endParaRPr lang="en-US" sz="1500" dirty="0"/>
           </a:p>
         </p:txBody>
       </p:sp>
@@ -5007,39 +5253,23 @@
       </p:grpSpPr>
       <p:sp>
         <p:nvSpPr>
-          <p:cNvPr id="2" name="Text 0"/>
-          <p:cNvSpPr/>
-          <p:nvPr/>
-        </p:nvSpPr>
-        <p:spPr>
-          <a:xfrm>
-            <a:off x="3657600" y="365760"/>
-            <a:ext cx="1828800" cy="640080"/>
-          </a:xfrm>
-          <a:prstGeom prst="rect">
-            <a:avLst/>
-          </a:prstGeom>
-          <a:noFill/>
-          <a:ln/>
-        </p:spPr>
-        <p:txBody>
-          <a:bodyPr wrap="square" lIns="0" tIns="0" rIns="0" bIns="0" rtlCol="0" anchor="ctr"/>
-          <a:lstStyle/>
-          <a:p>
-            <a:pPr algn="ctr" indent="0" marL="0">
-              <a:buNone/>
-            </a:pPr>
-            <a:r>
-              <a:rPr lang="en-US" sz="4000" dirty="0">
-                <a:solidFill>
-                  <a:srgbClr val="000000"/>
-                </a:solidFill>
-              </a:rPr>
-              <a:t>🔍</a:t>
-            </a:r>
-            <a:endParaRPr lang="en-US" sz="4000" dirty="0"/>
-          </a:p>
-        </p:txBody>
+          <p:cNvPr id="2" name="Shape 0"/>
+          <p:cNvSpPr/>
+          <p:nvPr/>
+        </p:nvSpPr>
+        <p:spPr>
+          <a:xfrm>
+            <a:off x="0" y="0"/>
+            <a:ext cx="9144000" cy="566928"/>
+          </a:xfrm>
+          <a:prstGeom prst="rect">
+            <a:avLst/>
+          </a:prstGeom>
+          <a:solidFill>
+            <a:srgbClr val="34B76F"/>
+          </a:solidFill>
+          <a:ln/>
+        </p:spPr>
       </p:sp>
       <p:sp>
         <p:nvSpPr>
@@ -5049,24 +5279,63 @@
         </p:nvSpPr>
         <p:spPr>
           <a:xfrm>
-            <a:off x="914400" y="914400"/>
-            <a:ext cx="7315200" cy="640080"/>
-          </a:xfrm>
-          <a:prstGeom prst="rect">
-            <a:avLst/>
-          </a:prstGeom>
-          <a:noFill/>
-          <a:ln/>
-        </p:spPr>
-        <p:txBody>
-          <a:bodyPr wrap="square" lIns="0" tIns="0" rIns="0" bIns="0" rtlCol="0" anchor="ctr"/>
-          <a:lstStyle/>
-          <a:p>
-            <a:pPr algn="ctr" indent="0" marL="0">
-              <a:buNone/>
-            </a:pPr>
-            <a:r>
-              <a:rPr lang="en-US" sz="3200" b="1" dirty="0">
+            <a:off x="365760" y="54864"/>
+            <a:ext cx="8412480" cy="457200"/>
+          </a:xfrm>
+          <a:prstGeom prst="rect">
+            <a:avLst/>
+          </a:prstGeom>
+          <a:noFill/>
+          <a:ln/>
+        </p:spPr>
+        <p:txBody>
+          <a:bodyPr wrap="square" lIns="0" tIns="0" rIns="0" bIns="0" rtlCol="0" anchor="ctr"/>
+          <a:lstStyle/>
+          <a:p>
+            <a:pPr indent="0" marL="0">
+              <a:buNone/>
+            </a:pPr>
+            <a:r>
+              <a:rPr lang="en-US" sz="2200" b="1" dirty="0">
+                <a:solidFill>
+                  <a:srgbClr val="FFFFFF"/>
+                </a:solidFill>
+                <a:latin typeface="Calibri" pitchFamily="34" charset="0"/>
+                <a:ea typeface="Calibri" pitchFamily="34" charset="-122"/>
+                <a:cs typeface="Calibri" pitchFamily="34" charset="-120"/>
+              </a:rPr>
+              <a:t>🔍  Edit &amp; Revise</a:t>
+            </a:r>
+            <a:endParaRPr lang="en-US" sz="2200" dirty="0"/>
+          </a:p>
+        </p:txBody>
+      </p:sp>
+      <p:sp>
+        <p:nvSpPr>
+          <p:cNvPr id="4" name="Text 2"/>
+          <p:cNvSpPr/>
+          <p:nvPr/>
+        </p:nvSpPr>
+        <p:spPr>
+          <a:xfrm>
+            <a:off x="365760" y="868680"/>
+            <a:ext cx="8412480" cy="457200"/>
+          </a:xfrm>
+          <a:prstGeom prst="rect">
+            <a:avLst/>
+          </a:prstGeom>
+          <a:noFill/>
+          <a:ln/>
+        </p:spPr>
+        <p:txBody>
+          <a:bodyPr wrap="square" lIns="0" tIns="0" rIns="0" bIns="0" rtlCol="0" anchor="ctr"/>
+          <a:lstStyle/>
+          <a:p>
+            <a:pPr indent="0" marL="0">
+              <a:buNone/>
+            </a:pPr>
+            <a:r>
+              <a:rPr lang="en-US" sz="2400" b="1" dirty="0">
                 <a:solidFill>
                   <a:srgbClr val="0E1C42"/>
                 </a:solidFill>
@@ -5074,38 +5343,38 @@
                 <a:ea typeface="Calibri" pitchFamily="34" charset="-122"/>
                 <a:cs typeface="Calibri" pitchFamily="34" charset="-120"/>
               </a:rPr>
-              <a:t>Edit &amp; Revise</a:t>
-            </a:r>
-            <a:endParaRPr lang="en-US" sz="3200" dirty="0"/>
-          </a:p>
-        </p:txBody>
-      </p:sp>
-      <p:sp>
-        <p:nvSpPr>
-          <p:cNvPr id="4" name="Text 2"/>
-          <p:cNvSpPr/>
-          <p:nvPr/>
-        </p:nvSpPr>
-        <p:spPr>
-          <a:xfrm>
-            <a:off x="914400" y="1508760"/>
-            <a:ext cx="7315200" cy="457200"/>
-          </a:xfrm>
-          <a:prstGeom prst="rect">
-            <a:avLst/>
-          </a:prstGeom>
-          <a:noFill/>
-          <a:ln/>
-        </p:spPr>
-        <p:txBody>
-          <a:bodyPr wrap="square" lIns="0" tIns="0" rIns="0" bIns="0" rtlCol="0" anchor="ctr"/>
-          <a:lstStyle/>
-          <a:p>
-            <a:pPr algn="ctr" indent="0" marL="0">
-              <a:buNone/>
-            </a:pPr>
-            <a:r>
-              <a:rPr lang="en-US" sz="1600" dirty="0">
+              <a:t>1 minute — pick ONE thing to fix.</a:t>
+            </a:r>
+            <a:endParaRPr lang="en-US" sz="2400" dirty="0"/>
+          </a:p>
+        </p:txBody>
+      </p:sp>
+      <p:sp>
+        <p:nvSpPr>
+          <p:cNvPr id="5" name="Text 3"/>
+          <p:cNvSpPr/>
+          <p:nvPr/>
+        </p:nvSpPr>
+        <p:spPr>
+          <a:xfrm>
+            <a:off x="365760" y="1417320"/>
+            <a:ext cx="8229600" cy="237744"/>
+          </a:xfrm>
+          <a:prstGeom prst="rect">
+            <a:avLst/>
+          </a:prstGeom>
+          <a:noFill/>
+          <a:ln/>
+        </p:spPr>
+        <p:txBody>
+          <a:bodyPr wrap="square" lIns="0" tIns="0" rIns="0" bIns="0" rtlCol="0" anchor="ctr"/>
+          <a:lstStyle/>
+          <a:p>
+            <a:pPr indent="0" marL="0">
+              <a:buNone/>
+            </a:pPr>
+            <a:r>
+              <a:rPr lang="en-US" sz="1100" b="1" spc="100" kern="0" dirty="0">
                 <a:solidFill>
                   <a:srgbClr val="34B76F"/>
                 </a:solidFill>
@@ -5113,26 +5382,26 @@
                 <a:ea typeface="Calibri" pitchFamily="34" charset="-122"/>
                 <a:cs typeface="Calibri" pitchFamily="34" charset="-120"/>
               </a:rPr>
-              <a:t>1 minute — pick ONE thing to fix</a:t>
-            </a:r>
-            <a:endParaRPr lang="en-US" sz="1600" dirty="0"/>
-          </a:p>
-        </p:txBody>
-      </p:sp>
-      <p:sp>
-        <p:nvSpPr>
-          <p:cNvPr id="5" name="Shape 3"/>
-          <p:cNvSpPr/>
-          <p:nvPr/>
-        </p:nvSpPr>
-        <p:spPr>
-          <a:xfrm>
-            <a:off x="1371600" y="2103120"/>
-            <a:ext cx="6400800" cy="640080"/>
+              <a:t>TODAY'S EDIT FOCUS</a:t>
+            </a:r>
+            <a:endParaRPr lang="en-US" sz="1100" dirty="0"/>
+          </a:p>
+        </p:txBody>
+      </p:sp>
+      <p:sp>
+        <p:nvSpPr>
+          <p:cNvPr id="6" name="Shape 4"/>
+          <p:cNvSpPr/>
+          <p:nvPr/>
+        </p:nvSpPr>
+        <p:spPr>
+          <a:xfrm>
+            <a:off x="365760" y="1691640"/>
+            <a:ext cx="8412480" cy="777240"/>
           </a:xfrm>
           <a:prstGeom prst="roundRect">
             <a:avLst>
-              <a:gd name="adj" fmla="val 14286"/>
+              <a:gd name="adj" fmla="val 11765"/>
             </a:avLst>
           </a:prstGeom>
           <a:solidFill>
@@ -5155,44 +5424,30 @@
       </p:sp>
       <p:sp>
         <p:nvSpPr>
-          <p:cNvPr id="6" name="Text 4"/>
-          <p:cNvSpPr/>
-          <p:nvPr/>
-        </p:nvSpPr>
-        <p:spPr>
-          <a:xfrm>
-            <a:off x="1554480" y="2148840"/>
-            <a:ext cx="6035040" cy="548640"/>
-          </a:xfrm>
-          <a:prstGeom prst="rect">
-            <a:avLst/>
-          </a:prstGeom>
-          <a:noFill/>
-          <a:ln/>
-        </p:spPr>
-        <p:txBody>
-          <a:bodyPr wrap="square" lIns="0" tIns="0" rIns="0" bIns="0" rtlCol="0" anchor="ctr"/>
-          <a:lstStyle/>
-          <a:p>
-            <a:pPr indent="0" marL="0">
-              <a:buNone/>
-            </a:pPr>
-            <a:r>
-              <a:rPr lang="en-US" sz="1400" b="1" dirty="0">
-                <a:solidFill>
-                  <a:srgbClr val="34B76F"/>
-                </a:solidFill>
-                <a:latin typeface="Calibri" pitchFamily="34" charset="0"/>
-                <a:ea typeface="Calibri" pitchFamily="34" charset="-122"/>
-                <a:cs typeface="Calibri" pitchFamily="34" charset="-120"/>
-              </a:rPr>
-              <a:t>Today's check: </a:t>
-            </a:r>
-            <a:pPr indent="0" marL="0">
-              <a:buNone/>
-            </a:pPr>
-            <a:r>
-              <a:rPr lang="en-US" sz="1400" dirty="0">
+          <p:cNvPr id="7" name="Text 5"/>
+          <p:cNvSpPr/>
+          <p:nvPr/>
+        </p:nvSpPr>
+        <p:spPr>
+          <a:xfrm>
+            <a:off x="594360" y="1819656"/>
+            <a:ext cx="7955280" cy="521208"/>
+          </a:xfrm>
+          <a:prstGeom prst="rect">
+            <a:avLst/>
+          </a:prstGeom>
+          <a:noFill/>
+          <a:ln/>
+        </p:spPr>
+        <p:txBody>
+          <a:bodyPr wrap="square" lIns="0" tIns="0" rIns="0" bIns="0" rtlCol="0" anchor="ctr"/>
+          <a:lstStyle/>
+          <a:p>
+            <a:pPr indent="0" marL="0">
+              <a:buNone/>
+            </a:pPr>
+            <a:r>
+              <a:rPr lang="en-US" sz="1700" dirty="0">
                 <a:solidFill>
                   <a:srgbClr val="1E293B"/>
                 </a:solidFill>
@@ -5200,40 +5455,11 @@
                 <a:ea typeface="Calibri" pitchFamily="34" charset="-122"/>
                 <a:cs typeface="Calibri" pitchFamily="34" charset="-120"/>
               </a:rPr>
-              <a:t>Did I build up the strangeness step by step instead of jumping to the weirdest part?</a:t>
-            </a:r>
-            <a:endParaRPr lang="en-US" sz="1400" dirty="0"/>
-          </a:p>
-        </p:txBody>
-      </p:sp>
-      <p:sp>
-        <p:nvSpPr>
-          <p:cNvPr id="7" name="Shape 5"/>
-          <p:cNvSpPr/>
-          <p:nvPr/>
-        </p:nvSpPr>
-        <p:spPr>
-          <a:xfrm>
-            <a:off x="1371600" y="2926080"/>
-            <a:ext cx="6400800" cy="1463040"/>
-          </a:xfrm>
-          <a:prstGeom prst="roundRect">
-            <a:avLst>
-              <a:gd name="adj" fmla="val 6250"/>
-            </a:avLst>
-          </a:prstGeom>
-          <a:solidFill>
-            <a:srgbClr val="FFFFFF"/>
-          </a:solidFill>
-          <a:ln/>
-          <a:effectLst>
-            <a:outerShdw sx="100000" sy="100000" kx="0" ky="0" algn="bl" rotWithShape="0" blurRad="101600" dist="38100" dir="2700000">
-              <a:srgbClr val="000000">
-                <a:alpha val="12000"/>
-              </a:srgbClr>
-            </a:outerShdw>
-          </a:effectLst>
-        </p:spPr>
+              <a:t>Did I use a capital letter for every name and place?</a:t>
+            </a:r>
+            <a:endParaRPr lang="en-US" sz="1700" dirty="0"/>
+          </a:p>
+        </p:txBody>
       </p:sp>
       <p:sp>
         <p:nvSpPr>
@@ -5243,45 +5469,24 @@
         </p:nvSpPr>
         <p:spPr>
           <a:xfrm>
-            <a:off x="1554480" y="3017520"/>
-            <a:ext cx="6035040" cy="1280160"/>
-          </a:xfrm>
-          <a:prstGeom prst="rect">
-            <a:avLst/>
-          </a:prstGeom>
-          <a:noFill/>
-          <a:ln/>
-        </p:spPr>
-        <p:txBody>
-          <a:bodyPr wrap="square" lIns="0" tIns="0" rIns="0" bIns="0" rtlCol="0" anchor="t"/>
-          <a:lstStyle/>
-          <a:p>
-            <a:pPr indent="0" marL="0">
-              <a:spcAft>
-                <a:spcPts val="200"/>
-              </a:spcAft>
-              <a:buNone/>
-            </a:pPr>
-            <a:r>
-              <a:rPr lang="en-US" sz="1300" b="1" dirty="0">
-                <a:solidFill>
-                  <a:srgbClr val="0E1C42"/>
-                </a:solidFill>
-                <a:latin typeface="Calibri" pitchFamily="34" charset="0"/>
-                <a:ea typeface="Calibri" pitchFamily="34" charset="-122"/>
-                <a:cs typeface="Calibri" pitchFamily="34" charset="-120"/>
-              </a:rPr>
-              <a:t>Quick check:
-</a:t>
-            </a:r>
-            <a:pPr indent="0" marL="0">
-              <a:spcAft>
-                <a:spcPts val="200"/>
-              </a:spcAft>
-              <a:buNone/>
-            </a:pPr>
-            <a:r>
-              <a:rPr lang="en-US" sz="1200" dirty="0">
+            <a:off x="365760" y="2651760"/>
+            <a:ext cx="8412480" cy="365760"/>
+          </a:xfrm>
+          <a:prstGeom prst="rect">
+            <a:avLst/>
+          </a:prstGeom>
+          <a:noFill/>
+          <a:ln/>
+        </p:spPr>
+        <p:txBody>
+          <a:bodyPr wrap="square" lIns="0" tIns="0" rIns="0" bIns="0" rtlCol="0" anchor="ctr"/>
+          <a:lstStyle/>
+          <a:p>
+            <a:pPr indent="0" marL="0">
+              <a:buNone/>
+            </a:pPr>
+            <a:r>
+              <a:rPr lang="en-US" sz="1500" b="1" dirty="0">
                 <a:solidFill>
                   <a:srgbClr val="1E293B"/>
                 </a:solidFill>
@@ -5289,17 +5494,13 @@
                 <a:ea typeface="Calibri" pitchFamily="34" charset="-122"/>
                 <a:cs typeface="Calibri" pitchFamily="34" charset="-120"/>
               </a:rPr>
-              <a:t>□ Capital letters at the start of every sentence
-</a:t>
-            </a:r>
-            <a:pPr indent="0" marL="0">
-              <a:spcAft>
-                <a:spcPts val="200"/>
-              </a:spcAft>
-              <a:buNone/>
-            </a:pPr>
-            <a:r>
-              <a:rPr lang="en-US" sz="1200" dirty="0">
+              <a:t>Quick check:  </a:t>
+            </a:r>
+            <a:pPr indent="0" marL="0">
+              <a:buNone/>
+            </a:pPr>
+            <a:r>
+              <a:rPr lang="en-US" sz="1500" dirty="0">
                 <a:solidFill>
                   <a:srgbClr val="1E293B"/>
                 </a:solidFill>
@@ -5307,45 +5508,9 @@
                 <a:ea typeface="Calibri" pitchFamily="34" charset="-122"/>
                 <a:cs typeface="Calibri" pitchFamily="34" charset="-120"/>
               </a:rPr>
-              <a:t>□ End punctuation ( .  ?  ! )
-</a:t>
-            </a:r>
-            <a:pPr indent="0" marL="0">
-              <a:spcAft>
-                <a:spcPts val="200"/>
-              </a:spcAft>
-              <a:buNone/>
-            </a:pPr>
-            <a:r>
-              <a:rPr lang="en-US" sz="1200" dirty="0">
-                <a:solidFill>
-                  <a:srgbClr val="1E293B"/>
-                </a:solidFill>
-                <a:latin typeface="Calibri" pitchFamily="34" charset="0"/>
-                <a:ea typeface="Calibri" pitchFamily="34" charset="-122"/>
-                <a:cs typeface="Calibri" pitchFamily="34" charset="-120"/>
-              </a:rPr>
-              <a:t>□ Spelling — circle any words that look wrong
-</a:t>
-            </a:r>
-            <a:pPr indent="0" marL="0">
-              <a:spcAft>
-                <a:spcPts val="200"/>
-              </a:spcAft>
-              <a:buNone/>
-            </a:pPr>
-            <a:r>
-              <a:rPr lang="en-US" sz="1200" dirty="0">
-                <a:solidFill>
-                  <a:srgbClr val="1E293B"/>
-                </a:solidFill>
-                <a:latin typeface="Calibri" pitchFamily="34" charset="0"/>
-                <a:ea typeface="Calibri" pitchFamily="34" charset="-122"/>
-                <a:cs typeface="Calibri" pitchFamily="34" charset="-120"/>
-              </a:rPr>
-              <a:t>□ Read it quietly to yourself — does it sound right?</a:t>
-            </a:r>
-            <a:endParaRPr lang="en-US" sz="1300" dirty="0"/>
+              <a:t>capitals  ·  end punctuation  ·  circle a word you are unsure of  ·  read it aloud</a:t>
+            </a:r>
+            <a:endParaRPr lang="en-US" sz="1500" dirty="0"/>
           </a:p>
         </p:txBody>
       </p:sp>
@@ -5383,39 +5548,23 @@
       </p:grpSpPr>
       <p:sp>
         <p:nvSpPr>
-          <p:cNvPr id="2" name="Text 0"/>
-          <p:cNvSpPr/>
-          <p:nvPr/>
-        </p:nvSpPr>
-        <p:spPr>
-          <a:xfrm>
-            <a:off x="3657600" y="457200"/>
-            <a:ext cx="1828800" cy="731520"/>
-          </a:xfrm>
-          <a:prstGeom prst="rect">
-            <a:avLst/>
-          </a:prstGeom>
-          <a:noFill/>
-          <a:ln/>
-        </p:spPr>
-        <p:txBody>
-          <a:bodyPr wrap="square" lIns="0" tIns="0" rIns="0" bIns="0" rtlCol="0" anchor="ctr"/>
-          <a:lstStyle/>
-          <a:p>
-            <a:pPr algn="ctr" indent="0" marL="0">
-              <a:buNone/>
-            </a:pPr>
-            <a:r>
-              <a:rPr lang="en-US" sz="4400" dirty="0">
-                <a:solidFill>
-                  <a:srgbClr val="000000"/>
-                </a:solidFill>
-              </a:rPr>
-              <a:t>🗣️</a:t>
-            </a:r>
-            <a:endParaRPr lang="en-US" sz="4400" dirty="0"/>
-          </a:p>
-        </p:txBody>
+          <p:cNvPr id="2" name="Shape 0"/>
+          <p:cNvSpPr/>
+          <p:nvPr/>
+        </p:nvSpPr>
+        <p:spPr>
+          <a:xfrm>
+            <a:off x="0" y="0"/>
+            <a:ext cx="9144000" cy="566928"/>
+          </a:xfrm>
+          <a:prstGeom prst="rect">
+            <a:avLst/>
+          </a:prstGeom>
+          <a:solidFill>
+            <a:srgbClr val="55C8E8"/>
+          </a:solidFill>
+          <a:ln/>
+        </p:spPr>
       </p:sp>
       <p:sp>
         <p:nvSpPr>
@@ -5425,24 +5574,63 @@
         </p:nvSpPr>
         <p:spPr>
           <a:xfrm>
-            <a:off x="914400" y="1097280"/>
-            <a:ext cx="7315200" cy="640080"/>
-          </a:xfrm>
-          <a:prstGeom prst="rect">
-            <a:avLst/>
-          </a:prstGeom>
-          <a:noFill/>
-          <a:ln/>
-        </p:spPr>
-        <p:txBody>
-          <a:bodyPr wrap="square" lIns="0" tIns="0" rIns="0" bIns="0" rtlCol="0" anchor="ctr"/>
-          <a:lstStyle/>
-          <a:p>
-            <a:pPr algn="ctr" indent="0" marL="0">
-              <a:buNone/>
-            </a:pPr>
-            <a:r>
-              <a:rPr lang="en-US" sz="3400" b="1" dirty="0">
+            <a:off x="365760" y="54864"/>
+            <a:ext cx="8412480" cy="457200"/>
+          </a:xfrm>
+          <a:prstGeom prst="rect">
+            <a:avLst/>
+          </a:prstGeom>
+          <a:noFill/>
+          <a:ln/>
+        </p:spPr>
+        <p:txBody>
+          <a:bodyPr wrap="square" lIns="0" tIns="0" rIns="0" bIns="0" rtlCol="0" anchor="ctr"/>
+          <a:lstStyle/>
+          <a:p>
+            <a:pPr indent="0" marL="0">
+              <a:buNone/>
+            </a:pPr>
+            <a:r>
+              <a:rPr lang="en-US" sz="2200" b="1" dirty="0">
+                <a:solidFill>
+                  <a:srgbClr val="FFFFFF"/>
+                </a:solidFill>
+                <a:latin typeface="Calibri" pitchFamily="34" charset="0"/>
+                <a:ea typeface="Calibri" pitchFamily="34" charset="-122"/>
+                <a:cs typeface="Calibri" pitchFamily="34" charset="-120"/>
+              </a:rPr>
+              <a:t>🗣️  Share Time</a:t>
+            </a:r>
+            <a:endParaRPr lang="en-US" sz="2200" dirty="0"/>
+          </a:p>
+        </p:txBody>
+      </p:sp>
+      <p:sp>
+        <p:nvSpPr>
+          <p:cNvPr id="4" name="Text 2"/>
+          <p:cNvSpPr/>
+          <p:nvPr/>
+        </p:nvSpPr>
+        <p:spPr>
+          <a:xfrm>
+            <a:off x="365760" y="1005840"/>
+            <a:ext cx="8412480" cy="548640"/>
+          </a:xfrm>
+          <a:prstGeom prst="rect">
+            <a:avLst/>
+          </a:prstGeom>
+          <a:noFill/>
+          <a:ln/>
+        </p:spPr>
+        <p:txBody>
+          <a:bodyPr wrap="square" lIns="0" tIns="0" rIns="0" bIns="0" rtlCol="0" anchor="ctr"/>
+          <a:lstStyle/>
+          <a:p>
+            <a:pPr indent="0" marL="0">
+              <a:buNone/>
+            </a:pPr>
+            <a:r>
+              <a:rPr lang="en-US" sz="2600" b="1" dirty="0">
                 <a:solidFill>
                   <a:srgbClr val="0E1C42"/>
                 </a:solidFill>
@@ -5450,191 +5638,48 @@
                 <a:ea typeface="Calibri" pitchFamily="34" charset="-122"/>
                 <a:cs typeface="Calibri" pitchFamily="34" charset="-120"/>
               </a:rPr>
-              <a:t>Share Time</a:t>
-            </a:r>
-            <a:endParaRPr lang="en-US" sz="3400" dirty="0"/>
-          </a:p>
-        </p:txBody>
-      </p:sp>
-      <p:sp>
-        <p:nvSpPr>
-          <p:cNvPr id="4" name="Text 2"/>
-          <p:cNvSpPr/>
-          <p:nvPr/>
-        </p:nvSpPr>
-        <p:spPr>
-          <a:xfrm>
-            <a:off x="914400" y="1737360"/>
-            <a:ext cx="7315200" cy="457200"/>
-          </a:xfrm>
-          <a:prstGeom prst="rect">
-            <a:avLst/>
-          </a:prstGeom>
-          <a:noFill/>
-          <a:ln/>
-        </p:spPr>
-        <p:txBody>
-          <a:bodyPr wrap="square" lIns="0" tIns="0" rIns="0" bIns="0" rtlCol="0" anchor="ctr"/>
-          <a:lstStyle/>
-          <a:p>
-            <a:pPr algn="ctr" indent="0" marL="0">
+              <a:t>3 minutes — let's hear your writing!</a:t>
+            </a:r>
+            <a:endParaRPr lang="en-US" sz="2600" dirty="0"/>
+          </a:p>
+        </p:txBody>
+      </p:sp>
+      <p:sp>
+        <p:nvSpPr>
+          <p:cNvPr id="5" name="Text 3"/>
+          <p:cNvSpPr/>
+          <p:nvPr/>
+        </p:nvSpPr>
+        <p:spPr>
+          <a:xfrm>
+            <a:off x="365760" y="1691640"/>
+            <a:ext cx="8412480" cy="457200"/>
+          </a:xfrm>
+          <a:prstGeom prst="rect">
+            <a:avLst/>
+          </a:prstGeom>
+          <a:noFill/>
+          <a:ln/>
+        </p:spPr>
+        <p:txBody>
+          <a:bodyPr wrap="square" lIns="0" tIns="0" rIns="0" bIns="0" rtlCol="0" anchor="ctr"/>
+          <a:lstStyle/>
+          <a:p>
+            <a:pPr indent="0" marL="0">
               <a:buNone/>
             </a:pPr>
             <a:r>
               <a:rPr lang="en-US" sz="1700" dirty="0">
                 <a:solidFill>
-                  <a:srgbClr val="55C8E8"/>
-                </a:solidFill>
-                <a:latin typeface="Calibri" pitchFamily="34" charset="0"/>
-                <a:ea typeface="Calibri" pitchFamily="34" charset="-122"/>
-                <a:cs typeface="Calibri" pitchFamily="34" charset="-120"/>
-              </a:rPr>
-              <a:t>3 minutes — let's hear your writing!</a:t>
+                  <a:srgbClr val="1E293B"/>
+                </a:solidFill>
+                <a:latin typeface="Calibri" pitchFamily="34" charset="0"/>
+                <a:ea typeface="Calibri" pitchFamily="34" charset="-122"/>
+                <a:cs typeface="Calibri" pitchFamily="34" charset="-120"/>
+              </a:rPr>
+              <a:t>Raise your hand  ·  paste it in the chat  ·  or hold your paper up to the camera</a:t>
             </a:r>
             <a:endParaRPr lang="en-US" sz="1700" dirty="0"/>
-          </a:p>
-        </p:txBody>
-      </p:sp>
-      <p:sp>
-        <p:nvSpPr>
-          <p:cNvPr id="5" name="Shape 3"/>
-          <p:cNvSpPr/>
-          <p:nvPr/>
-        </p:nvSpPr>
-        <p:spPr>
-          <a:xfrm>
-            <a:off x="1828800" y="2468880"/>
-            <a:ext cx="5486400" cy="1645920"/>
-          </a:xfrm>
-          <a:prstGeom prst="roundRect">
-            <a:avLst>
-              <a:gd name="adj" fmla="val 6667"/>
-            </a:avLst>
-          </a:prstGeom>
-          <a:solidFill>
-            <a:srgbClr val="FFFFFF"/>
-          </a:solidFill>
-          <a:ln/>
-          <a:effectLst>
-            <a:outerShdw sx="100000" sy="100000" kx="0" ky="0" algn="bl" rotWithShape="0" blurRad="101600" dist="38100" dir="2700000">
-              <a:srgbClr val="000000">
-                <a:alpha val="12000"/>
-              </a:srgbClr>
-            </a:outerShdw>
-          </a:effectLst>
-        </p:spPr>
-      </p:sp>
-      <p:sp>
-        <p:nvSpPr>
-          <p:cNvPr id="6" name="Text 4"/>
-          <p:cNvSpPr/>
-          <p:nvPr/>
-        </p:nvSpPr>
-        <p:spPr>
-          <a:xfrm>
-            <a:off x="2103120" y="2560320"/>
-            <a:ext cx="4937760" cy="1463040"/>
-          </a:xfrm>
-          <a:prstGeom prst="rect">
-            <a:avLst/>
-          </a:prstGeom>
-          <a:noFill/>
-          <a:ln/>
-        </p:spPr>
-        <p:txBody>
-          <a:bodyPr wrap="square" lIns="0" tIns="0" rIns="0" bIns="0" rtlCol="0" anchor="t"/>
-          <a:lstStyle/>
-          <a:p>
-            <a:pPr indent="0" marL="0">
-              <a:spcAft>
-                <a:spcPts val="200"/>
-              </a:spcAft>
-              <a:buNone/>
-            </a:pPr>
-            <a:r>
-              <a:rPr lang="en-US" sz="1400" b="1" dirty="0">
-                <a:solidFill>
-                  <a:srgbClr val="0E1C42"/>
-                </a:solidFill>
-                <a:latin typeface="Calibri" pitchFamily="34" charset="0"/>
-                <a:ea typeface="Calibri" pitchFamily="34" charset="-122"/>
-                <a:cs typeface="Calibri" pitchFamily="34" charset="-120"/>
-              </a:rPr>
-              <a:t>How to share:
-</a:t>
-            </a:r>
-            <a:pPr indent="0" marL="0">
-              <a:spcAft>
-                <a:spcPts val="200"/>
-              </a:spcAft>
-              <a:buNone/>
-            </a:pPr>
-            <a:r>
-              <a:rPr lang="en-US" sz="1300" dirty="0">
-                <a:solidFill>
-                  <a:srgbClr val="1E293B"/>
-                </a:solidFill>
-                <a:latin typeface="Calibri" pitchFamily="34" charset="0"/>
-                <a:ea typeface="Calibri" pitchFamily="34" charset="-122"/>
-                <a:cs typeface="Calibri" pitchFamily="34" charset="-120"/>
-              </a:rPr>
-              <a:t>✋ Raise your hand if you want to read yours aloud
-</a:t>
-            </a:r>
-            <a:pPr indent="0" marL="0">
-              <a:spcAft>
-                <a:spcPts val="200"/>
-              </a:spcAft>
-              <a:buNone/>
-            </a:pPr>
-            <a:r>
-              <a:rPr lang="en-US" sz="1300" dirty="0">
-                <a:solidFill>
-                  <a:srgbClr val="1E293B"/>
-                </a:solidFill>
-                <a:latin typeface="Calibri" pitchFamily="34" charset="0"/>
-                <a:ea typeface="Calibri" pitchFamily="34" charset="-122"/>
-                <a:cs typeface="Calibri" pitchFamily="34" charset="-120"/>
-              </a:rPr>
-              <a:t>💬 Or paste your writing in the chat
-</a:t>
-            </a:r>
-            <a:pPr indent="0" marL="0">
-              <a:spcAft>
-                <a:spcPts val="200"/>
-              </a:spcAft>
-              <a:buNone/>
-            </a:pPr>
-            <a:r>
-              <a:rPr lang="en-US" sz="1300" dirty="0">
-                <a:solidFill>
-                  <a:srgbClr val="1E293B"/>
-                </a:solidFill>
-                <a:latin typeface="Calibri" pitchFamily="34" charset="0"/>
-                <a:ea typeface="Calibri" pitchFamily="34" charset="-122"/>
-                <a:cs typeface="Calibri" pitchFamily="34" charset="-120"/>
-              </a:rPr>
-              <a:t>👂 Listen respectfully when others share
-</a:t>
-            </a:r>
-            <a:pPr indent="0" marL="0">
-              <a:spcAft>
-                <a:spcPts val="200"/>
-              </a:spcAft>
-              <a:buNone/>
-            </a:pPr>
-            <a:r>
-              <a:rPr lang="en-US" sz="1200" i="1" dirty="0">
-                <a:solidFill>
-                  <a:srgbClr val="64748B"/>
-                </a:solidFill>
-                <a:latin typeface="Calibri" pitchFamily="34" charset="0"/>
-                <a:ea typeface="Calibri" pitchFamily="34" charset="-122"/>
-                <a:cs typeface="Calibri" pitchFamily="34" charset="-120"/>
-              </a:rPr>
-              <a:t>Every writer's ideas matter — there are no wrong answers.</a:t>
-            </a:r>
-            <a:endParaRPr lang="en-US" sz="1400" dirty="0"/>
           </a:p>
         </p:txBody>
       </p:sp>
@@ -5652,7 +5697,7 @@
     <p:bg>
       <p:bgPr>
         <a:solidFill>
-          <a:srgbClr val="E5F7FC"/>
+          <a:srgbClr val="F8FAFC"/>
         </a:solidFill>
       </p:bgPr>
     </p:bg>
@@ -5672,81 +5717,17 @@
       </p:grpSpPr>
       <p:sp>
         <p:nvSpPr>
-          <p:cNvPr id="2" name="Text 0"/>
-          <p:cNvSpPr/>
-          <p:nvPr/>
-        </p:nvSpPr>
-        <p:spPr>
-          <a:xfrm>
-            <a:off x="365760" y="164592"/>
-            <a:ext cx="5943600" cy="566928"/>
-          </a:xfrm>
-          <a:prstGeom prst="rect">
-            <a:avLst/>
-          </a:prstGeom>
-          <a:noFill/>
-          <a:ln/>
-        </p:spPr>
-        <p:txBody>
-          <a:bodyPr wrap="square" lIns="0" tIns="0" rIns="0" bIns="0" rtlCol="0" anchor="ctr"/>
-          <a:lstStyle/>
-          <a:p>
-            <a:pPr algn="l" indent="0" marL="0">
-              <a:buNone/>
-            </a:pPr>
-            <a:r>
-              <a:rPr lang="en-US" sz="2800" b="1" dirty="0">
-                <a:solidFill>
-                  <a:srgbClr val="0E1C42"/>
-                </a:solidFill>
-                <a:latin typeface="Calibri" pitchFamily="34" charset="0"/>
-                <a:ea typeface="Calibri" pitchFamily="34" charset="-122"/>
-                <a:cs typeface="Calibri" pitchFamily="34" charset="-120"/>
-              </a:rPr>
-              <a:t>💡 Today's Focus</a:t>
-            </a:r>
-            <a:endParaRPr lang="en-US" sz="2800" dirty="0"/>
-          </a:p>
-        </p:txBody>
-      </p:sp>
-      <p:sp>
-        <p:nvSpPr>
-          <p:cNvPr id="3" name="Shape 1"/>
-          <p:cNvSpPr/>
-          <p:nvPr/>
-        </p:nvSpPr>
-        <p:spPr>
-          <a:xfrm>
-            <a:off x="365760" y="749808"/>
-            <a:ext cx="8412480" cy="0"/>
-          </a:xfrm>
-          <a:prstGeom prst="line">
-            <a:avLst/>
-          </a:prstGeom>
-          <a:noFill/>
-          <a:ln w="19050">
-            <a:solidFill>
-              <a:srgbClr val="5CB85C"/>
-            </a:solidFill>
-            <a:prstDash val="solid"/>
-          </a:ln>
-        </p:spPr>
-      </p:sp>
-      <p:sp>
-        <p:nvSpPr>
-          <p:cNvPr id="4" name="Shape 2"/>
-          <p:cNvSpPr/>
-          <p:nvPr/>
-        </p:nvSpPr>
-        <p:spPr>
-          <a:xfrm>
-            <a:off x="6492240" y="173736"/>
-            <a:ext cx="2286000" cy="502920"/>
-          </a:xfrm>
-          <a:prstGeom prst="roundRect">
-            <a:avLst>
-              <a:gd name="adj" fmla="val 21818"/>
-            </a:avLst>
+          <p:cNvPr id="2" name="Shape 0"/>
+          <p:cNvSpPr/>
+          <p:nvPr/>
+        </p:nvSpPr>
+        <p:spPr>
+          <a:xfrm>
+            <a:off x="0" y="0"/>
+            <a:ext cx="9144000" cy="566928"/>
+          </a:xfrm>
+          <a:prstGeom prst="rect">
+            <a:avLst/>
           </a:prstGeom>
           <a:solidFill>
             <a:srgbClr val="5CB85C"/>
@@ -5756,30 +5737,108 @@
       </p:sp>
       <p:sp>
         <p:nvSpPr>
+          <p:cNvPr id="3" name="Text 1"/>
+          <p:cNvSpPr/>
+          <p:nvPr/>
+        </p:nvSpPr>
+        <p:spPr>
+          <a:xfrm>
+            <a:off x="365760" y="54864"/>
+            <a:ext cx="8412480" cy="457200"/>
+          </a:xfrm>
+          <a:prstGeom prst="rect">
+            <a:avLst/>
+          </a:prstGeom>
+          <a:noFill/>
+          <a:ln/>
+        </p:spPr>
+        <p:txBody>
+          <a:bodyPr wrap="square" lIns="0" tIns="0" rIns="0" bIns="0" rtlCol="0" anchor="ctr"/>
+          <a:lstStyle/>
+          <a:p>
+            <a:pPr indent="0" marL="0">
+              <a:buNone/>
+            </a:pPr>
+            <a:r>
+              <a:rPr lang="en-US" sz="2200" b="1" dirty="0">
+                <a:solidFill>
+                  <a:srgbClr val="FFFFFF"/>
+                </a:solidFill>
+                <a:latin typeface="Calibri" pitchFamily="34" charset="0"/>
+                <a:ea typeface="Calibri" pitchFamily="34" charset="-122"/>
+                <a:cs typeface="Calibri" pitchFamily="34" charset="-120"/>
+              </a:rPr>
+              <a:t>📖  Today</a:t>
+            </a:r>
+            <a:endParaRPr lang="en-US" sz="2200" dirty="0"/>
+          </a:p>
+        </p:txBody>
+      </p:sp>
+      <p:sp>
+        <p:nvSpPr>
+          <p:cNvPr id="4" name="Text 2"/>
+          <p:cNvSpPr/>
+          <p:nvPr/>
+        </p:nvSpPr>
+        <p:spPr>
+          <a:xfrm>
+            <a:off x="365760" y="777240"/>
+            <a:ext cx="8229600" cy="237744"/>
+          </a:xfrm>
+          <a:prstGeom prst="rect">
+            <a:avLst/>
+          </a:prstGeom>
+          <a:noFill/>
+          <a:ln/>
+        </p:spPr>
+        <p:txBody>
+          <a:bodyPr wrap="square" lIns="0" tIns="0" rIns="0" bIns="0" rtlCol="0" anchor="ctr"/>
+          <a:lstStyle/>
+          <a:p>
+            <a:pPr indent="0" marL="0">
+              <a:buNone/>
+            </a:pPr>
+            <a:r>
+              <a:rPr lang="en-US" sz="1100" b="1" spc="100" kern="0" dirty="0">
+                <a:solidFill>
+                  <a:srgbClr val="8B6FC0"/>
+                </a:solidFill>
+                <a:latin typeface="Calibri" pitchFamily="34" charset="0"/>
+                <a:ea typeface="Calibri" pitchFamily="34" charset="-122"/>
+                <a:cs typeface="Calibri" pitchFamily="34" charset="-120"/>
+              </a:rPr>
+              <a:t>READING</a:t>
+            </a:r>
+            <a:endParaRPr lang="en-US" sz="1100" dirty="0"/>
+          </a:p>
+        </p:txBody>
+      </p:sp>
+      <p:sp>
+        <p:nvSpPr>
           <p:cNvPr id="5" name="Text 3"/>
           <p:cNvSpPr/>
           <p:nvPr/>
         </p:nvSpPr>
         <p:spPr>
           <a:xfrm>
-            <a:off x="6492240" y="173736"/>
-            <a:ext cx="2286000" cy="502920"/>
-          </a:xfrm>
-          <a:prstGeom prst="rect">
-            <a:avLst/>
-          </a:prstGeom>
-          <a:noFill/>
-          <a:ln/>
-        </p:spPr>
-        <p:txBody>
-          <a:bodyPr wrap="square" lIns="0" tIns="0" rIns="0" bIns="0" rtlCol="0" anchor="ctr"/>
-          <a:lstStyle/>
-          <a:p>
-            <a:pPr algn="ctr" indent="0" marL="0">
-              <a:buNone/>
-            </a:pPr>
-            <a:r>
-              <a:rPr lang="en-US" sz="1100" b="1" dirty="0">
+            <a:off x="365760" y="1014984"/>
+            <a:ext cx="8412480" cy="365760"/>
+          </a:xfrm>
+          <a:prstGeom prst="rect">
+            <a:avLst/>
+          </a:prstGeom>
+          <a:noFill/>
+          <a:ln/>
+        </p:spPr>
+        <p:txBody>
+          <a:bodyPr wrap="square" lIns="0" tIns="0" rIns="0" bIns="0" rtlCol="0" anchor="ctr"/>
+          <a:lstStyle/>
+          <a:p>
+            <a:pPr indent="0" marL="0">
+              <a:buNone/>
+            </a:pPr>
+            <a:r>
+              <a:rPr lang="en-US" sz="2000" b="1" dirty="0">
                 <a:solidFill>
                   <a:srgbClr val="0E1C42"/>
                 </a:solidFill>
@@ -5787,7 +5846,46 @@
                 <a:ea typeface="Calibri" pitchFamily="34" charset="-122"/>
                 <a:cs typeface="Calibri" pitchFamily="34" charset="-120"/>
               </a:rPr>
-              <a:t>CHAT PROMPT</a:t>
+              <a:t>📰 Read: How Does a Letter Travel?</a:t>
+            </a:r>
+            <a:endParaRPr lang="en-US" sz="2000" dirty="0"/>
+          </a:p>
+        </p:txBody>
+      </p:sp>
+      <p:sp>
+        <p:nvSpPr>
+          <p:cNvPr id="6" name="Text 4"/>
+          <p:cNvSpPr/>
+          <p:nvPr/>
+        </p:nvSpPr>
+        <p:spPr>
+          <a:xfrm>
+            <a:off x="365760" y="1508760"/>
+            <a:ext cx="8229600" cy="237744"/>
+          </a:xfrm>
+          <a:prstGeom prst="rect">
+            <a:avLst/>
+          </a:prstGeom>
+          <a:noFill/>
+          <a:ln/>
+        </p:spPr>
+        <p:txBody>
+          <a:bodyPr wrap="square" lIns="0" tIns="0" rIns="0" bIns="0" rtlCol="0" anchor="ctr"/>
+          <a:lstStyle/>
+          <a:p>
+            <a:pPr indent="0" marL="0">
+              <a:buNone/>
+            </a:pPr>
+            <a:r>
+              <a:rPr lang="en-US" sz="1100" b="1" spc="100" kern="0" dirty="0">
+                <a:solidFill>
+                  <a:srgbClr val="C7922C"/>
+                </a:solidFill>
+                <a:latin typeface="Calibri" pitchFamily="34" charset="0"/>
+                <a:ea typeface="Calibri" pitchFamily="34" charset="-122"/>
+                <a:cs typeface="Calibri" pitchFamily="34" charset="-120"/>
+              </a:rPr>
+              <a:t>BIG QUESTION</a:t>
             </a:r>
             <a:endParaRPr lang="en-US" sz="1100" dirty="0"/>
           </a:p>
@@ -5795,63 +5893,24 @@
       </p:sp>
       <p:sp>
         <p:nvSpPr>
-          <p:cNvPr id="6" name="Text 4"/>
-          <p:cNvSpPr/>
-          <p:nvPr/>
-        </p:nvSpPr>
-        <p:spPr>
-          <a:xfrm>
-            <a:off x="457200" y="914400"/>
-            <a:ext cx="8046720" cy="292608"/>
-          </a:xfrm>
-          <a:prstGeom prst="rect">
-            <a:avLst/>
-          </a:prstGeom>
-          <a:noFill/>
-          <a:ln/>
-        </p:spPr>
-        <p:txBody>
-          <a:bodyPr wrap="square" lIns="0" tIns="0" rIns="0" bIns="0" rtlCol="0" anchor="ctr"/>
-          <a:lstStyle/>
-          <a:p>
-            <a:pPr indent="0" marL="0">
-              <a:buNone/>
-            </a:pPr>
-            <a:r>
-              <a:rPr lang="en-US" sz="1100" b="1" spc="200" kern="0" dirty="0">
-                <a:solidFill>
-                  <a:srgbClr val="C7922C"/>
-                </a:solidFill>
-                <a:latin typeface="Calibri" pitchFamily="34" charset="0"/>
-                <a:ea typeface="Calibri" pitchFamily="34" charset="-122"/>
-                <a:cs typeface="Calibri" pitchFamily="34" charset="-120"/>
-              </a:rPr>
-              <a:t>BIG QUESTION</a:t>
-            </a:r>
-            <a:endParaRPr lang="en-US" sz="1100" dirty="0"/>
-          </a:p>
-        </p:txBody>
-      </p:sp>
-      <p:sp>
-        <p:nvSpPr>
           <p:cNvPr id="7" name="Shape 5"/>
           <p:cNvSpPr/>
           <p:nvPr/>
         </p:nvSpPr>
         <p:spPr>
           <a:xfrm>
-            <a:off x="457200" y="1234440"/>
-            <a:ext cx="8229600" cy="640080"/>
+            <a:off x="365760" y="1746504"/>
+            <a:ext cx="8412480" cy="731520"/>
           </a:xfrm>
           <a:prstGeom prst="roundRect">
             <a:avLst>
-              <a:gd name="adj" fmla="val 14286"/>
+              <a:gd name="adj" fmla="val 12500"/>
             </a:avLst>
           </a:prstGeom>
           <a:solidFill>
             <a:srgbClr val="FEF6E8"/>
           </a:solidFill>
-          <a:ln w="12700">
+          <a:ln w="19050">
             <a:solidFill>
               <a:srgbClr val="C7922C"/>
             </a:solidFill>
@@ -5874,24 +5933,24 @@
         </p:nvSpPr>
         <p:spPr>
           <a:xfrm>
-            <a:off x="640080" y="1344168"/>
-            <a:ext cx="7863840" cy="411480"/>
-          </a:xfrm>
-          <a:prstGeom prst="rect">
-            <a:avLst/>
-          </a:prstGeom>
-          <a:noFill/>
-          <a:ln/>
-        </p:spPr>
-        <p:txBody>
-          <a:bodyPr wrap="square" lIns="0" tIns="0" rIns="0" bIns="0" rtlCol="0" anchor="ctr"/>
-          <a:lstStyle/>
-          <a:p>
-            <a:pPr indent="0" marL="0">
-              <a:buNone/>
-            </a:pPr>
-            <a:r>
-              <a:rPr lang="en-US" sz="1800" i="1" dirty="0">
+            <a:off x="594360" y="1874520"/>
+            <a:ext cx="7955280" cy="475488"/>
+          </a:xfrm>
+          <a:prstGeom prst="rect">
+            <a:avLst/>
+          </a:prstGeom>
+          <a:noFill/>
+          <a:ln/>
+        </p:spPr>
+        <p:txBody>
+          <a:bodyPr wrap="square" lIns="0" tIns="0" rIns="0" bIns="0" rtlCol="0" anchor="ctr"/>
+          <a:lstStyle/>
+          <a:p>
+            <a:pPr indent="0" marL="0">
+              <a:buNone/>
+            </a:pPr>
+            <a:r>
+              <a:rPr lang="en-US" sz="1700" dirty="0">
                 <a:solidFill>
                   <a:srgbClr val="1E293B"/>
                 </a:solidFill>
@@ -5901,43 +5960,48 @@
               </a:rPr>
               <a:t>What happens to a letter between the moment you drop it in a mailbox and the moment someone opens it?</a:t>
             </a:r>
-            <a:endParaRPr lang="en-US" sz="1800" dirty="0"/>
-          </a:p>
-        </p:txBody>
-      </p:sp>
-      <p:sp>
-        <p:nvSpPr>
-          <p:cNvPr id="9" name="Shape 7"/>
-          <p:cNvSpPr/>
-          <p:nvPr/>
-        </p:nvSpPr>
-        <p:spPr>
-          <a:xfrm>
-            <a:off x="457200" y="1965960"/>
-            <a:ext cx="8229600" cy="640080"/>
-          </a:xfrm>
-          <a:prstGeom prst="roundRect">
-            <a:avLst>
-              <a:gd name="adj" fmla="val 14286"/>
-            </a:avLst>
-          </a:prstGeom>
-          <a:solidFill>
-            <a:srgbClr val="FEF6E8"/>
-          </a:solidFill>
-          <a:ln w="12700">
-            <a:solidFill>
-              <a:srgbClr val="C7922C"/>
-            </a:solidFill>
-            <a:prstDash val="solid"/>
-          </a:ln>
-          <a:effectLst>
-            <a:outerShdw sx="100000" sy="100000" kx="0" ky="0" algn="bl" rotWithShape="0" blurRad="101600" dist="38100" dir="2700000">
-              <a:srgbClr val="000000">
-                <a:alpha val="12000"/>
-              </a:srgbClr>
-            </a:outerShdw>
-          </a:effectLst>
-        </p:spPr>
+            <a:endParaRPr lang="en-US" sz="1700" dirty="0"/>
+          </a:p>
+        </p:txBody>
+      </p:sp>
+      <p:sp>
+        <p:nvSpPr>
+          <p:cNvPr id="9" name="Text 7"/>
+          <p:cNvSpPr/>
+          <p:nvPr/>
+        </p:nvSpPr>
+        <p:spPr>
+          <a:xfrm>
+            <a:off x="365760" y="2606040"/>
+            <a:ext cx="8229600" cy="237744"/>
+          </a:xfrm>
+          <a:prstGeom prst="rect">
+            <a:avLst/>
+          </a:prstGeom>
+          <a:noFill/>
+          <a:ln/>
+        </p:spPr>
+        <p:txBody>
+          <a:bodyPr wrap="square" lIns="0" tIns="0" rIns="0" bIns="0" rtlCol="0" anchor="ctr"/>
+          <a:lstStyle/>
+          <a:p>
+            <a:pPr indent="0" marL="0">
+              <a:buNone/>
+            </a:pPr>
+            <a:r>
+              <a:rPr lang="en-US" sz="1100" b="1" spc="100" kern="0" dirty="0">
+                <a:solidFill>
+                  <a:srgbClr val="55C8E8"/>
+                </a:solidFill>
+                <a:latin typeface="Calibri" pitchFamily="34" charset="0"/>
+                <a:ea typeface="Calibri" pitchFamily="34" charset="-122"/>
+                <a:cs typeface="Calibri" pitchFamily="34" charset="-120"/>
+              </a:rPr>
+              <a:t>READING LENS</a:t>
+            </a:r>
+            <a:endParaRPr lang="en-US" sz="1100" dirty="0"/>
+          </a:p>
+        </p:txBody>
       </p:sp>
       <p:sp>
         <p:nvSpPr>
@@ -5947,24 +6011,24 @@
         </p:nvSpPr>
         <p:spPr>
           <a:xfrm>
-            <a:off x="640080" y="2075688"/>
-            <a:ext cx="7863840" cy="411480"/>
-          </a:xfrm>
-          <a:prstGeom prst="rect">
-            <a:avLst/>
-          </a:prstGeom>
-          <a:noFill/>
-          <a:ln/>
-        </p:spPr>
-        <p:txBody>
-          <a:bodyPr wrap="square" lIns="0" tIns="0" rIns="0" bIns="0" rtlCol="0" anchor="ctr"/>
-          <a:lstStyle/>
-          <a:p>
-            <a:pPr indent="0" marL="0">
-              <a:buNone/>
-            </a:pPr>
-            <a:r>
-              <a:rPr lang="en-US" sz="1800" i="1" dirty="0">
+            <a:off x="365760" y="2843784"/>
+            <a:ext cx="8412480" cy="914400"/>
+          </a:xfrm>
+          <a:prstGeom prst="rect">
+            <a:avLst/>
+          </a:prstGeom>
+          <a:noFill/>
+          <a:ln/>
+        </p:spPr>
+        <p:txBody>
+          <a:bodyPr wrap="square" lIns="0" tIns="0" rIns="0" bIns="0" rtlCol="0" anchor="ctr"/>
+          <a:lstStyle/>
+          <a:p>
+            <a:pPr indent="0" marL="0">
+              <a:buNone/>
+            </a:pPr>
+            <a:r>
+              <a:rPr lang="en-US" sz="1500" dirty="0">
                 <a:solidFill>
                   <a:srgbClr val="1E293B"/>
                 </a:solidFill>
@@ -5972,9 +6036,9 @@
                 <a:ea typeface="Calibri" pitchFamily="34" charset="-122"/>
                 <a:cs typeface="Calibri" pitchFamily="34" charset="-120"/>
               </a:rPr>
-              <a:t>The text says the whole trip can take one day for nearby mail or a week for far-away mail. Why do you think distance makes such a big difference?</a:t>
-            </a:r>
-            <a:endParaRPr lang="en-US" sz="1800" dirty="0"/>
+              <a:t>Good nonfiction readers look for the central idea as they read. The central idea is the most important point the author wants you to understand. Supporting details back it up.</a:t>
+            </a:r>
+            <a:endParaRPr lang="en-US" sz="1500" dirty="0"/>
           </a:p>
         </p:txBody>
       </p:sp>
@@ -5989,6 +6053,749 @@
 <file path=ppt/slides/slide7.xml><?xml version="1.0" encoding="utf-8"?>
 <p:sld xmlns:a="http://schemas.openxmlformats.org/drawingml/2006/main" xmlns:r="http://schemas.openxmlformats.org/officeDocument/2006/relationships" xmlns:p="http://schemas.openxmlformats.org/presentationml/2006/main">
   <p:cSld name="Slide 7">
+    <p:bg>
+      <p:bgPr>
+        <a:solidFill>
+          <a:srgbClr val="F8FAFC"/>
+        </a:solidFill>
+      </p:bgPr>
+    </p:bg>
+    <p:spTree>
+      <p:nvGrpSpPr>
+        <p:cNvPr id="1" name=""/>
+        <p:cNvGrpSpPr/>
+        <p:nvPr/>
+      </p:nvGrpSpPr>
+      <p:grpSpPr>
+        <a:xfrm>
+          <a:off x="0" y="0"/>
+          <a:ext cx="0" cy="0"/>
+          <a:chOff x="0" y="0"/>
+          <a:chExt cx="0" cy="0"/>
+        </a:xfrm>
+      </p:grpSpPr>
+      <p:sp>
+        <p:nvSpPr>
+          <p:cNvPr id="2" name="Shape 0"/>
+          <p:cNvSpPr/>
+          <p:nvPr/>
+        </p:nvSpPr>
+        <p:spPr>
+          <a:xfrm>
+            <a:off x="0" y="0"/>
+            <a:ext cx="9144000" cy="566928"/>
+          </a:xfrm>
+          <a:prstGeom prst="rect">
+            <a:avLst/>
+          </a:prstGeom>
+          <a:solidFill>
+            <a:srgbClr val="55C8E8"/>
+          </a:solidFill>
+          <a:ln/>
+        </p:spPr>
+      </p:sp>
+      <p:sp>
+        <p:nvSpPr>
+          <p:cNvPr id="3" name="Text 1"/>
+          <p:cNvSpPr/>
+          <p:nvPr/>
+        </p:nvSpPr>
+        <p:spPr>
+          <a:xfrm>
+            <a:off x="365760" y="54864"/>
+            <a:ext cx="8412480" cy="457200"/>
+          </a:xfrm>
+          <a:prstGeom prst="rect">
+            <a:avLst/>
+          </a:prstGeom>
+          <a:noFill/>
+          <a:ln/>
+        </p:spPr>
+        <p:txBody>
+          <a:bodyPr wrap="square" lIns="0" tIns="0" rIns="0" bIns="0" rtlCol="0" anchor="ctr"/>
+          <a:lstStyle/>
+          <a:p>
+            <a:pPr indent="0" marL="0">
+              <a:buNone/>
+            </a:pPr>
+            <a:r>
+              <a:rPr lang="en-US" sz="2200" b="1" dirty="0">
+                <a:solidFill>
+                  <a:srgbClr val="FFFFFF"/>
+                </a:solidFill>
+                <a:latin typeface="Calibri" pitchFamily="34" charset="0"/>
+                <a:ea typeface="Calibri" pitchFamily="34" charset="-122"/>
+                <a:cs typeface="Calibri" pitchFamily="34" charset="-120"/>
+              </a:rPr>
+              <a:t>✏️  Daily Oral Language</a:t>
+            </a:r>
+            <a:endParaRPr lang="en-US" sz="2200" dirty="0"/>
+          </a:p>
+        </p:txBody>
+      </p:sp>
+      <p:sp>
+        <p:nvSpPr>
+          <p:cNvPr id="4" name="Text 2"/>
+          <p:cNvSpPr/>
+          <p:nvPr/>
+        </p:nvSpPr>
+        <p:spPr>
+          <a:xfrm>
+            <a:off x="365760" y="749808"/>
+            <a:ext cx="8229600" cy="237744"/>
+          </a:xfrm>
+          <a:prstGeom prst="rect">
+            <a:avLst/>
+          </a:prstGeom>
+          <a:noFill/>
+          <a:ln/>
+        </p:spPr>
+        <p:txBody>
+          <a:bodyPr wrap="square" lIns="0" tIns="0" rIns="0" bIns="0" rtlCol="0" anchor="ctr"/>
+          <a:lstStyle/>
+          <a:p>
+            <a:pPr indent="0" marL="0">
+              <a:buNone/>
+            </a:pPr>
+            <a:r>
+              <a:rPr lang="en-US" sz="1100" b="1" spc="100" kern="0" dirty="0">
+                <a:solidFill>
+                  <a:srgbClr val="55C8E8"/>
+                </a:solidFill>
+                <a:latin typeface="Calibri" pitchFamily="34" charset="0"/>
+                <a:ea typeface="Calibri" pitchFamily="34" charset="-122"/>
+                <a:cs typeface="Calibri" pitchFamily="34" charset="-120"/>
+              </a:rPr>
+              <a:t>FIX THESE SENTENCES</a:t>
+            </a:r>
+            <a:endParaRPr lang="en-US" sz="1100" dirty="0"/>
+          </a:p>
+        </p:txBody>
+      </p:sp>
+      <p:sp>
+        <p:nvSpPr>
+          <p:cNvPr id="5" name="Shape 3"/>
+          <p:cNvSpPr/>
+          <p:nvPr/>
+        </p:nvSpPr>
+        <p:spPr>
+          <a:xfrm>
+            <a:off x="365760" y="1024128"/>
+            <a:ext cx="8412480" cy="777240"/>
+          </a:xfrm>
+          <a:prstGeom prst="roundRect">
+            <a:avLst>
+              <a:gd name="adj" fmla="val 11765"/>
+            </a:avLst>
+          </a:prstGeom>
+          <a:solidFill>
+            <a:srgbClr val="FFFFFF"/>
+          </a:solidFill>
+          <a:ln w="19050">
+            <a:solidFill>
+              <a:srgbClr val="55C8E8"/>
+            </a:solidFill>
+            <a:prstDash val="solid"/>
+          </a:ln>
+          <a:effectLst>
+            <a:outerShdw sx="100000" sy="100000" kx="0" ky="0" algn="bl" rotWithShape="0" blurRad="101600" dist="38100" dir="2700000">
+              <a:srgbClr val="000000">
+                <a:alpha val="12000"/>
+              </a:srgbClr>
+            </a:outerShdw>
+          </a:effectLst>
+        </p:spPr>
+      </p:sp>
+      <p:sp>
+        <p:nvSpPr>
+          <p:cNvPr id="6" name="Text 4"/>
+          <p:cNvSpPr/>
+          <p:nvPr/>
+        </p:nvSpPr>
+        <p:spPr>
+          <a:xfrm>
+            <a:off x="594360" y="1152144"/>
+            <a:ext cx="7955280" cy="521208"/>
+          </a:xfrm>
+          <a:prstGeom prst="rect">
+            <a:avLst/>
+          </a:prstGeom>
+          <a:noFill/>
+          <a:ln/>
+        </p:spPr>
+        <p:txBody>
+          <a:bodyPr wrap="square" lIns="0" tIns="0" rIns="0" bIns="0" rtlCol="0" anchor="ctr"/>
+          <a:lstStyle/>
+          <a:p>
+            <a:pPr indent="0" marL="0">
+              <a:buNone/>
+            </a:pPr>
+            <a:r>
+              <a:rPr lang="en-US" sz="1700" dirty="0">
+                <a:solidFill>
+                  <a:srgbClr val="1E293B"/>
+                </a:solidFill>
+                <a:latin typeface="Calibri" pitchFamily="34" charset="0"/>
+                <a:ea typeface="Calibri" pitchFamily="34" charset="-122"/>
+                <a:cs typeface="Calibri" pitchFamily="34" charset="-120"/>
+              </a:rPr>
+              <a:t>When the letter reaches the right city, it goes to another post office.</a:t>
+            </a:r>
+            <a:endParaRPr lang="en-US" sz="1700" dirty="0"/>
+          </a:p>
+        </p:txBody>
+      </p:sp>
+      <p:sp>
+        <p:nvSpPr>
+          <p:cNvPr id="7" name="Shape 5"/>
+          <p:cNvSpPr/>
+          <p:nvPr/>
+        </p:nvSpPr>
+        <p:spPr>
+          <a:xfrm>
+            <a:off x="365760" y="1874520"/>
+            <a:ext cx="8412480" cy="777240"/>
+          </a:xfrm>
+          <a:prstGeom prst="roundRect">
+            <a:avLst>
+              <a:gd name="adj" fmla="val 11765"/>
+            </a:avLst>
+          </a:prstGeom>
+          <a:solidFill>
+            <a:srgbClr val="FFFFFF"/>
+          </a:solidFill>
+          <a:ln w="19050">
+            <a:solidFill>
+              <a:srgbClr val="55C8E8"/>
+            </a:solidFill>
+            <a:prstDash val="solid"/>
+          </a:ln>
+          <a:effectLst>
+            <a:outerShdw sx="100000" sy="100000" kx="0" ky="0" algn="bl" rotWithShape="0" blurRad="101600" dist="38100" dir="2700000">
+              <a:srgbClr val="000000">
+                <a:alpha val="12000"/>
+              </a:srgbClr>
+            </a:outerShdw>
+          </a:effectLst>
+        </p:spPr>
+      </p:sp>
+      <p:sp>
+        <p:nvSpPr>
+          <p:cNvPr id="8" name="Text 6"/>
+          <p:cNvSpPr/>
+          <p:nvPr/>
+        </p:nvSpPr>
+        <p:spPr>
+          <a:xfrm>
+            <a:off x="594360" y="2002536"/>
+            <a:ext cx="7955280" cy="521208"/>
+          </a:xfrm>
+          <a:prstGeom prst="rect">
+            <a:avLst/>
+          </a:prstGeom>
+          <a:noFill/>
+          <a:ln/>
+        </p:spPr>
+        <p:txBody>
+          <a:bodyPr wrap="square" lIns="0" tIns="0" rIns="0" bIns="0" rtlCol="0" anchor="ctr"/>
+          <a:lstStyle/>
+          <a:p>
+            <a:pPr indent="0" marL="0">
+              <a:buNone/>
+            </a:pPr>
+            <a:r>
+              <a:rPr lang="en-US" sz="1700" dirty="0">
+                <a:solidFill>
+                  <a:srgbClr val="1E293B"/>
+                </a:solidFill>
+                <a:latin typeface="Calibri" pitchFamily="34" charset="0"/>
+                <a:ea typeface="Calibri" pitchFamily="34" charset="-122"/>
+                <a:cs typeface="Calibri" pitchFamily="34" charset="-120"/>
+              </a:rPr>
+              <a:t>after the letters are sorted by zip code they are loaded onto trucks trains or airplanes</a:t>
+            </a:r>
+            <a:endParaRPr lang="en-US" sz="1700" dirty="0"/>
+          </a:p>
+        </p:txBody>
+      </p:sp>
+      <p:sp>
+        <p:nvSpPr>
+          <p:cNvPr id="9" name="Text 7"/>
+          <p:cNvSpPr/>
+          <p:nvPr/>
+        </p:nvSpPr>
+        <p:spPr>
+          <a:xfrm>
+            <a:off x="365760" y="2788920"/>
+            <a:ext cx="8412480" cy="365760"/>
+          </a:xfrm>
+          <a:prstGeom prst="rect">
+            <a:avLst/>
+          </a:prstGeom>
+          <a:noFill/>
+          <a:ln/>
+        </p:spPr>
+        <p:txBody>
+          <a:bodyPr wrap="square" lIns="0" tIns="0" rIns="0" bIns="0" rtlCol="0" anchor="ctr"/>
+          <a:lstStyle/>
+          <a:p>
+            <a:pPr indent="0" marL="0">
+              <a:buNone/>
+            </a:pPr>
+            <a:r>
+              <a:rPr lang="en-US" sz="1600" b="1" dirty="0">
+                <a:solidFill>
+                  <a:srgbClr val="0E1C42"/>
+                </a:solidFill>
+                <a:latin typeface="Calibri" pitchFamily="34" charset="0"/>
+                <a:ea typeface="Calibri" pitchFamily="34" charset="-122"/>
+                <a:cs typeface="Calibri" pitchFamily="34" charset="-120"/>
+              </a:rPr>
+              <a:t>Rewrite both sentences correctly in your notebook.</a:t>
+            </a:r>
+            <a:endParaRPr lang="en-US" sz="1600" dirty="0"/>
+          </a:p>
+        </p:txBody>
+      </p:sp>
+    </p:spTree>
+  </p:cSld>
+  <p:clrMapOvr>
+    <a:masterClrMapping/>
+  </p:clrMapOvr>
+</p:sld>
+</file>
+
+<file path=ppt/slides/slide8.xml><?xml version="1.0" encoding="utf-8"?>
+<p:sld xmlns:a="http://schemas.openxmlformats.org/drawingml/2006/main" xmlns:r="http://schemas.openxmlformats.org/officeDocument/2006/relationships" xmlns:p="http://schemas.openxmlformats.org/presentationml/2006/main">
+  <p:cSld name="Slide 8">
+    <p:bg>
+      <p:bgPr>
+        <a:solidFill>
+          <a:srgbClr val="F8FAFC"/>
+        </a:solidFill>
+      </p:bgPr>
+    </p:bg>
+    <p:spTree>
+      <p:nvGrpSpPr>
+        <p:cNvPr id="1" name=""/>
+        <p:cNvGrpSpPr/>
+        <p:nvPr/>
+      </p:nvGrpSpPr>
+      <p:grpSpPr>
+        <a:xfrm>
+          <a:off x="0" y="0"/>
+          <a:ext cx="0" cy="0"/>
+          <a:chOff x="0" y="0"/>
+          <a:chExt cx="0" cy="0"/>
+        </a:xfrm>
+      </p:grpSpPr>
+      <p:sp>
+        <p:nvSpPr>
+          <p:cNvPr id="2" name="Shape 0"/>
+          <p:cNvSpPr/>
+          <p:nvPr/>
+        </p:nvSpPr>
+        <p:spPr>
+          <a:xfrm>
+            <a:off x="0" y="0"/>
+            <a:ext cx="9144000" cy="566928"/>
+          </a:xfrm>
+          <a:prstGeom prst="rect">
+            <a:avLst/>
+          </a:prstGeom>
+          <a:solidFill>
+            <a:srgbClr val="55C8E8"/>
+          </a:solidFill>
+          <a:ln/>
+        </p:spPr>
+      </p:sp>
+      <p:sp>
+        <p:nvSpPr>
+          <p:cNvPr id="3" name="Text 1"/>
+          <p:cNvSpPr/>
+          <p:nvPr/>
+        </p:nvSpPr>
+        <p:spPr>
+          <a:xfrm>
+            <a:off x="365760" y="54864"/>
+            <a:ext cx="8412480" cy="457200"/>
+          </a:xfrm>
+          <a:prstGeom prst="rect">
+            <a:avLst/>
+          </a:prstGeom>
+          <a:noFill/>
+          <a:ln/>
+        </p:spPr>
+        <p:txBody>
+          <a:bodyPr wrap="square" lIns="0" tIns="0" rIns="0" bIns="0" rtlCol="0" anchor="ctr"/>
+          <a:lstStyle/>
+          <a:p>
+            <a:pPr indent="0" marL="0">
+              <a:buNone/>
+            </a:pPr>
+            <a:r>
+              <a:rPr lang="en-US" sz="2200" b="1" dirty="0">
+                <a:solidFill>
+                  <a:srgbClr val="FFFFFF"/>
+                </a:solidFill>
+                <a:latin typeface="Calibri" pitchFamily="34" charset="0"/>
+                <a:ea typeface="Calibri" pitchFamily="34" charset="-122"/>
+                <a:cs typeface="Calibri" pitchFamily="34" charset="-120"/>
+              </a:rPr>
+              <a:t>✏️  Daily Oral Language</a:t>
+            </a:r>
+            <a:endParaRPr lang="en-US" sz="2200" dirty="0"/>
+          </a:p>
+        </p:txBody>
+      </p:sp>
+      <p:sp>
+        <p:nvSpPr>
+          <p:cNvPr id="4" name="Text 2"/>
+          <p:cNvSpPr/>
+          <p:nvPr/>
+        </p:nvSpPr>
+        <p:spPr>
+          <a:xfrm>
+            <a:off x="365760" y="749808"/>
+            <a:ext cx="8229600" cy="237744"/>
+          </a:xfrm>
+          <a:prstGeom prst="rect">
+            <a:avLst/>
+          </a:prstGeom>
+          <a:noFill/>
+          <a:ln/>
+        </p:spPr>
+        <p:txBody>
+          <a:bodyPr wrap="square" lIns="0" tIns="0" rIns="0" bIns="0" rtlCol="0" anchor="ctr"/>
+          <a:lstStyle/>
+          <a:p>
+            <a:pPr indent="0" marL="0">
+              <a:buNone/>
+            </a:pPr>
+            <a:r>
+              <a:rPr lang="en-US" sz="1100" b="1" spc="100" kern="0" dirty="0">
+                <a:solidFill>
+                  <a:srgbClr val="55C8E8"/>
+                </a:solidFill>
+                <a:latin typeface="Calibri" pitchFamily="34" charset="0"/>
+                <a:ea typeface="Calibri" pitchFamily="34" charset="-122"/>
+                <a:cs typeface="Calibri" pitchFamily="34" charset="-120"/>
+              </a:rPr>
+              <a:t>FIX THESE SENTENCES</a:t>
+            </a:r>
+            <a:endParaRPr lang="en-US" sz="1100" dirty="0"/>
+          </a:p>
+        </p:txBody>
+      </p:sp>
+      <p:sp>
+        <p:nvSpPr>
+          <p:cNvPr id="5" name="Shape 3"/>
+          <p:cNvSpPr/>
+          <p:nvPr/>
+        </p:nvSpPr>
+        <p:spPr>
+          <a:xfrm>
+            <a:off x="365760" y="1024128"/>
+            <a:ext cx="8412480" cy="777240"/>
+          </a:xfrm>
+          <a:prstGeom prst="roundRect">
+            <a:avLst>
+              <a:gd name="adj" fmla="val 11765"/>
+            </a:avLst>
+          </a:prstGeom>
+          <a:solidFill>
+            <a:srgbClr val="FFFFFF"/>
+          </a:solidFill>
+          <a:ln w="19050">
+            <a:solidFill>
+              <a:srgbClr val="55C8E8"/>
+            </a:solidFill>
+            <a:prstDash val="solid"/>
+          </a:ln>
+          <a:effectLst>
+            <a:outerShdw sx="100000" sy="100000" kx="0" ky="0" algn="bl" rotWithShape="0" blurRad="101600" dist="38100" dir="2700000">
+              <a:srgbClr val="000000">
+                <a:alpha val="12000"/>
+              </a:srgbClr>
+            </a:outerShdw>
+          </a:effectLst>
+        </p:spPr>
+      </p:sp>
+      <p:sp>
+        <p:nvSpPr>
+          <p:cNvPr id="6" name="Text 4"/>
+          <p:cNvSpPr/>
+          <p:nvPr/>
+        </p:nvSpPr>
+        <p:spPr>
+          <a:xfrm>
+            <a:off x="594360" y="1152144"/>
+            <a:ext cx="7955280" cy="521208"/>
+          </a:xfrm>
+          <a:prstGeom prst="rect">
+            <a:avLst/>
+          </a:prstGeom>
+          <a:noFill/>
+          <a:ln/>
+        </p:spPr>
+        <p:txBody>
+          <a:bodyPr wrap="square" lIns="0" tIns="0" rIns="0" bIns="0" rtlCol="0" anchor="ctr"/>
+          <a:lstStyle/>
+          <a:p>
+            <a:pPr indent="0" marL="0">
+              <a:buNone/>
+            </a:pPr>
+            <a:r>
+              <a:rPr lang="en-US" sz="1700" dirty="0">
+                <a:solidFill>
+                  <a:srgbClr val="1E293B"/>
+                </a:solidFill>
+                <a:latin typeface="Calibri" pitchFamily="34" charset="0"/>
+                <a:ea typeface="Calibri" pitchFamily="34" charset="-122"/>
+                <a:cs typeface="Calibri" pitchFamily="34" charset="-120"/>
+              </a:rPr>
+              <a:t>When the letter reaches the right city, it goes to another post office.</a:t>
+            </a:r>
+            <a:endParaRPr lang="en-US" sz="1700" dirty="0"/>
+          </a:p>
+        </p:txBody>
+      </p:sp>
+      <p:sp>
+        <p:nvSpPr>
+          <p:cNvPr id="7" name="Shape 5"/>
+          <p:cNvSpPr/>
+          <p:nvPr/>
+        </p:nvSpPr>
+        <p:spPr>
+          <a:xfrm>
+            <a:off x="365760" y="1874520"/>
+            <a:ext cx="8412480" cy="777240"/>
+          </a:xfrm>
+          <a:prstGeom prst="roundRect">
+            <a:avLst>
+              <a:gd name="adj" fmla="val 11765"/>
+            </a:avLst>
+          </a:prstGeom>
+          <a:solidFill>
+            <a:srgbClr val="FFFFFF"/>
+          </a:solidFill>
+          <a:ln w="19050">
+            <a:solidFill>
+              <a:srgbClr val="55C8E8"/>
+            </a:solidFill>
+            <a:prstDash val="solid"/>
+          </a:ln>
+          <a:effectLst>
+            <a:outerShdw sx="100000" sy="100000" kx="0" ky="0" algn="bl" rotWithShape="0" blurRad="101600" dist="38100" dir="2700000">
+              <a:srgbClr val="000000">
+                <a:alpha val="12000"/>
+              </a:srgbClr>
+            </a:outerShdw>
+          </a:effectLst>
+        </p:spPr>
+      </p:sp>
+      <p:sp>
+        <p:nvSpPr>
+          <p:cNvPr id="8" name="Text 6"/>
+          <p:cNvSpPr/>
+          <p:nvPr/>
+        </p:nvSpPr>
+        <p:spPr>
+          <a:xfrm>
+            <a:off x="594360" y="2002536"/>
+            <a:ext cx="7955280" cy="521208"/>
+          </a:xfrm>
+          <a:prstGeom prst="rect">
+            <a:avLst/>
+          </a:prstGeom>
+          <a:noFill/>
+          <a:ln/>
+        </p:spPr>
+        <p:txBody>
+          <a:bodyPr wrap="square" lIns="0" tIns="0" rIns="0" bIns="0" rtlCol="0" anchor="ctr"/>
+          <a:lstStyle/>
+          <a:p>
+            <a:pPr indent="0" marL="0">
+              <a:buNone/>
+            </a:pPr>
+            <a:r>
+              <a:rPr lang="en-US" sz="1700" dirty="0">
+                <a:solidFill>
+                  <a:srgbClr val="1E293B"/>
+                </a:solidFill>
+                <a:latin typeface="Calibri" pitchFamily="34" charset="0"/>
+                <a:ea typeface="Calibri" pitchFamily="34" charset="-122"/>
+                <a:cs typeface="Calibri" pitchFamily="34" charset="-120"/>
+              </a:rPr>
+              <a:t>after the letters are sorted by zip code they are loaded onto trucks trains or airplanes</a:t>
+            </a:r>
+            <a:endParaRPr lang="en-US" sz="1700" dirty="0"/>
+          </a:p>
+        </p:txBody>
+      </p:sp>
+      <p:sp>
+        <p:nvSpPr>
+          <p:cNvPr id="9" name="Shape 7"/>
+          <p:cNvSpPr/>
+          <p:nvPr/>
+        </p:nvSpPr>
+        <p:spPr>
+          <a:xfrm>
+            <a:off x="365760" y="2743200"/>
+            <a:ext cx="8412480" cy="1417320"/>
+          </a:xfrm>
+          <a:prstGeom prst="roundRect">
+            <a:avLst>
+              <a:gd name="adj" fmla="val 6452"/>
+            </a:avLst>
+          </a:prstGeom>
+          <a:solidFill>
+            <a:srgbClr val="E8F8EF"/>
+          </a:solidFill>
+          <a:ln/>
+          <a:effectLst>
+            <a:outerShdw sx="100000" sy="100000" kx="0" ky="0" algn="bl" rotWithShape="0" blurRad="101600" dist="38100" dir="2700000">
+              <a:srgbClr val="000000">
+                <a:alpha val="12000"/>
+              </a:srgbClr>
+            </a:outerShdw>
+          </a:effectLst>
+        </p:spPr>
+      </p:sp>
+      <p:sp>
+        <p:nvSpPr>
+          <p:cNvPr id="10" name="Text 8"/>
+          <p:cNvSpPr/>
+          <p:nvPr/>
+        </p:nvSpPr>
+        <p:spPr>
+          <a:xfrm>
+            <a:off x="566928" y="2816352"/>
+            <a:ext cx="8229600" cy="237744"/>
+          </a:xfrm>
+          <a:prstGeom prst="rect">
+            <a:avLst/>
+          </a:prstGeom>
+          <a:noFill/>
+          <a:ln/>
+        </p:spPr>
+        <p:txBody>
+          <a:bodyPr wrap="square" lIns="0" tIns="0" rIns="0" bIns="0" rtlCol="0" anchor="ctr"/>
+          <a:lstStyle/>
+          <a:p>
+            <a:pPr indent="0" marL="0">
+              <a:buNone/>
+            </a:pPr>
+            <a:r>
+              <a:rPr lang="en-US" sz="1100" b="1" spc="100" kern="0" dirty="0">
+                <a:solidFill>
+                  <a:srgbClr val="34B76F"/>
+                </a:solidFill>
+                <a:latin typeface="Calibri" pitchFamily="34" charset="0"/>
+                <a:ea typeface="Calibri" pitchFamily="34" charset="-122"/>
+                <a:cs typeface="Calibri" pitchFamily="34" charset="-120"/>
+              </a:rPr>
+              <a:t>✅  CORRECTED</a:t>
+            </a:r>
+            <a:endParaRPr lang="en-US" sz="1100" dirty="0"/>
+          </a:p>
+        </p:txBody>
+      </p:sp>
+      <p:sp>
+        <p:nvSpPr>
+          <p:cNvPr id="11" name="Text 9"/>
+          <p:cNvSpPr/>
+          <p:nvPr/>
+        </p:nvSpPr>
+        <p:spPr>
+          <a:xfrm>
+            <a:off x="566928" y="3072384"/>
+            <a:ext cx="8010144" cy="685800"/>
+          </a:xfrm>
+          <a:prstGeom prst="rect">
+            <a:avLst/>
+          </a:prstGeom>
+          <a:noFill/>
+          <a:ln/>
+        </p:spPr>
+        <p:txBody>
+          <a:bodyPr wrap="square" lIns="0" tIns="0" rIns="0" bIns="0" rtlCol="0" anchor="ctr"/>
+          <a:lstStyle/>
+          <a:p>
+            <a:pPr indent="0" marL="0">
+              <a:buNone/>
+            </a:pPr>
+            <a:r>
+              <a:rPr lang="en-US" sz="1400" i="1" dirty="0">
+                <a:solidFill>
+                  <a:srgbClr val="1E293B"/>
+                </a:solidFill>
+                <a:latin typeface="Calibri" pitchFamily="34" charset="0"/>
+                <a:ea typeface="Calibri" pitchFamily="34" charset="-122"/>
+                <a:cs typeface="Calibri" pitchFamily="34" charset="-120"/>
+              </a:rPr>
+              <a:t>Corrected:</a:t>
+            </a:r>
+            <a:endParaRPr lang="en-US" sz="1400" dirty="0"/>
+          </a:p>
+          <a:p>
+            <a:pPr indent="0" marL="0">
+              <a:buNone/>
+            </a:pPr>
+            <a:endParaRPr lang="en-US" sz="1400" dirty="0"/>
+          </a:p>
+        </p:txBody>
+      </p:sp>
+      <p:sp>
+        <p:nvSpPr>
+          <p:cNvPr id="12" name="Text 10"/>
+          <p:cNvSpPr/>
+          <p:nvPr/>
+        </p:nvSpPr>
+        <p:spPr>
+          <a:xfrm>
+            <a:off x="566928" y="3767328"/>
+            <a:ext cx="8010144" cy="320040"/>
+          </a:xfrm>
+          <a:prstGeom prst="rect">
+            <a:avLst/>
+          </a:prstGeom>
+          <a:noFill/>
+          <a:ln/>
+        </p:spPr>
+        <p:txBody>
+          <a:bodyPr wrap="square" lIns="0" tIns="0" rIns="0" bIns="0" rtlCol="0" anchor="ctr"/>
+          <a:lstStyle/>
+          <a:p>
+            <a:pPr indent="0" marL="0">
+              <a:buNone/>
+            </a:pPr>
+            <a:r>
+              <a:rPr lang="en-US" sz="1200" dirty="0">
+                <a:solidFill>
+                  <a:srgbClr val="64748B"/>
+                </a:solidFill>
+                <a:latin typeface="Calibri" pitchFamily="34" charset="0"/>
+                <a:ea typeface="Calibri" pitchFamily="34" charset="-122"/>
+                <a:cs typeface="Calibri" pitchFamily="34" charset="-120"/>
+              </a:rPr>
+              <a:t>After the letters are sorted by ZIP code , they are loaded onto trucks , trains , or airplanes .</a:t>
+            </a:r>
+            <a:endParaRPr lang="en-US" sz="1200" dirty="0"/>
+          </a:p>
+        </p:txBody>
+      </p:sp>
+    </p:spTree>
+  </p:cSld>
+  <p:clrMapOvr>
+    <a:masterClrMapping/>
+  </p:clrMapOvr>
+</p:sld>
+</file>
+
+<file path=ppt/slides/slide9.xml><?xml version="1.0" encoding="utf-8"?>
+<p:sld xmlns:a="http://schemas.openxmlformats.org/drawingml/2006/main" xmlns:r="http://schemas.openxmlformats.org/officeDocument/2006/relationships" xmlns:p="http://schemas.openxmlformats.org/presentationml/2006/main">
+  <p:cSld name="Slide 9">
     <p:bg>
       <p:bgPr>
         <a:solidFill>
@@ -6012,91 +6819,122 @@
       </p:grpSpPr>
       <p:sp>
         <p:nvSpPr>
-          <p:cNvPr id="2" name="Text 0"/>
-          <p:cNvSpPr/>
-          <p:nvPr/>
-        </p:nvSpPr>
-        <p:spPr>
-          <a:xfrm>
-            <a:off x="365760" y="164592"/>
-            <a:ext cx="8412480" cy="566928"/>
-          </a:xfrm>
-          <a:prstGeom prst="rect">
-            <a:avLst/>
-          </a:prstGeom>
-          <a:noFill/>
-          <a:ln/>
-        </p:spPr>
-        <p:txBody>
-          <a:bodyPr wrap="square" lIns="0" tIns="0" rIns="0" bIns="0" rtlCol="0" anchor="ctr"/>
-          <a:lstStyle/>
-          <a:p>
-            <a:pPr algn="l" indent="0" marL="0">
-              <a:buNone/>
-            </a:pPr>
-            <a:r>
-              <a:rPr lang="en-US" sz="2800" b="1" dirty="0">
-                <a:solidFill>
-                  <a:srgbClr val="0E1C42"/>
-                </a:solidFill>
-                <a:latin typeface="Calibri" pitchFamily="34" charset="0"/>
-                <a:ea typeface="Calibri" pitchFamily="34" charset="-122"/>
-                <a:cs typeface="Calibri" pitchFamily="34" charset="-120"/>
-              </a:rPr>
-              <a:t>✅ Model Sentence — Study What's Right</a:t>
-            </a:r>
-            <a:endParaRPr lang="en-US" sz="2800" dirty="0"/>
-          </a:p>
-        </p:txBody>
-      </p:sp>
-      <p:sp>
-        <p:nvSpPr>
-          <p:cNvPr id="3" name="Shape 1"/>
-          <p:cNvSpPr/>
-          <p:nvPr/>
-        </p:nvSpPr>
-        <p:spPr>
-          <a:xfrm>
-            <a:off x="365760" y="749808"/>
-            <a:ext cx="8412480" cy="0"/>
-          </a:xfrm>
-          <a:prstGeom prst="line">
-            <a:avLst/>
-          </a:prstGeom>
-          <a:noFill/>
-          <a:ln w="19050">
-            <a:solidFill>
-              <a:srgbClr val="34B76F"/>
-            </a:solidFill>
-            <a:prstDash val="solid"/>
-          </a:ln>
-        </p:spPr>
-      </p:sp>
-      <p:sp>
-        <p:nvSpPr>
-          <p:cNvPr id="4" name="Shape 2"/>
-          <p:cNvSpPr/>
-          <p:nvPr/>
-        </p:nvSpPr>
-        <p:spPr>
-          <a:xfrm>
-            <a:off x="457200" y="1097280"/>
-            <a:ext cx="8229600" cy="914400"/>
+          <p:cNvPr id="2" name="Shape 0"/>
+          <p:cNvSpPr/>
+          <p:nvPr/>
+        </p:nvSpPr>
+        <p:spPr>
+          <a:xfrm>
+            <a:off x="0" y="0"/>
+            <a:ext cx="9144000" cy="566928"/>
+          </a:xfrm>
+          <a:prstGeom prst="rect">
+            <a:avLst/>
+          </a:prstGeom>
+          <a:solidFill>
+            <a:srgbClr val="5CB85C"/>
+          </a:solidFill>
+          <a:ln/>
+        </p:spPr>
+      </p:sp>
+      <p:sp>
+        <p:nvSpPr>
+          <p:cNvPr id="3" name="Text 1"/>
+          <p:cNvSpPr/>
+          <p:nvPr/>
+        </p:nvSpPr>
+        <p:spPr>
+          <a:xfrm>
+            <a:off x="365760" y="54864"/>
+            <a:ext cx="8412480" cy="457200"/>
+          </a:xfrm>
+          <a:prstGeom prst="rect">
+            <a:avLst/>
+          </a:prstGeom>
+          <a:noFill/>
+          <a:ln/>
+        </p:spPr>
+        <p:txBody>
+          <a:bodyPr wrap="square" lIns="0" tIns="0" rIns="0" bIns="0" rtlCol="0" anchor="ctr"/>
+          <a:lstStyle/>
+          <a:p>
+            <a:pPr indent="0" marL="0">
+              <a:buNone/>
+            </a:pPr>
+            <a:r>
+              <a:rPr lang="en-US" sz="2200" b="1" dirty="0">
+                <a:solidFill>
+                  <a:srgbClr val="FFFFFF"/>
+                </a:solidFill>
+                <a:latin typeface="Calibri" pitchFamily="34" charset="0"/>
+                <a:ea typeface="Calibri" pitchFamily="34" charset="-122"/>
+                <a:cs typeface="Calibri" pitchFamily="34" charset="-120"/>
+              </a:rPr>
+              <a:t>🌱  Morphology</a:t>
+            </a:r>
+            <a:endParaRPr lang="en-US" sz="2200" dirty="0"/>
+          </a:p>
+        </p:txBody>
+      </p:sp>
+      <p:sp>
+        <p:nvSpPr>
+          <p:cNvPr id="4" name="Text 2"/>
+          <p:cNvSpPr/>
+          <p:nvPr/>
+        </p:nvSpPr>
+        <p:spPr>
+          <a:xfrm>
+            <a:off x="365760" y="804672"/>
+            <a:ext cx="8229600" cy="237744"/>
+          </a:xfrm>
+          <a:prstGeom prst="rect">
+            <a:avLst/>
+          </a:prstGeom>
+          <a:noFill/>
+          <a:ln/>
+        </p:spPr>
+        <p:txBody>
+          <a:bodyPr wrap="square" lIns="0" tIns="0" rIns="0" bIns="0" rtlCol="0" anchor="ctr"/>
+          <a:lstStyle/>
+          <a:p>
+            <a:pPr indent="0" marL="0">
+              <a:buNone/>
+            </a:pPr>
+            <a:r>
+              <a:rPr lang="en-US" sz="1100" b="1" spc="100" kern="0" dirty="0">
+                <a:solidFill>
+                  <a:srgbClr val="8B6FC0"/>
+                </a:solidFill>
+                <a:latin typeface="Calibri" pitchFamily="34" charset="0"/>
+                <a:ea typeface="Calibri" pitchFamily="34" charset="-122"/>
+                <a:cs typeface="Calibri" pitchFamily="34" charset="-120"/>
+              </a:rPr>
+              <a:t>PREFIX MIS- MEANS WRONG</a:t>
+            </a:r>
+            <a:endParaRPr lang="en-US" sz="1100" dirty="0"/>
+          </a:p>
+        </p:txBody>
+      </p:sp>
+      <p:sp>
+        <p:nvSpPr>
+          <p:cNvPr id="5" name="Shape 3"/>
+          <p:cNvSpPr/>
+          <p:nvPr/>
+        </p:nvSpPr>
+        <p:spPr>
+          <a:xfrm>
+            <a:off x="365760" y="1097280"/>
+            <a:ext cx="8412480" cy="621792"/>
           </a:xfrm>
           <a:prstGeom prst="roundRect">
             <a:avLst>
-              <a:gd name="adj" fmla="val 10000"/>
+              <a:gd name="adj" fmla="val 14706"/>
             </a:avLst>
           </a:prstGeom>
           <a:solidFill>
-            <a:srgbClr val="E8F8EF"/>
+            <a:srgbClr val="F0E8FF"/>
           </a:solidFill>
-          <a:ln w="12700">
-            <a:solidFill>
-              <a:srgbClr val="34B76F"/>
-            </a:solidFill>
-            <a:prstDash val="solid"/>
-          </a:ln>
+          <a:ln/>
           <a:effectLst>
             <a:outerShdw sx="100000" sy="100000" kx="0" ky="0" algn="bl" rotWithShape="0" blurRad="101600" dist="38100" dir="2700000">
               <a:srgbClr val="000000">
@@ -6108,30 +6946,30 @@
       </p:sp>
       <p:sp>
         <p:nvSpPr>
-          <p:cNvPr id="5" name="Text 3"/>
-          <p:cNvSpPr/>
-          <p:nvPr/>
-        </p:nvSpPr>
-        <p:spPr>
-          <a:xfrm>
-            <a:off x="640080" y="1207008"/>
-            <a:ext cx="7863840" cy="685800"/>
-          </a:xfrm>
-          <a:prstGeom prst="rect">
-            <a:avLst/>
-          </a:prstGeom>
-          <a:noFill/>
-          <a:ln/>
-        </p:spPr>
-        <p:txBody>
-          <a:bodyPr wrap="square" lIns="0" tIns="0" rIns="0" bIns="0" rtlCol="0" anchor="ctr"/>
-          <a:lstStyle/>
-          <a:p>
-            <a:pPr indent="0" marL="0">
-              <a:buNone/>
-            </a:pPr>
-            <a:r>
-              <a:rPr lang="en-US" sz="1800" i="1" dirty="0">
+          <p:cNvPr id="6" name="Text 4"/>
+          <p:cNvSpPr/>
+          <p:nvPr/>
+        </p:nvSpPr>
+        <p:spPr>
+          <a:xfrm>
+            <a:off x="594360" y="1216152"/>
+            <a:ext cx="7863840" cy="384048"/>
+          </a:xfrm>
+          <a:prstGeom prst="rect">
+            <a:avLst/>
+          </a:prstGeom>
+          <a:noFill/>
+          <a:ln/>
+        </p:spPr>
+        <p:txBody>
+          <a:bodyPr wrap="square" lIns="0" tIns="0" rIns="0" bIns="0" rtlCol="0" anchor="ctr"/>
+          <a:lstStyle/>
+          <a:p>
+            <a:pPr indent="0" marL="0">
+              <a:buNone/>
+            </a:pPr>
+            <a:r>
+              <a:rPr lang="en-US" sz="1500" dirty="0">
                 <a:solidFill>
                   <a:srgbClr val="1E293B"/>
                 </a:solidFill>
@@ -6139,192 +6977,32 @@
                 <a:ea typeface="Calibri" pitchFamily="34" charset="-122"/>
                 <a:cs typeface="Calibri" pitchFamily="34" charset="-120"/>
               </a:rPr>
-              <a:t>When the letter reaches the right city, it goes to another post office.</a:t>
-            </a:r>
-            <a:endParaRPr lang="en-US" sz="1800" dirty="0"/>
-          </a:p>
-        </p:txBody>
-      </p:sp>
-    </p:spTree>
-  </p:cSld>
-  <p:clrMapOvr>
-    <a:masterClrMapping/>
-  </p:clrMapOvr>
-</p:sld>
-</file>
-
-<file path=ppt/slides/slide8.xml><?xml version="1.0" encoding="utf-8"?>
-<p:sld xmlns:a="http://schemas.openxmlformats.org/drawingml/2006/main" xmlns:r="http://schemas.openxmlformats.org/officeDocument/2006/relationships" xmlns:p="http://schemas.openxmlformats.org/presentationml/2006/main">
-  <p:cSld name="Slide 8">
-    <p:bg>
-      <p:bgPr>
-        <a:solidFill>
-          <a:srgbClr val="E5F7FC"/>
-        </a:solidFill>
-      </p:bgPr>
-    </p:bg>
-    <p:spTree>
-      <p:nvGrpSpPr>
-        <p:cNvPr id="1" name=""/>
-        <p:cNvGrpSpPr/>
-        <p:nvPr/>
-      </p:nvGrpSpPr>
-      <p:grpSpPr>
-        <a:xfrm>
-          <a:off x="0" y="0"/>
-          <a:ext cx="0" cy="0"/>
-          <a:chOff x="0" y="0"/>
-          <a:chExt cx="0" cy="0"/>
-        </a:xfrm>
-      </p:grpSpPr>
-      <p:sp>
-        <p:nvSpPr>
-          <p:cNvPr id="2" name="Text 0"/>
-          <p:cNvSpPr/>
-          <p:nvPr/>
-        </p:nvSpPr>
-        <p:spPr>
-          <a:xfrm>
-            <a:off x="365760" y="164592"/>
-            <a:ext cx="5943600" cy="566928"/>
-          </a:xfrm>
-          <a:prstGeom prst="rect">
-            <a:avLst/>
-          </a:prstGeom>
-          <a:noFill/>
-          <a:ln/>
-        </p:spPr>
-        <p:txBody>
-          <a:bodyPr wrap="square" lIns="0" tIns="0" rIns="0" bIns="0" rtlCol="0" anchor="ctr"/>
-          <a:lstStyle/>
-          <a:p>
-            <a:pPr algn="l" indent="0" marL="0">
-              <a:buNone/>
-            </a:pPr>
-            <a:r>
-              <a:rPr lang="en-US" sz="2800" b="1" dirty="0">
-                <a:solidFill>
-                  <a:srgbClr val="0E1C42"/>
-                </a:solidFill>
-                <a:latin typeface="Calibri" pitchFamily="34" charset="0"/>
-                <a:ea typeface="Calibri" pitchFamily="34" charset="-122"/>
-                <a:cs typeface="Calibri" pitchFamily="34" charset="-120"/>
-              </a:rPr>
-              <a:t>🔧 Fix-It Sentence — Now You Try</a:t>
-            </a:r>
-            <a:endParaRPr lang="en-US" sz="2800" dirty="0"/>
-          </a:p>
-        </p:txBody>
-      </p:sp>
-      <p:sp>
-        <p:nvSpPr>
-          <p:cNvPr id="3" name="Shape 1"/>
-          <p:cNvSpPr/>
-          <p:nvPr/>
-        </p:nvSpPr>
-        <p:spPr>
-          <a:xfrm>
-            <a:off x="365760" y="749808"/>
-            <a:ext cx="8412480" cy="0"/>
-          </a:xfrm>
-          <a:prstGeom prst="line">
-            <a:avLst/>
-          </a:prstGeom>
-          <a:noFill/>
-          <a:ln w="19050">
-            <a:solidFill>
-              <a:srgbClr val="5CB85C"/>
-            </a:solidFill>
-            <a:prstDash val="solid"/>
-          </a:ln>
-        </p:spPr>
-      </p:sp>
-      <p:sp>
-        <p:nvSpPr>
-          <p:cNvPr id="4" name="Shape 2"/>
-          <p:cNvSpPr/>
-          <p:nvPr/>
-        </p:nvSpPr>
-        <p:spPr>
-          <a:xfrm>
-            <a:off x="6492240" y="173736"/>
-            <a:ext cx="2286000" cy="502920"/>
+              <a:t>🌱  mis- + read = misread — to read wrong</a:t>
+            </a:r>
+            <a:endParaRPr lang="en-US" sz="1500" dirty="0"/>
+          </a:p>
+        </p:txBody>
+      </p:sp>
+      <p:sp>
+        <p:nvSpPr>
+          <p:cNvPr id="7" name="Shape 5"/>
+          <p:cNvSpPr/>
+          <p:nvPr/>
+        </p:nvSpPr>
+        <p:spPr>
+          <a:xfrm>
+            <a:off x="365760" y="1792224"/>
+            <a:ext cx="8412480" cy="621792"/>
           </a:xfrm>
           <a:prstGeom prst="roundRect">
             <a:avLst>
-              <a:gd name="adj" fmla="val 21818"/>
+              <a:gd name="adj" fmla="val 14706"/>
             </a:avLst>
           </a:prstGeom>
           <a:solidFill>
-            <a:srgbClr val="5CB85C"/>
+            <a:srgbClr val="F8F4FF"/>
           </a:solidFill>
           <a:ln/>
-        </p:spPr>
-      </p:sp>
-      <p:sp>
-        <p:nvSpPr>
-          <p:cNvPr id="5" name="Text 3"/>
-          <p:cNvSpPr/>
-          <p:nvPr/>
-        </p:nvSpPr>
-        <p:spPr>
-          <a:xfrm>
-            <a:off x="6492240" y="173736"/>
-            <a:ext cx="2286000" cy="502920"/>
-          </a:xfrm>
-          <a:prstGeom prst="rect">
-            <a:avLst/>
-          </a:prstGeom>
-          <a:noFill/>
-          <a:ln/>
-        </p:spPr>
-        <p:txBody>
-          <a:bodyPr wrap="square" lIns="0" tIns="0" rIns="0" bIns="0" rtlCol="0" anchor="ctr"/>
-          <a:lstStyle/>
-          <a:p>
-            <a:pPr algn="ctr" indent="0" marL="0">
-              <a:buNone/>
-            </a:pPr>
-            <a:r>
-              <a:rPr lang="en-US" sz="1100" b="1" dirty="0">
-                <a:solidFill>
-                  <a:srgbClr val="0E1C42"/>
-                </a:solidFill>
-                <a:latin typeface="Calibri" pitchFamily="34" charset="0"/>
-                <a:ea typeface="Calibri" pitchFamily="34" charset="-122"/>
-                <a:cs typeface="Calibri" pitchFamily="34" charset="-120"/>
-              </a:rPr>
-              <a:t>CHAT PROMPT</a:t>
-            </a:r>
-            <a:endParaRPr lang="en-US" sz="1100" dirty="0"/>
-          </a:p>
-        </p:txBody>
-      </p:sp>
-      <p:sp>
-        <p:nvSpPr>
-          <p:cNvPr id="6" name="Shape 4"/>
-          <p:cNvSpPr/>
-          <p:nvPr/>
-        </p:nvSpPr>
-        <p:spPr>
-          <a:xfrm>
-            <a:off x="457200" y="1005840"/>
-            <a:ext cx="8229600" cy="640080"/>
-          </a:xfrm>
-          <a:prstGeom prst="roundRect">
-            <a:avLst>
-              <a:gd name="adj" fmla="val 14286"/>
-            </a:avLst>
-          </a:prstGeom>
-          <a:solidFill>
-            <a:srgbClr val="F8FAFC"/>
-          </a:solidFill>
-          <a:ln w="12700">
-            <a:solidFill>
-              <a:srgbClr val="C7922C"/>
-            </a:solidFill>
-            <a:prstDash val="solid"/>
-          </a:ln>
           <a:effectLst>
             <a:outerShdw sx="100000" sy="100000" kx="0" ky="0" algn="bl" rotWithShape="0" blurRad="101600" dist="38100" dir="2700000">
               <a:srgbClr val="000000">
@@ -6336,30 +7014,30 @@
       </p:sp>
       <p:sp>
         <p:nvSpPr>
-          <p:cNvPr id="7" name="Text 5"/>
-          <p:cNvSpPr/>
-          <p:nvPr/>
-        </p:nvSpPr>
-        <p:spPr>
-          <a:xfrm>
-            <a:off x="640080" y="1115568"/>
-            <a:ext cx="7863840" cy="411480"/>
-          </a:xfrm>
-          <a:prstGeom prst="rect">
-            <a:avLst/>
-          </a:prstGeom>
-          <a:noFill/>
-          <a:ln/>
-        </p:spPr>
-        <p:txBody>
-          <a:bodyPr wrap="square" lIns="0" tIns="0" rIns="0" bIns="0" rtlCol="0" anchor="ctr"/>
-          <a:lstStyle/>
-          <a:p>
-            <a:pPr indent="0" marL="0">
-              <a:buNone/>
-            </a:pPr>
-            <a:r>
-              <a:rPr lang="en-US" sz="1800" i="1" dirty="0">
+          <p:cNvPr id="8" name="Text 6"/>
+          <p:cNvSpPr/>
+          <p:nvPr/>
+        </p:nvSpPr>
+        <p:spPr>
+          <a:xfrm>
+            <a:off x="594360" y="1911096"/>
+            <a:ext cx="7863840" cy="384048"/>
+          </a:xfrm>
+          <a:prstGeom prst="rect">
+            <a:avLst/>
+          </a:prstGeom>
+          <a:noFill/>
+          <a:ln/>
+        </p:spPr>
+        <p:txBody>
+          <a:bodyPr wrap="square" lIns="0" tIns="0" rIns="0" bIns="0" rtlCol="0" anchor="ctr"/>
+          <a:lstStyle/>
+          <a:p>
+            <a:pPr indent="0" marL="0">
+              <a:buNone/>
+            </a:pPr>
+            <a:r>
+              <a:rPr lang="en-US" sz="1500" dirty="0">
                 <a:solidFill>
                   <a:srgbClr val="1E293B"/>
                 </a:solidFill>
@@ -6367,192 +7045,32 @@
                 <a:ea typeface="Calibri" pitchFamily="34" charset="-122"/>
                 <a:cs typeface="Calibri" pitchFamily="34" charset="-120"/>
               </a:rPr>
-              <a:t>after the letters are sorted by zip code they are loaded onto trucks trains or airplanes</a:t>
-            </a:r>
-            <a:endParaRPr lang="en-US" sz="1800" dirty="0"/>
-          </a:p>
-        </p:txBody>
-      </p:sp>
-    </p:spTree>
-  </p:cSld>
-  <p:clrMapOvr>
-    <a:masterClrMapping/>
-  </p:clrMapOvr>
-</p:sld>
-</file>
-
-<file path=ppt/slides/slide9.xml><?xml version="1.0" encoding="utf-8"?>
-<p:sld xmlns:a="http://schemas.openxmlformats.org/drawingml/2006/main" xmlns:r="http://schemas.openxmlformats.org/officeDocument/2006/relationships" xmlns:p="http://schemas.openxmlformats.org/presentationml/2006/main">
-  <p:cSld name="Slide 9">
-    <p:bg>
-      <p:bgPr>
-        <a:solidFill>
-          <a:srgbClr val="E5F7FC"/>
-        </a:solidFill>
-      </p:bgPr>
-    </p:bg>
-    <p:spTree>
-      <p:nvGrpSpPr>
-        <p:cNvPr id="1" name=""/>
-        <p:cNvGrpSpPr/>
-        <p:nvPr/>
-      </p:nvGrpSpPr>
-      <p:grpSpPr>
-        <a:xfrm>
-          <a:off x="0" y="0"/>
-          <a:ext cx="0" cy="0"/>
-          <a:chOff x="0" y="0"/>
-          <a:chExt cx="0" cy="0"/>
-        </a:xfrm>
-      </p:grpSpPr>
-      <p:sp>
-        <p:nvSpPr>
-          <p:cNvPr id="2" name="Text 0"/>
-          <p:cNvSpPr/>
-          <p:nvPr/>
-        </p:nvSpPr>
-        <p:spPr>
-          <a:xfrm>
-            <a:off x="365760" y="164592"/>
-            <a:ext cx="5943600" cy="566928"/>
-          </a:xfrm>
-          <a:prstGeom prst="rect">
-            <a:avLst/>
-          </a:prstGeom>
-          <a:noFill/>
-          <a:ln/>
-        </p:spPr>
-        <p:txBody>
-          <a:bodyPr wrap="square" lIns="0" tIns="0" rIns="0" bIns="0" rtlCol="0" anchor="ctr"/>
-          <a:lstStyle/>
-          <a:p>
-            <a:pPr algn="l" indent="0" marL="0">
-              <a:buNone/>
-            </a:pPr>
-            <a:r>
-              <a:rPr lang="en-US" sz="2800" b="1" dirty="0">
-                <a:solidFill>
-                  <a:srgbClr val="0E1C42"/>
-                </a:solidFill>
-                <a:latin typeface="Calibri" pitchFamily="34" charset="0"/>
-                <a:ea typeface="Calibri" pitchFamily="34" charset="-122"/>
-                <a:cs typeface="Calibri" pitchFamily="34" charset="-120"/>
-              </a:rPr>
-              <a:t>🔧 Fix-It Sentence — Answer Revealed</a:t>
-            </a:r>
-            <a:endParaRPr lang="en-US" sz="2800" dirty="0"/>
-          </a:p>
-        </p:txBody>
-      </p:sp>
-      <p:sp>
-        <p:nvSpPr>
-          <p:cNvPr id="3" name="Shape 1"/>
-          <p:cNvSpPr/>
-          <p:nvPr/>
-        </p:nvSpPr>
-        <p:spPr>
-          <a:xfrm>
-            <a:off x="365760" y="749808"/>
-            <a:ext cx="8412480" cy="0"/>
-          </a:xfrm>
-          <a:prstGeom prst="line">
-            <a:avLst/>
-          </a:prstGeom>
-          <a:noFill/>
-          <a:ln w="19050">
-            <a:solidFill>
-              <a:srgbClr val="5CB85C"/>
-            </a:solidFill>
-            <a:prstDash val="solid"/>
-          </a:ln>
-        </p:spPr>
-      </p:sp>
-      <p:sp>
-        <p:nvSpPr>
-          <p:cNvPr id="4" name="Shape 2"/>
-          <p:cNvSpPr/>
-          <p:nvPr/>
-        </p:nvSpPr>
-        <p:spPr>
-          <a:xfrm>
-            <a:off x="6492240" y="173736"/>
-            <a:ext cx="2286000" cy="502920"/>
+              <a:t>🌱  mis- + lead = mislead — to lead someone in the wrong direction</a:t>
+            </a:r>
+            <a:endParaRPr lang="en-US" sz="1500" dirty="0"/>
+          </a:p>
+        </p:txBody>
+      </p:sp>
+      <p:sp>
+        <p:nvSpPr>
+          <p:cNvPr id="9" name="Shape 7"/>
+          <p:cNvSpPr/>
+          <p:nvPr/>
+        </p:nvSpPr>
+        <p:spPr>
+          <a:xfrm>
+            <a:off x="365760" y="2487168"/>
+            <a:ext cx="8412480" cy="621792"/>
           </a:xfrm>
           <a:prstGeom prst="roundRect">
             <a:avLst>
-              <a:gd name="adj" fmla="val 21818"/>
+              <a:gd name="adj" fmla="val 14706"/>
             </a:avLst>
           </a:prstGeom>
           <a:solidFill>
-            <a:srgbClr val="5CB85C"/>
+            <a:srgbClr val="F0E8FF"/>
           </a:solidFill>
           <a:ln/>
-        </p:spPr>
-      </p:sp>
-      <p:sp>
-        <p:nvSpPr>
-          <p:cNvPr id="5" name="Text 3"/>
-          <p:cNvSpPr/>
-          <p:nvPr/>
-        </p:nvSpPr>
-        <p:spPr>
-          <a:xfrm>
-            <a:off x="6492240" y="173736"/>
-            <a:ext cx="2286000" cy="502920"/>
-          </a:xfrm>
-          <a:prstGeom prst="rect">
-            <a:avLst/>
-          </a:prstGeom>
-          <a:noFill/>
-          <a:ln/>
-        </p:spPr>
-        <p:txBody>
-          <a:bodyPr wrap="square" lIns="0" tIns="0" rIns="0" bIns="0" rtlCol="0" anchor="ctr"/>
-          <a:lstStyle/>
-          <a:p>
-            <a:pPr algn="ctr" indent="0" marL="0">
-              <a:buNone/>
-            </a:pPr>
-            <a:r>
-              <a:rPr lang="en-US" sz="1100" b="1" dirty="0">
-                <a:solidFill>
-                  <a:srgbClr val="0E1C42"/>
-                </a:solidFill>
-                <a:latin typeface="Calibri" pitchFamily="34" charset="0"/>
-                <a:ea typeface="Calibri" pitchFamily="34" charset="-122"/>
-                <a:cs typeface="Calibri" pitchFamily="34" charset="-120"/>
-              </a:rPr>
-              <a:t>CHAT PROMPT</a:t>
-            </a:r>
-            <a:endParaRPr lang="en-US" sz="1100" dirty="0"/>
-          </a:p>
-        </p:txBody>
-      </p:sp>
-      <p:sp>
-        <p:nvSpPr>
-          <p:cNvPr id="6" name="Shape 4"/>
-          <p:cNvSpPr/>
-          <p:nvPr/>
-        </p:nvSpPr>
-        <p:spPr>
-          <a:xfrm>
-            <a:off x="457200" y="1005840"/>
-            <a:ext cx="8229600" cy="640080"/>
-          </a:xfrm>
-          <a:prstGeom prst="roundRect">
-            <a:avLst>
-              <a:gd name="adj" fmla="val 14286"/>
-            </a:avLst>
-          </a:prstGeom>
-          <a:solidFill>
-            <a:srgbClr val="F8FAFC"/>
-          </a:solidFill>
-          <a:ln w="12700">
-            <a:solidFill>
-              <a:srgbClr val="C7922C"/>
-            </a:solidFill>
-            <a:prstDash val="solid"/>
-          </a:ln>
           <a:effectLst>
             <a:outerShdw sx="100000" sy="100000" kx="0" ky="0" algn="bl" rotWithShape="0" blurRad="101600" dist="38100" dir="2700000">
               <a:srgbClr val="000000">
@@ -6564,30 +7082,30 @@
       </p:sp>
       <p:sp>
         <p:nvSpPr>
-          <p:cNvPr id="7" name="Text 5"/>
-          <p:cNvSpPr/>
-          <p:nvPr/>
-        </p:nvSpPr>
-        <p:spPr>
-          <a:xfrm>
-            <a:off x="640080" y="1115568"/>
-            <a:ext cx="7863840" cy="411480"/>
-          </a:xfrm>
-          <a:prstGeom prst="rect">
-            <a:avLst/>
-          </a:prstGeom>
-          <a:noFill/>
-          <a:ln/>
-        </p:spPr>
-        <p:txBody>
-          <a:bodyPr wrap="square" lIns="0" tIns="0" rIns="0" bIns="0" rtlCol="0" anchor="ctr"/>
-          <a:lstStyle/>
-          <a:p>
-            <a:pPr indent="0" marL="0">
-              <a:buNone/>
-            </a:pPr>
-            <a:r>
-              <a:rPr lang="en-US" sz="1800" i="1" dirty="0">
+          <p:cNvPr id="10" name="Text 8"/>
+          <p:cNvSpPr/>
+          <p:nvPr/>
+        </p:nvSpPr>
+        <p:spPr>
+          <a:xfrm>
+            <a:off x="594360" y="2606040"/>
+            <a:ext cx="7863840" cy="384048"/>
+          </a:xfrm>
+          <a:prstGeom prst="rect">
+            <a:avLst/>
+          </a:prstGeom>
+          <a:noFill/>
+          <a:ln/>
+        </p:spPr>
+        <p:txBody>
+          <a:bodyPr wrap="square" lIns="0" tIns="0" rIns="0" bIns="0" rtlCol="0" anchor="ctr"/>
+          <a:lstStyle/>
+          <a:p>
+            <a:pPr indent="0" marL="0">
+              <a:buNone/>
+            </a:pPr>
+            <a:r>
+              <a:rPr lang="en-US" sz="1500" dirty="0">
                 <a:solidFill>
                   <a:srgbClr val="1E293B"/>
                 </a:solidFill>
@@ -6595,87 +7113,9 @@
                 <a:ea typeface="Calibri" pitchFamily="34" charset="-122"/>
                 <a:cs typeface="Calibri" pitchFamily="34" charset="-120"/>
               </a:rPr>
-              <a:t>after the letters are sorted by zip code they are loaded onto trucks trains or airplanes</a:t>
-            </a:r>
-            <a:endParaRPr lang="en-US" sz="1800" dirty="0"/>
-          </a:p>
-        </p:txBody>
-      </p:sp>
-      <p:sp>
-        <p:nvSpPr>
-          <p:cNvPr id="8" name="Text 6"/>
-          <p:cNvSpPr/>
-          <p:nvPr/>
-        </p:nvSpPr>
-        <p:spPr>
-          <a:xfrm>
-            <a:off x="457200" y="1737360"/>
-            <a:ext cx="8046720" cy="292608"/>
-          </a:xfrm>
-          <a:prstGeom prst="rect">
-            <a:avLst/>
-          </a:prstGeom>
-          <a:noFill/>
-          <a:ln/>
-        </p:spPr>
-        <p:txBody>
-          <a:bodyPr wrap="square" lIns="0" tIns="0" rIns="0" bIns="0" rtlCol="0" anchor="ctr"/>
-          <a:lstStyle/>
-          <a:p>
-            <a:pPr indent="0" marL="0">
-              <a:buNone/>
-            </a:pPr>
-            <a:r>
-              <a:rPr lang="en-US" sz="1100" b="1" spc="200" kern="0" dirty="0">
-                <a:solidFill>
-                  <a:srgbClr val="64748B"/>
-                </a:solidFill>
-                <a:latin typeface="Calibri" pitchFamily="34" charset="0"/>
-                <a:ea typeface="Calibri" pitchFamily="34" charset="-122"/>
-                <a:cs typeface="Calibri" pitchFamily="34" charset="-120"/>
-              </a:rPr>
-              <a:t>WHY</a:t>
-            </a:r>
-            <a:endParaRPr lang="en-US" sz="1100" dirty="0"/>
-          </a:p>
-        </p:txBody>
-      </p:sp>
-      <p:sp>
-        <p:nvSpPr>
-          <p:cNvPr id="9" name="Text 7"/>
-          <p:cNvSpPr/>
-          <p:nvPr/>
-        </p:nvSpPr>
-        <p:spPr>
-          <a:xfrm>
-            <a:off x="640080" y="2011680"/>
-            <a:ext cx="7863840" cy="502920"/>
-          </a:xfrm>
-          <a:prstGeom prst="rect">
-            <a:avLst/>
-          </a:prstGeom>
-          <a:noFill/>
-          <a:ln/>
-        </p:spPr>
-        <p:txBody>
-          <a:bodyPr wrap="square" lIns="0" tIns="0" rIns="0" bIns="0" rtlCol="0" anchor="ctr"/>
-          <a:lstStyle/>
-          <a:p>
-            <a:pPr indent="0" marL="0">
-              <a:buNone/>
-            </a:pPr>
-            <a:r>
-              <a:rPr lang="en-US" sz="1300" i="1" dirty="0">
-                <a:solidFill>
-                  <a:srgbClr val="64748B"/>
-                </a:solidFill>
-                <a:latin typeface="Calibri" pitchFamily="34" charset="0"/>
-                <a:ea typeface="Calibri" pitchFamily="34" charset="-122"/>
-                <a:cs typeface="Calibri" pitchFamily="34" charset="-120"/>
-              </a:rPr>
-              <a:t>After the letters are sorted by ZIP code , they are loaded onto trucks , trains , or airplanes .</a:t>
-            </a:r>
-            <a:endParaRPr lang="en-US" sz="1300" dirty="0"/>
+              <a:t>🌱  Practice: Match the word to its base!</a:t>
+            </a:r>
+            <a:endParaRPr lang="en-US" sz="1500" dirty="0"/>
           </a:p>
         </p:txBody>
       </p:sp>

--- a/Planning docs/Slides/lesson-6-2-teacher-slides.pptx
+++ b/Planning docs/Slides/lesson-6-2-teacher-slides.pptx
@@ -516,7 +516,7 @@
           <a:p>
             <a:r>
               <a:rPr lang="en-US" dirty="0"/>
-              <a:t>Lesson 6.2. Reading: 📰 Read: How Does a Letter Travel?.</a:t>
+              <a:t>Lesson 6.2. Reading: How Does a Letter Travel?.</a:t>
             </a:r>
             <a:endParaRPr lang="en-US" dirty="0"/>
           </a:p>
@@ -2231,7 +2231,7 @@
                 <a:ea typeface="Calibri" pitchFamily="34" charset="-122"/>
                 <a:cs typeface="Calibri" pitchFamily="34" charset="-120"/>
               </a:rPr>
-              <a:t>Lesson 6.2  ·  📰 Read: How Does a Letter Travel?</a:t>
+              <a:t>Lesson 6.2  ·  How Does a Letter Travel?</a:t>
             </a:r>
             <a:endParaRPr lang="en-US" sz="2000" dirty="0"/>
           </a:p>
@@ -4595,7 +4595,7 @@
                 <a:ea typeface="Calibri" pitchFamily="34" charset="-122"/>
                 <a:cs typeface="Calibri" pitchFamily="34" charset="-120"/>
               </a:rPr>
-              <a:t>📰 Read: How Does a Letter Travel?</a:t>
+              <a:t>How Does a Letter Travel?</a:t>
             </a:r>
             <a:endParaRPr lang="en-US" sz="2600" dirty="0"/>
           </a:p>
@@ -4673,24 +4673,7 @@
                 <a:ea typeface="Calibri" pitchFamily="34" charset="-122"/>
                 <a:cs typeface="Calibri" pitchFamily="34" charset="-120"/>
               </a:rPr>
-              <a:t>•  What happens to a letter between the moment you drop it in a mailbox and the moment someone opens it?</a:t>
-            </a:r>
-            <a:endParaRPr lang="en-US" sz="1500" dirty="0"/>
-          </a:p>
-          <a:p>
-            <a:pPr indent="0" marL="0">
-              <a:buNone/>
-            </a:pPr>
-            <a:r>
-              <a:rPr lang="en-US" sz="1500" dirty="0">
-                <a:solidFill>
-                  <a:srgbClr val="1E293B"/>
-                </a:solidFill>
-                <a:latin typeface="Calibri" pitchFamily="34" charset="0"/>
-                <a:ea typeface="Calibri" pitchFamily="34" charset="-122"/>
-                <a:cs typeface="Calibri" pitchFamily="34" charset="-120"/>
-              </a:rPr>
-              <a:t>•  The text says the whole trip can take one day for nearby mail or a week for far-away mail. Why do you think distance makes such a big difference?</a:t>
+              <a:t>•  Stop when the letter reaches the right city and goes to another post office. You have read half the journey. Is this article mainly about the mailbox, the ZIP code, or the whole trip? Name the central idea, and one detail that supports it.</a:t>
             </a:r>
             <a:endParaRPr lang="en-US" sz="1500" dirty="0"/>
           </a:p>
@@ -5846,7 +5829,7 @@
                 <a:ea typeface="Calibri" pitchFamily="34" charset="-122"/>
                 <a:cs typeface="Calibri" pitchFamily="34" charset="-120"/>
               </a:rPr>
-              <a:t>📰 Read: How Does a Letter Travel?</a:t>
+              <a:t>How Does a Letter Travel?</a:t>
             </a:r>
             <a:endParaRPr lang="en-US" sz="2000" dirty="0"/>
           </a:p>
